--- a/azure-update-customer-pptx/assets/template/azure-update-template.pptx
+++ b/azure-update-customer-pptx/assets/template/azure-update-template.pptx
@@ -5,10 +5,10 @@
     <p:sldMasterId id="2147483660" r:id="rId1"/>
   </p:sldMasterIdLst>
   <p:notesMasterIdLst>
-    <p:notesMasterId r:id="rId9"/>
+    <p:notesMasterId r:id="rId11"/>
   </p:notesMasterIdLst>
   <p:handoutMasterIdLst>
-    <p:handoutMasterId r:id="rId10"/>
+    <p:handoutMasterId r:id="rId12"/>
   </p:handoutMasterIdLst>
   <p:sldIdLst>
     <p:sldId id="364" r:id="rId2"/>
@@ -17,7 +17,9 @@
     <p:sldId id="2250" r:id="rId5"/>
     <p:sldId id="2253" r:id="rId6"/>
     <p:sldId id="2252" r:id="rId7"/>
-    <p:sldId id="368" r:id="rId8"/>
+    <p:sldId id="2256" r:id="rId8"/>
+    <p:sldId id="2257" r:id="rId9"/>
+    <p:sldId id="2258" r:id="rId10"/>
   </p:sldIdLst>
   <p:sldSz cx="12192000" cy="6858000"/>
   <p:notesSz cx="6807200" cy="9939338"/>
@@ -139,7 +141,9 @@
         <p14:section name="Appendix" id="{5CC4B07D-77CC-42A1-A83E-672FBCFB0A8E}">
           <p14:sldIdLst>
             <p14:sldId id="2252"/>
-            <p14:sldId id="368"/>
+            <p14:sldId id="2256"/>
+            <p14:sldId id="2257"/>
+            <p14:sldId id="2258"/>
           </p14:sldIdLst>
         </p14:section>
         <p14:section name="Ending" id="{7FB61E70-6061-4DA1-8585-1004477898F0}">
@@ -168,1776 +172,6 @@
 </p:presentation>
 </file>
 
-<file path=ppt/changesInfos/changesInfo1.xml><?xml version="1.0" encoding="utf-8"?>
-<pc:chgInfo xmlns:a="http://schemas.openxmlformats.org/drawingml/2006/main" xmlns:r="http://schemas.openxmlformats.org/officeDocument/2006/relationships" xmlns:ac="http://schemas.microsoft.com/office/drawing/2013/main/command" xmlns:pc="http://schemas.microsoft.com/office/powerpoint/2013/main/command">
-  <pc:docChgLst>
-    <pc:chgData name="Tatsumi Yamamoto" userId="56ad09d3-0015-4845-9e7e-764f67d623d8" providerId="ADAL" clId="{3AD0E615-25BC-465B-92C0-7D5C430F80CC}"/>
-    <pc:docChg chg="custSel addSld delSld modSld sldOrd modMainMaster addSection modSection">
-      <pc:chgData name="Tatsumi Yamamoto" userId="56ad09d3-0015-4845-9e7e-764f67d623d8" providerId="ADAL" clId="{3AD0E615-25BC-465B-92C0-7D5C430F80CC}" dt="2026-07-03T13:54:32.959" v="2419" actId="1076"/>
-      <pc:docMkLst>
-        <pc:docMk/>
-      </pc:docMkLst>
-      <pc:sldChg chg="addSp delSp modSp mod modTransition">
-        <pc:chgData name="Tatsumi Yamamoto" userId="56ad09d3-0015-4845-9e7e-764f67d623d8" providerId="ADAL" clId="{3AD0E615-25BC-465B-92C0-7D5C430F80CC}" dt="2026-07-03T07:48:10.052" v="2412"/>
-        <pc:sldMkLst>
-          <pc:docMk/>
-          <pc:sldMk cId="2190255553" sldId="364"/>
-        </pc:sldMkLst>
-        <pc:spChg chg="mod">
-          <ac:chgData name="Tatsumi Yamamoto" userId="56ad09d3-0015-4845-9e7e-764f67d623d8" providerId="ADAL" clId="{3AD0E615-25BC-465B-92C0-7D5C430F80CC}" dt="2026-07-03T07:48:10.052" v="2412"/>
-          <ac:spMkLst>
-            <pc:docMk/>
-            <pc:sldMk cId="2190255553" sldId="364"/>
-            <ac:spMk id="2" creationId="{00000000-0000-0000-0000-000000000000}"/>
-          </ac:spMkLst>
-        </pc:spChg>
-        <pc:spChg chg="mod">
-          <ac:chgData name="Tatsumi Yamamoto" userId="56ad09d3-0015-4845-9e7e-764f67d623d8" providerId="ADAL" clId="{3AD0E615-25BC-465B-92C0-7D5C430F80CC}" dt="2026-07-03T07:48:10.052" v="2412"/>
-          <ac:spMkLst>
-            <pc:docMk/>
-            <pc:sldMk cId="2190255553" sldId="364"/>
-            <ac:spMk id="3" creationId="{00000000-0000-0000-0000-000000000000}"/>
-          </ac:spMkLst>
-        </pc:spChg>
-        <pc:spChg chg="add mod">
-          <ac:chgData name="Tatsumi Yamamoto" userId="56ad09d3-0015-4845-9e7e-764f67d623d8" providerId="ADAL" clId="{3AD0E615-25BC-465B-92C0-7D5C430F80CC}" dt="2026-07-03T07:48:10.052" v="2412"/>
-          <ac:spMkLst>
-            <pc:docMk/>
-            <pc:sldMk cId="2190255553" sldId="364"/>
-            <ac:spMk id="4" creationId="{0F9F7457-5267-E6C2-696D-7F1AF2A25542}"/>
-          </ac:spMkLst>
-        </pc:spChg>
-        <pc:spChg chg="add del mod">
-          <ac:chgData name="Tatsumi Yamamoto" userId="56ad09d3-0015-4845-9e7e-764f67d623d8" providerId="ADAL" clId="{3AD0E615-25BC-465B-92C0-7D5C430F80CC}" dt="2026-07-03T07:39:51.991" v="2125"/>
-          <ac:spMkLst>
-            <pc:docMk/>
-            <pc:sldMk cId="2190255553" sldId="364"/>
-            <ac:spMk id="4" creationId="{61BF5EB3-AA59-2D9E-1DC7-BF72E393B327}"/>
-          </ac:spMkLst>
-        </pc:spChg>
-        <pc:spChg chg="add del mod">
-          <ac:chgData name="Tatsumi Yamamoto" userId="56ad09d3-0015-4845-9e7e-764f67d623d8" providerId="ADAL" clId="{3AD0E615-25BC-465B-92C0-7D5C430F80CC}" dt="2026-07-03T07:48:10.052" v="2412"/>
-          <ac:spMkLst>
-            <pc:docMk/>
-            <pc:sldMk cId="2190255553" sldId="364"/>
-            <ac:spMk id="5" creationId="{B2ADE716-4B6D-A359-3B49-8438E9A9D746}"/>
-          </ac:spMkLst>
-        </pc:spChg>
-        <pc:spChg chg="add del mod">
-          <ac:chgData name="Tatsumi Yamamoto" userId="56ad09d3-0015-4845-9e7e-764f67d623d8" providerId="ADAL" clId="{3AD0E615-25BC-465B-92C0-7D5C430F80CC}" dt="2026-07-03T07:48:10.052" v="2412"/>
-          <ac:spMkLst>
-            <pc:docMk/>
-            <pc:sldMk cId="2190255553" sldId="364"/>
-            <ac:spMk id="6" creationId="{13BC79B8-6089-BFE0-FE9E-BB65B575E9AB}"/>
-          </ac:spMkLst>
-        </pc:spChg>
-        <pc:spChg chg="add mod">
-          <ac:chgData name="Tatsumi Yamamoto" userId="56ad09d3-0015-4845-9e7e-764f67d623d8" providerId="ADAL" clId="{3AD0E615-25BC-465B-92C0-7D5C430F80CC}" dt="2026-07-03T07:48:10.052" v="2412"/>
-          <ac:spMkLst>
-            <pc:docMk/>
-            <pc:sldMk cId="2190255553" sldId="364"/>
-            <ac:spMk id="7" creationId="{8C8A2685-EB9E-127E-BC7A-AED78AD77A43}"/>
-          </ac:spMkLst>
-        </pc:spChg>
-        <pc:spChg chg="add del mod">
-          <ac:chgData name="Tatsumi Yamamoto" userId="56ad09d3-0015-4845-9e7e-764f67d623d8" providerId="ADAL" clId="{3AD0E615-25BC-465B-92C0-7D5C430F80CC}" dt="2026-07-03T05:19:08.292" v="1003"/>
-          <ac:spMkLst>
-            <pc:docMk/>
-            <pc:sldMk cId="2190255553" sldId="364"/>
-            <ac:spMk id="14" creationId="{01F6C44B-14DE-716F-714A-6E60BBD88D9D}"/>
-          </ac:spMkLst>
-        </pc:spChg>
-        <pc:spChg chg="add del mod">
-          <ac:chgData name="Tatsumi Yamamoto" userId="56ad09d3-0015-4845-9e7e-764f67d623d8" providerId="ADAL" clId="{3AD0E615-25BC-465B-92C0-7D5C430F80CC}" dt="2026-07-03T05:19:08.276" v="1002"/>
-          <ac:spMkLst>
-            <pc:docMk/>
-            <pc:sldMk cId="2190255553" sldId="364"/>
-            <ac:spMk id="20" creationId="{46F758F8-A416-5B9B-C100-D37839C7701B}"/>
-          </ac:spMkLst>
-        </pc:spChg>
-        <pc:spChg chg="add del mod">
-          <ac:chgData name="Tatsumi Yamamoto" userId="56ad09d3-0015-4845-9e7e-764f67d623d8" providerId="ADAL" clId="{3AD0E615-25BC-465B-92C0-7D5C430F80CC}" dt="2026-07-03T05:19:08.274" v="1001"/>
-          <ac:spMkLst>
-            <pc:docMk/>
-            <pc:sldMk cId="2190255553" sldId="364"/>
-            <ac:spMk id="21" creationId="{DD36EE25-55D3-51AC-855C-F9B84CDD8651}"/>
-          </ac:spMkLst>
-        </pc:spChg>
-        <pc:spChg chg="add del mod">
-          <ac:chgData name="Tatsumi Yamamoto" userId="56ad09d3-0015-4845-9e7e-764f67d623d8" providerId="ADAL" clId="{3AD0E615-25BC-465B-92C0-7D5C430F80CC}" dt="2026-07-03T05:19:08.267" v="998"/>
-          <ac:spMkLst>
-            <pc:docMk/>
-            <pc:sldMk cId="2190255553" sldId="364"/>
-            <ac:spMk id="24" creationId="{32205D93-B02E-0BDD-5D9E-58BC6C48B4B4}"/>
-          </ac:spMkLst>
-        </pc:spChg>
-        <pc:spChg chg="add del mod">
-          <ac:chgData name="Tatsumi Yamamoto" userId="56ad09d3-0015-4845-9e7e-764f67d623d8" providerId="ADAL" clId="{3AD0E615-25BC-465B-92C0-7D5C430F80CC}" dt="2026-07-03T05:19:08.260" v="996"/>
-          <ac:spMkLst>
-            <pc:docMk/>
-            <pc:sldMk cId="2190255553" sldId="364"/>
-            <ac:spMk id="25" creationId="{8B1E4865-3E49-07D1-24C1-D2B7959271A8}"/>
-          </ac:spMkLst>
-        </pc:spChg>
-        <pc:spChg chg="add del mod">
-          <ac:chgData name="Tatsumi Yamamoto" userId="56ad09d3-0015-4845-9e7e-764f67d623d8" providerId="ADAL" clId="{3AD0E615-25BC-465B-92C0-7D5C430F80CC}" dt="2026-07-03T05:19:08.257" v="995"/>
-          <ac:spMkLst>
-            <pc:docMk/>
-            <pc:sldMk cId="2190255553" sldId="364"/>
-            <ac:spMk id="26" creationId="{70CD2461-A7C5-B9A8-A062-AA8ABE0EC1A9}"/>
-          </ac:spMkLst>
-        </pc:spChg>
-        <pc:spChg chg="add del mod">
-          <ac:chgData name="Tatsumi Yamamoto" userId="56ad09d3-0015-4845-9e7e-764f67d623d8" providerId="ADAL" clId="{3AD0E615-25BC-465B-92C0-7D5C430F80CC}" dt="2026-07-03T05:19:08.252" v="993"/>
-          <ac:spMkLst>
-            <pc:docMk/>
-            <pc:sldMk cId="2190255553" sldId="364"/>
-            <ac:spMk id="27" creationId="{6D4BA999-54E7-BB6C-1B52-8816259C1DAB}"/>
-          </ac:spMkLst>
-        </pc:spChg>
-        <pc:picChg chg="add del mod">
-          <ac:chgData name="Tatsumi Yamamoto" userId="56ad09d3-0015-4845-9e7e-764f67d623d8" providerId="ADAL" clId="{3AD0E615-25BC-465B-92C0-7D5C430F80CC}" dt="2026-07-03T05:19:08.270" v="1000"/>
-          <ac:picMkLst>
-            <pc:docMk/>
-            <pc:sldMk cId="2190255553" sldId="364"/>
-            <ac:picMk id="23" creationId="{EE20E562-4334-1529-1950-5813D1BCCACB}"/>
-          </ac:picMkLst>
-        </pc:picChg>
-      </pc:sldChg>
-      <pc:sldChg chg="addSp delSp modSp">
-        <pc:chgData name="Tatsumi Yamamoto" userId="56ad09d3-0015-4845-9e7e-764f67d623d8" providerId="ADAL" clId="{3AD0E615-25BC-465B-92C0-7D5C430F80CC}" dt="2026-07-03T07:48:10.133" v="2418"/>
-        <pc:sldMkLst>
-          <pc:docMk/>
-          <pc:sldMk cId="2622561655" sldId="368"/>
-        </pc:sldMkLst>
-        <pc:spChg chg="add mod">
-          <ac:chgData name="Tatsumi Yamamoto" userId="56ad09d3-0015-4845-9e7e-764f67d623d8" providerId="ADAL" clId="{3AD0E615-25BC-465B-92C0-7D5C430F80CC}" dt="2026-07-03T07:48:10.133" v="2418"/>
-          <ac:spMkLst>
-            <pc:docMk/>
-            <pc:sldMk cId="2622561655" sldId="368"/>
-            <ac:spMk id="2" creationId="{4502ABF1-58DC-6336-E5D0-94F72FD37FA4}"/>
-          </ac:spMkLst>
-        </pc:spChg>
-        <pc:spChg chg="add del mod">
-          <ac:chgData name="Tatsumi Yamamoto" userId="56ad09d3-0015-4845-9e7e-764f67d623d8" providerId="ADAL" clId="{3AD0E615-25BC-465B-92C0-7D5C430F80CC}" dt="2026-07-03T07:39:52.016" v="2131"/>
-          <ac:spMkLst>
-            <pc:docMk/>
-            <pc:sldMk cId="2622561655" sldId="368"/>
-            <ac:spMk id="2" creationId="{E69EDB17-1294-59C7-4304-AA9031E5C451}"/>
-          </ac:spMkLst>
-        </pc:spChg>
-        <pc:spChg chg="add del mod">
-          <ac:chgData name="Tatsumi Yamamoto" userId="56ad09d3-0015-4845-9e7e-764f67d623d8" providerId="ADAL" clId="{3AD0E615-25BC-465B-92C0-7D5C430F80CC}" dt="2026-07-03T07:39:52.016" v="2131"/>
-          <ac:spMkLst>
-            <pc:docMk/>
-            <pc:sldMk cId="2622561655" sldId="368"/>
-            <ac:spMk id="3" creationId="{2A84A9CD-C208-1AE8-9EB9-08C0BB0F320C}"/>
-          </ac:spMkLst>
-        </pc:spChg>
-        <pc:spChg chg="add mod">
-          <ac:chgData name="Tatsumi Yamamoto" userId="56ad09d3-0015-4845-9e7e-764f67d623d8" providerId="ADAL" clId="{3AD0E615-25BC-465B-92C0-7D5C430F80CC}" dt="2026-07-03T07:48:10.133" v="2418"/>
-          <ac:spMkLst>
-            <pc:docMk/>
-            <pc:sldMk cId="2622561655" sldId="368"/>
-            <ac:spMk id="3" creationId="{7E4174DB-6566-C376-09A4-8B5D83A8A6C4}"/>
-          </ac:spMkLst>
-        </pc:spChg>
-        <pc:spChg chg="add del mod">
-          <ac:chgData name="Tatsumi Yamamoto" userId="56ad09d3-0015-4845-9e7e-764f67d623d8" providerId="ADAL" clId="{3AD0E615-25BC-465B-92C0-7D5C430F80CC}" dt="2026-07-03T07:48:10.133" v="2418"/>
-          <ac:spMkLst>
-            <pc:docMk/>
-            <pc:sldMk cId="2622561655" sldId="368"/>
-            <ac:spMk id="4" creationId="{D9E58BD0-A56D-6D1A-04C8-D11FC5B89735}"/>
-          </ac:spMkLst>
-        </pc:spChg>
-        <pc:spChg chg="add del mod">
-          <ac:chgData name="Tatsumi Yamamoto" userId="56ad09d3-0015-4845-9e7e-764f67d623d8" providerId="ADAL" clId="{3AD0E615-25BC-465B-92C0-7D5C430F80CC}" dt="2026-07-03T07:48:10.133" v="2418"/>
-          <ac:spMkLst>
-            <pc:docMk/>
-            <pc:sldMk cId="2622561655" sldId="368"/>
-            <ac:spMk id="5" creationId="{11217DAB-D360-8CC0-9555-E18F90AC8871}"/>
-          </ac:spMkLst>
-        </pc:spChg>
-        <pc:spChg chg="add del mod">
-          <ac:chgData name="Tatsumi Yamamoto" userId="56ad09d3-0015-4845-9e7e-764f67d623d8" providerId="ADAL" clId="{3AD0E615-25BC-465B-92C0-7D5C430F80CC}" dt="2026-07-03T07:48:10.133" v="2418"/>
-          <ac:spMkLst>
-            <pc:docMk/>
-            <pc:sldMk cId="2622561655" sldId="368"/>
-            <ac:spMk id="6" creationId="{1CC7D2C7-6E3E-3B2A-8FFC-88C85728FCB1}"/>
-          </ac:spMkLst>
-        </pc:spChg>
-        <pc:spChg chg="add del mod">
-          <ac:chgData name="Tatsumi Yamamoto" userId="56ad09d3-0015-4845-9e7e-764f67d623d8" providerId="ADAL" clId="{3AD0E615-25BC-465B-92C0-7D5C430F80CC}" dt="2026-07-03T07:48:10.133" v="2418"/>
-          <ac:spMkLst>
-            <pc:docMk/>
-            <pc:sldMk cId="2622561655" sldId="368"/>
-            <ac:spMk id="7" creationId="{60A8794D-D9F5-A022-0A62-DE0089BC29DA}"/>
-          </ac:spMkLst>
-        </pc:spChg>
-        <pc:spChg chg="add del mod">
-          <ac:chgData name="Tatsumi Yamamoto" userId="56ad09d3-0015-4845-9e7e-764f67d623d8" providerId="ADAL" clId="{3AD0E615-25BC-465B-92C0-7D5C430F80CC}" dt="2026-07-03T07:48:10.133" v="2418"/>
-          <ac:spMkLst>
-            <pc:docMk/>
-            <pc:sldMk cId="2622561655" sldId="368"/>
-            <ac:spMk id="8" creationId="{8B32F43C-D6A2-2DF4-97E5-8DE9DDA89914}"/>
-          </ac:spMkLst>
-        </pc:spChg>
-        <pc:spChg chg="add mod">
-          <ac:chgData name="Tatsumi Yamamoto" userId="56ad09d3-0015-4845-9e7e-764f67d623d8" providerId="ADAL" clId="{3AD0E615-25BC-465B-92C0-7D5C430F80CC}" dt="2026-07-03T07:48:10.133" v="2418"/>
-          <ac:spMkLst>
-            <pc:docMk/>
-            <pc:sldMk cId="2622561655" sldId="368"/>
-            <ac:spMk id="9" creationId="{BE5BEA4E-97EB-DC0D-EE0F-6B290EDA686F}"/>
-          </ac:spMkLst>
-        </pc:spChg>
-        <pc:spChg chg="add mod">
-          <ac:chgData name="Tatsumi Yamamoto" userId="56ad09d3-0015-4845-9e7e-764f67d623d8" providerId="ADAL" clId="{3AD0E615-25BC-465B-92C0-7D5C430F80CC}" dt="2026-07-03T07:48:10.133" v="2418"/>
-          <ac:spMkLst>
-            <pc:docMk/>
-            <pc:sldMk cId="2622561655" sldId="368"/>
-            <ac:spMk id="10" creationId="{0522416F-1BD4-10D9-E95D-2969D495DDED}"/>
-          </ac:spMkLst>
-        </pc:spChg>
-        <pc:spChg chg="add mod">
-          <ac:chgData name="Tatsumi Yamamoto" userId="56ad09d3-0015-4845-9e7e-764f67d623d8" providerId="ADAL" clId="{3AD0E615-25BC-465B-92C0-7D5C430F80CC}" dt="2026-07-03T07:48:10.133" v="2418"/>
-          <ac:spMkLst>
-            <pc:docMk/>
-            <pc:sldMk cId="2622561655" sldId="368"/>
-            <ac:spMk id="11" creationId="{37FBAFA2-03F7-238F-F2B3-CE6135C2332F}"/>
-          </ac:spMkLst>
-        </pc:spChg>
-      </pc:sldChg>
-      <pc:sldChg chg="addSp delSp modSp mod">
-        <pc:chgData name="Tatsumi Yamamoto" userId="56ad09d3-0015-4845-9e7e-764f67d623d8" providerId="ADAL" clId="{3AD0E615-25BC-465B-92C0-7D5C430F80CC}" dt="2026-07-03T07:48:10.095" v="2415"/>
-        <pc:sldMkLst>
-          <pc:docMk/>
-          <pc:sldMk cId="2273597238" sldId="2250"/>
-        </pc:sldMkLst>
-        <pc:spChg chg="mod">
-          <ac:chgData name="Tatsumi Yamamoto" userId="56ad09d3-0015-4845-9e7e-764f67d623d8" providerId="ADAL" clId="{3AD0E615-25BC-465B-92C0-7D5C430F80CC}" dt="2026-07-03T07:48:10.095" v="2415"/>
-          <ac:spMkLst>
-            <pc:docMk/>
-            <pc:sldMk cId="2273597238" sldId="2250"/>
-            <ac:spMk id="2" creationId="{8325BC48-9427-0E23-EBD1-A9478ECA2D05}"/>
-          </ac:spMkLst>
-        </pc:spChg>
-        <pc:spChg chg="del mod">
-          <ac:chgData name="Tatsumi Yamamoto" userId="56ad09d3-0015-4845-9e7e-764f67d623d8" providerId="ADAL" clId="{3AD0E615-25BC-465B-92C0-7D5C430F80CC}" dt="2026-07-03T05:19:08.463" v="1040"/>
-          <ac:spMkLst>
-            <pc:docMk/>
-            <pc:sldMk cId="2273597238" sldId="2250"/>
-            <ac:spMk id="3" creationId="{CC29B726-C523-D9D5-B568-B1B4227BCA3D}"/>
-          </ac:spMkLst>
-        </pc:spChg>
-        <pc:spChg chg="add del mod">
-          <ac:chgData name="Tatsumi Yamamoto" userId="56ad09d3-0015-4845-9e7e-764f67d623d8" providerId="ADAL" clId="{3AD0E615-25BC-465B-92C0-7D5C430F80CC}" dt="2026-07-03T07:48:10.095" v="2415"/>
-          <ac:spMkLst>
-            <pc:docMk/>
-            <pc:sldMk cId="2273597238" sldId="2250"/>
-            <ac:spMk id="3" creationId="{DBB3E51E-1888-289D-A4B5-F86B4DAF18BA}"/>
-          </ac:spMkLst>
-        </pc:spChg>
-        <pc:spChg chg="add mod">
-          <ac:chgData name="Tatsumi Yamamoto" userId="56ad09d3-0015-4845-9e7e-764f67d623d8" providerId="ADAL" clId="{3AD0E615-25BC-465B-92C0-7D5C430F80CC}" dt="2026-07-03T07:48:10.095" v="2415"/>
-          <ac:spMkLst>
-            <pc:docMk/>
-            <pc:sldMk cId="2273597238" sldId="2250"/>
-            <ac:spMk id="4" creationId="{B7BA27A1-733C-3594-87F3-D393895DFDAD}"/>
-          </ac:spMkLst>
-        </pc:spChg>
-        <pc:spChg chg="add del mod">
-          <ac:chgData name="Tatsumi Yamamoto" userId="56ad09d3-0015-4845-9e7e-764f67d623d8" providerId="ADAL" clId="{3AD0E615-25BC-465B-92C0-7D5C430F80CC}" dt="2026-07-03T07:39:52.004" v="2128"/>
-          <ac:spMkLst>
-            <pc:docMk/>
-            <pc:sldMk cId="2273597238" sldId="2250"/>
-            <ac:spMk id="4" creationId="{F32900A1-7162-FF09-B0BC-C6FAEEB32FBA}"/>
-          </ac:spMkLst>
-        </pc:spChg>
-        <pc:spChg chg="del mod">
-          <ac:chgData name="Tatsumi Yamamoto" userId="56ad09d3-0015-4845-9e7e-764f67d623d8" providerId="ADAL" clId="{3AD0E615-25BC-465B-92C0-7D5C430F80CC}" dt="2026-07-03T05:19:08.466" v="1042"/>
-          <ac:spMkLst>
-            <pc:docMk/>
-            <pc:sldMk cId="2273597238" sldId="2250"/>
-            <ac:spMk id="5" creationId="{A5DF21D5-A22D-A931-79E5-3E811E5FF48C}"/>
-          </ac:spMkLst>
-        </pc:spChg>
-        <pc:spChg chg="mod">
-          <ac:chgData name="Tatsumi Yamamoto" userId="56ad09d3-0015-4845-9e7e-764f67d623d8" providerId="ADAL" clId="{3AD0E615-25BC-465B-92C0-7D5C430F80CC}" dt="2026-06-24T17:27:53.494" v="892" actId="947"/>
-          <ac:spMkLst>
-            <pc:docMk/>
-            <pc:sldMk cId="2273597238" sldId="2250"/>
-            <ac:spMk id="6" creationId="{54295C55-5BF1-EEBC-1EF0-EEEF740DF976}"/>
-          </ac:spMkLst>
-        </pc:spChg>
-      </pc:sldChg>
-      <pc:sldChg chg="addSp delSp modSp mod">
-        <pc:chgData name="Tatsumi Yamamoto" userId="56ad09d3-0015-4845-9e7e-764f67d623d8" providerId="ADAL" clId="{3AD0E615-25BC-465B-92C0-7D5C430F80CC}" dt="2026-07-03T07:48:10.120" v="2417"/>
-        <pc:sldMkLst>
-          <pc:docMk/>
-          <pc:sldMk cId="2633681987" sldId="2252"/>
-        </pc:sldMkLst>
-        <pc:spChg chg="mod">
-          <ac:chgData name="Tatsumi Yamamoto" userId="56ad09d3-0015-4845-9e7e-764f67d623d8" providerId="ADAL" clId="{3AD0E615-25BC-465B-92C0-7D5C430F80CC}" dt="2026-07-03T07:48:10.120" v="2417"/>
-          <ac:spMkLst>
-            <pc:docMk/>
-            <pc:sldMk cId="2633681987" sldId="2252"/>
-            <ac:spMk id="2" creationId="{A53E7B69-8828-C42E-D852-698DE0688829}"/>
-          </ac:spMkLst>
-        </pc:spChg>
-        <pc:spChg chg="add mod">
-          <ac:chgData name="Tatsumi Yamamoto" userId="56ad09d3-0015-4845-9e7e-764f67d623d8" providerId="ADAL" clId="{3AD0E615-25BC-465B-92C0-7D5C430F80CC}" dt="2026-07-03T07:48:10.120" v="2417"/>
-          <ac:spMkLst>
-            <pc:docMk/>
-            <pc:sldMk cId="2633681987" sldId="2252"/>
-            <ac:spMk id="3" creationId="{AC8630DF-B874-120C-6F8A-18B8ACEF9765}"/>
-          </ac:spMkLst>
-        </pc:spChg>
-        <pc:spChg chg="add del mod">
-          <ac:chgData name="Tatsumi Yamamoto" userId="56ad09d3-0015-4845-9e7e-764f67d623d8" providerId="ADAL" clId="{3AD0E615-25BC-465B-92C0-7D5C430F80CC}" dt="2026-07-03T07:48:10.120" v="2417"/>
-          <ac:spMkLst>
-            <pc:docMk/>
-            <pc:sldMk cId="2633681987" sldId="2252"/>
-            <ac:spMk id="4" creationId="{899BA745-E540-628D-A07E-EA81F430E738}"/>
-          </ac:spMkLst>
-        </pc:spChg>
-        <pc:spChg chg="del mod">
-          <ac:chgData name="Tatsumi Yamamoto" userId="56ad09d3-0015-4845-9e7e-764f67d623d8" providerId="ADAL" clId="{3AD0E615-25BC-465B-92C0-7D5C430F80CC}" dt="2026-07-03T05:20:13.557" v="1148"/>
-          <ac:spMkLst>
-            <pc:docMk/>
-            <pc:sldMk cId="2633681987" sldId="2252"/>
-            <ac:spMk id="6" creationId="{77EF80B5-6D2C-6A65-D5E7-0EC3E4A9A075}"/>
-          </ac:spMkLst>
-        </pc:spChg>
-        <pc:spChg chg="mod">
-          <ac:chgData name="Tatsumi Yamamoto" userId="56ad09d3-0015-4845-9e7e-764f67d623d8" providerId="ADAL" clId="{3AD0E615-25BC-465B-92C0-7D5C430F80CC}" dt="2026-06-24T15:48:34.639" v="857"/>
-          <ac:spMkLst>
-            <pc:docMk/>
-            <pc:sldMk cId="2633681987" sldId="2252"/>
-            <ac:spMk id="8" creationId="{C27AD692-C246-DD83-1A93-CCA70A0F00A5}"/>
-          </ac:spMkLst>
-        </pc:spChg>
-        <pc:spChg chg="mod">
-          <ac:chgData name="Tatsumi Yamamoto" userId="56ad09d3-0015-4845-9e7e-764f67d623d8" providerId="ADAL" clId="{3AD0E615-25BC-465B-92C0-7D5C430F80CC}" dt="2026-06-24T15:48:34.644" v="859"/>
-          <ac:spMkLst>
-            <pc:docMk/>
-            <pc:sldMk cId="2633681987" sldId="2252"/>
-            <ac:spMk id="9" creationId="{45C97C1D-A551-A42B-D2B2-9F91D927910B}"/>
-          </ac:spMkLst>
-        </pc:spChg>
-        <pc:spChg chg="mod">
-          <ac:chgData name="Tatsumi Yamamoto" userId="56ad09d3-0015-4845-9e7e-764f67d623d8" providerId="ADAL" clId="{3AD0E615-25BC-465B-92C0-7D5C430F80CC}" dt="2026-06-24T15:48:34.652" v="861"/>
-          <ac:spMkLst>
-            <pc:docMk/>
-            <pc:sldMk cId="2633681987" sldId="2252"/>
-            <ac:spMk id="10" creationId="{D8C28D5A-356B-64DF-54E9-09581F7D422C}"/>
-          </ac:spMkLst>
-        </pc:spChg>
-        <pc:spChg chg="mod">
-          <ac:chgData name="Tatsumi Yamamoto" userId="56ad09d3-0015-4845-9e7e-764f67d623d8" providerId="ADAL" clId="{3AD0E615-25BC-465B-92C0-7D5C430F80CC}" dt="2026-06-24T15:48:34.659" v="863"/>
-          <ac:spMkLst>
-            <pc:docMk/>
-            <pc:sldMk cId="2633681987" sldId="2252"/>
-            <ac:spMk id="11" creationId="{FB307C80-B22C-1CA3-1090-141A229A4526}"/>
-          </ac:spMkLst>
-        </pc:spChg>
-        <pc:spChg chg="mod">
-          <ac:chgData name="Tatsumi Yamamoto" userId="56ad09d3-0015-4845-9e7e-764f67d623d8" providerId="ADAL" clId="{3AD0E615-25BC-465B-92C0-7D5C430F80CC}" dt="2026-06-24T15:48:34.667" v="865"/>
-          <ac:spMkLst>
-            <pc:docMk/>
-            <pc:sldMk cId="2633681987" sldId="2252"/>
-            <ac:spMk id="12" creationId="{C8F34355-FC27-BCA9-E778-CDDBF312FBB1}"/>
-          </ac:spMkLst>
-        </pc:spChg>
-      </pc:sldChg>
-      <pc:sldChg chg="addSp delSp modSp mod">
-        <pc:chgData name="Tatsumi Yamamoto" userId="56ad09d3-0015-4845-9e7e-764f67d623d8" providerId="ADAL" clId="{3AD0E615-25BC-465B-92C0-7D5C430F80CC}" dt="2026-07-03T07:48:10.103" v="2416"/>
-        <pc:sldMkLst>
-          <pc:docMk/>
-          <pc:sldMk cId="614179310" sldId="2253"/>
-        </pc:sldMkLst>
-        <pc:spChg chg="mod">
-          <ac:chgData name="Tatsumi Yamamoto" userId="56ad09d3-0015-4845-9e7e-764f67d623d8" providerId="ADAL" clId="{3AD0E615-25BC-465B-92C0-7D5C430F80CC}" dt="2026-07-03T07:48:10.103" v="2416"/>
-          <ac:spMkLst>
-            <pc:docMk/>
-            <pc:sldMk cId="614179310" sldId="2253"/>
-            <ac:spMk id="2" creationId="{F768E623-3CEA-8576-3433-8C1ED588422A}"/>
-          </ac:spMkLst>
-        </pc:spChg>
-        <pc:spChg chg="del mod">
-          <ac:chgData name="Tatsumi Yamamoto" userId="56ad09d3-0015-4845-9e7e-764f67d623d8" providerId="ADAL" clId="{3AD0E615-25BC-465B-92C0-7D5C430F80CC}" dt="2026-07-03T05:19:08.492" v="1048"/>
-          <ac:spMkLst>
-            <pc:docMk/>
-            <pc:sldMk cId="614179310" sldId="2253"/>
-            <ac:spMk id="3" creationId="{6BCC8224-43BE-C158-7B2B-9E95B71A3827}"/>
-          </ac:spMkLst>
-        </pc:spChg>
-        <pc:spChg chg="add del mod">
-          <ac:chgData name="Tatsumi Yamamoto" userId="56ad09d3-0015-4845-9e7e-764f67d623d8" providerId="ADAL" clId="{3AD0E615-25BC-465B-92C0-7D5C430F80CC}" dt="2026-07-03T07:48:10.103" v="2416"/>
-          <ac:spMkLst>
-            <pc:docMk/>
-            <pc:sldMk cId="614179310" sldId="2253"/>
-            <ac:spMk id="3" creationId="{890441C9-F65A-F689-76CF-D67B53EE5F06}"/>
-          </ac:spMkLst>
-        </pc:spChg>
-        <pc:spChg chg="del mod">
-          <ac:chgData name="Tatsumi Yamamoto" userId="56ad09d3-0015-4845-9e7e-764f67d623d8" providerId="ADAL" clId="{3AD0E615-25BC-465B-92C0-7D5C430F80CC}" dt="2026-07-03T05:19:08.493" v="1050"/>
-          <ac:spMkLst>
-            <pc:docMk/>
-            <pc:sldMk cId="614179310" sldId="2253"/>
-            <ac:spMk id="5" creationId="{4F22780F-0221-800B-EE72-604D4A8EEC44}"/>
-          </ac:spMkLst>
-        </pc:spChg>
-        <pc:spChg chg="add mod">
-          <ac:chgData name="Tatsumi Yamamoto" userId="56ad09d3-0015-4845-9e7e-764f67d623d8" providerId="ADAL" clId="{3AD0E615-25BC-465B-92C0-7D5C430F80CC}" dt="2026-07-03T07:48:10.103" v="2416"/>
-          <ac:spMkLst>
-            <pc:docMk/>
-            <pc:sldMk cId="614179310" sldId="2253"/>
-            <ac:spMk id="5" creationId="{A2B77436-CB12-5223-D6E3-13D39776BFAD}"/>
-          </ac:spMkLst>
-        </pc:spChg>
-        <pc:spChg chg="del mod">
-          <ac:chgData name="Tatsumi Yamamoto" userId="56ad09d3-0015-4845-9e7e-764f67d623d8" providerId="ADAL" clId="{3AD0E615-25BC-465B-92C0-7D5C430F80CC}" dt="2026-07-03T05:19:08.481" v="1046"/>
-          <ac:spMkLst>
-            <pc:docMk/>
-            <pc:sldMk cId="614179310" sldId="2253"/>
-            <ac:spMk id="6" creationId="{7826599F-4061-41FE-1723-0ED0345440B3}"/>
-          </ac:spMkLst>
-        </pc:spChg>
-        <pc:spChg chg="add del mod">
-          <ac:chgData name="Tatsumi Yamamoto" userId="56ad09d3-0015-4845-9e7e-764f67d623d8" providerId="ADAL" clId="{3AD0E615-25BC-465B-92C0-7D5C430F80CC}" dt="2026-07-03T07:39:52.008" v="2129"/>
-          <ac:spMkLst>
-            <pc:docMk/>
-            <pc:sldMk cId="614179310" sldId="2253"/>
-            <ac:spMk id="7" creationId="{D3FF60AF-1974-D94D-AAED-F189DEE8D9A8}"/>
-          </ac:spMkLst>
-        </pc:spChg>
-        <pc:spChg chg="del mod">
-          <ac:chgData name="Tatsumi Yamamoto" userId="56ad09d3-0015-4845-9e7e-764f67d623d8" providerId="ADAL" clId="{3AD0E615-25BC-465B-92C0-7D5C430F80CC}" dt="2026-07-03T05:19:08.479" v="1044"/>
-          <ac:spMkLst>
-            <pc:docMk/>
-            <pc:sldMk cId="614179310" sldId="2253"/>
-            <ac:spMk id="9" creationId="{579C1251-327D-71A2-4438-9E3611B54558}"/>
-          </ac:spMkLst>
-        </pc:spChg>
-      </pc:sldChg>
-      <pc:sldChg chg="addSp delSp modSp add mod ord modTransition">
-        <pc:chgData name="Tatsumi Yamamoto" userId="56ad09d3-0015-4845-9e7e-764f67d623d8" providerId="ADAL" clId="{3AD0E615-25BC-465B-92C0-7D5C430F80CC}" dt="2026-07-03T07:48:10.070" v="2413"/>
-        <pc:sldMkLst>
-          <pc:docMk/>
-          <pc:sldMk cId="1725546567" sldId="2254"/>
-        </pc:sldMkLst>
-        <pc:spChg chg="mod">
-          <ac:chgData name="Tatsumi Yamamoto" userId="56ad09d3-0015-4845-9e7e-764f67d623d8" providerId="ADAL" clId="{3AD0E615-25BC-465B-92C0-7D5C430F80CC}" dt="2026-07-03T07:48:10.070" v="2413"/>
-          <ac:spMkLst>
-            <pc:docMk/>
-            <pc:sldMk cId="1725546567" sldId="2254"/>
-            <ac:spMk id="2" creationId="{00000000-0000-0000-0000-000000000000}"/>
-          </ac:spMkLst>
-        </pc:spChg>
-        <pc:spChg chg="mod">
-          <ac:chgData name="Tatsumi Yamamoto" userId="56ad09d3-0015-4845-9e7e-764f67d623d8" providerId="ADAL" clId="{3AD0E615-25BC-465B-92C0-7D5C430F80CC}" dt="2026-07-03T07:48:10.070" v="2413"/>
-          <ac:spMkLst>
-            <pc:docMk/>
-            <pc:sldMk cId="1725546567" sldId="2254"/>
-            <ac:spMk id="3" creationId="{00000000-0000-0000-0000-000000000000}"/>
-          </ac:spMkLst>
-        </pc:spChg>
-        <pc:spChg chg="add del mod">
-          <ac:chgData name="Tatsumi Yamamoto" userId="56ad09d3-0015-4845-9e7e-764f67d623d8" providerId="ADAL" clId="{3AD0E615-25BC-465B-92C0-7D5C430F80CC}" dt="2026-07-03T07:48:10.070" v="2413"/>
-          <ac:spMkLst>
-            <pc:docMk/>
-            <pc:sldMk cId="1725546567" sldId="2254"/>
-            <ac:spMk id="4" creationId="{3083FBAC-8C5F-0A33-36B0-92264B7ACEB4}"/>
-          </ac:spMkLst>
-        </pc:spChg>
-        <pc:spChg chg="add del mod">
-          <ac:chgData name="Tatsumi Yamamoto" userId="56ad09d3-0015-4845-9e7e-764f67d623d8" providerId="ADAL" clId="{3AD0E615-25BC-465B-92C0-7D5C430F80CC}" dt="2026-07-03T05:19:08.340" v="1015"/>
-          <ac:spMkLst>
-            <pc:docMk/>
-            <pc:sldMk cId="1725546567" sldId="2254"/>
-            <ac:spMk id="4" creationId="{CF8A801F-AA7A-865F-C2C9-94D46A2EEA4B}"/>
-          </ac:spMkLst>
-        </pc:spChg>
-        <pc:spChg chg="add del mod">
-          <ac:chgData name="Tatsumi Yamamoto" userId="56ad09d3-0015-4845-9e7e-764f67d623d8" providerId="ADAL" clId="{3AD0E615-25BC-465B-92C0-7D5C430F80CC}" dt="2026-07-03T05:19:08.325" v="1014"/>
-          <ac:spMkLst>
-            <pc:docMk/>
-            <pc:sldMk cId="1725546567" sldId="2254"/>
-            <ac:spMk id="5" creationId="{3697ECB0-9CB1-CC65-EA94-EA76FC23DE97}"/>
-          </ac:spMkLst>
-        </pc:spChg>
-        <pc:spChg chg="add del mod">
-          <ac:chgData name="Tatsumi Yamamoto" userId="56ad09d3-0015-4845-9e7e-764f67d623d8" providerId="ADAL" clId="{3AD0E615-25BC-465B-92C0-7D5C430F80CC}" dt="2026-07-03T07:48:10.070" v="2413"/>
-          <ac:spMkLst>
-            <pc:docMk/>
-            <pc:sldMk cId="1725546567" sldId="2254"/>
-            <ac:spMk id="5" creationId="{BCAC71D7-4F1A-90A6-D56A-6E142C85922A}"/>
-          </ac:spMkLst>
-        </pc:spChg>
-        <pc:spChg chg="add mod">
-          <ac:chgData name="Tatsumi Yamamoto" userId="56ad09d3-0015-4845-9e7e-764f67d623d8" providerId="ADAL" clId="{3AD0E615-25BC-465B-92C0-7D5C430F80CC}" dt="2026-07-03T07:48:10.070" v="2413"/>
-          <ac:spMkLst>
-            <pc:docMk/>
-            <pc:sldMk cId="1725546567" sldId="2254"/>
-            <ac:spMk id="6" creationId="{F6D7E7ED-9461-36D4-CB83-3047113FA55C}"/>
-          </ac:spMkLst>
-        </pc:spChg>
-        <pc:spChg chg="add del mod">
-          <ac:chgData name="Tatsumi Yamamoto" userId="56ad09d3-0015-4845-9e7e-764f67d623d8" providerId="ADAL" clId="{3AD0E615-25BC-465B-92C0-7D5C430F80CC}" dt="2026-07-03T05:19:08.322" v="1013"/>
-          <ac:spMkLst>
-            <pc:docMk/>
-            <pc:sldMk cId="1725546567" sldId="2254"/>
-            <ac:spMk id="6" creationId="{FC50C532-053A-C3DC-CD53-509FF35CE68F}"/>
-          </ac:spMkLst>
-        </pc:spChg>
-        <pc:spChg chg="add del mod">
-          <ac:chgData name="Tatsumi Yamamoto" userId="56ad09d3-0015-4845-9e7e-764f67d623d8" providerId="ADAL" clId="{3AD0E615-25BC-465B-92C0-7D5C430F80CC}" dt="2026-07-03T07:39:51.996" v="2126"/>
-          <ac:spMkLst>
-            <pc:docMk/>
-            <pc:sldMk cId="1725546567" sldId="2254"/>
-            <ac:spMk id="7" creationId="{5CDB1732-78BA-94B3-7556-0EB85DBE7764}"/>
-          </ac:spMkLst>
-        </pc:spChg>
-        <pc:spChg chg="add mod">
-          <ac:chgData name="Tatsumi Yamamoto" userId="56ad09d3-0015-4845-9e7e-764f67d623d8" providerId="ADAL" clId="{3AD0E615-25BC-465B-92C0-7D5C430F80CC}" dt="2026-07-03T07:48:10.070" v="2413"/>
-          <ac:spMkLst>
-            <pc:docMk/>
-            <pc:sldMk cId="1725546567" sldId="2254"/>
-            <ac:spMk id="7" creationId="{CEBFE6EF-CB0C-12AF-1E71-026DEDC8CD66}"/>
-          </ac:spMkLst>
-        </pc:spChg>
-        <pc:spChg chg="add del mod">
-          <ac:chgData name="Tatsumi Yamamoto" userId="56ad09d3-0015-4845-9e7e-764f67d623d8" providerId="ADAL" clId="{3AD0E615-25BC-465B-92C0-7D5C430F80CC}" dt="2026-07-03T05:19:08.314" v="1010"/>
-          <ac:spMkLst>
-            <pc:docMk/>
-            <pc:sldMk cId="1725546567" sldId="2254"/>
-            <ac:spMk id="9" creationId="{E8596B7A-C9F6-BF58-B67E-975855EC35CA}"/>
-          </ac:spMkLst>
-        </pc:spChg>
-        <pc:spChg chg="add del mod">
-          <ac:chgData name="Tatsumi Yamamoto" userId="56ad09d3-0015-4845-9e7e-764f67d623d8" providerId="ADAL" clId="{3AD0E615-25BC-465B-92C0-7D5C430F80CC}" dt="2026-07-03T05:19:08.311" v="1008"/>
-          <ac:spMkLst>
-            <pc:docMk/>
-            <pc:sldMk cId="1725546567" sldId="2254"/>
-            <ac:spMk id="10" creationId="{5210C5CF-1560-5801-338A-55A820212ACE}"/>
-          </ac:spMkLst>
-        </pc:spChg>
-        <pc:spChg chg="add del mod">
-          <ac:chgData name="Tatsumi Yamamoto" userId="56ad09d3-0015-4845-9e7e-764f67d623d8" providerId="ADAL" clId="{3AD0E615-25BC-465B-92C0-7D5C430F80CC}" dt="2026-07-03T05:19:08.306" v="1007"/>
-          <ac:spMkLst>
-            <pc:docMk/>
-            <pc:sldMk cId="1725546567" sldId="2254"/>
-            <ac:spMk id="11" creationId="{CB084B61-5AC6-BEFA-F8D0-448CBBDBB5B3}"/>
-          </ac:spMkLst>
-        </pc:spChg>
-        <pc:spChg chg="add del mod">
-          <ac:chgData name="Tatsumi Yamamoto" userId="56ad09d3-0015-4845-9e7e-764f67d623d8" providerId="ADAL" clId="{3AD0E615-25BC-465B-92C0-7D5C430F80CC}" dt="2026-07-03T05:19:08.303" v="1005"/>
-          <ac:spMkLst>
-            <pc:docMk/>
-            <pc:sldMk cId="1725546567" sldId="2254"/>
-            <ac:spMk id="12" creationId="{FA05AE3A-1D2C-498E-C0BE-74111027498D}"/>
-          </ac:spMkLst>
-        </pc:spChg>
-        <pc:picChg chg="add del mod">
-          <ac:chgData name="Tatsumi Yamamoto" userId="56ad09d3-0015-4845-9e7e-764f67d623d8" providerId="ADAL" clId="{3AD0E615-25BC-465B-92C0-7D5C430F80CC}" dt="2026-07-03T05:19:08.318" v="1012"/>
-          <ac:picMkLst>
-            <pc:docMk/>
-            <pc:sldMk cId="1725546567" sldId="2254"/>
-            <ac:picMk id="8" creationId="{5CFACE40-4FB8-B79F-B37A-BF293B0BCC5C}"/>
-          </ac:picMkLst>
-        </pc:picChg>
-      </pc:sldChg>
-      <pc:sldChg chg="addSp delSp modSp add mod ord modTransition">
-        <pc:chgData name="Tatsumi Yamamoto" userId="56ad09d3-0015-4845-9e7e-764f67d623d8" providerId="ADAL" clId="{3AD0E615-25BC-465B-92C0-7D5C430F80CC}" dt="2026-07-03T07:48:10.080" v="2414"/>
-        <pc:sldMkLst>
-          <pc:docMk/>
-          <pc:sldMk cId="2678703781" sldId="2255"/>
-        </pc:sldMkLst>
-        <pc:spChg chg="mod">
-          <ac:chgData name="Tatsumi Yamamoto" userId="56ad09d3-0015-4845-9e7e-764f67d623d8" providerId="ADAL" clId="{3AD0E615-25BC-465B-92C0-7D5C430F80CC}" dt="2026-07-03T07:48:10.080" v="2414"/>
-          <ac:spMkLst>
-            <pc:docMk/>
-            <pc:sldMk cId="2678703781" sldId="2255"/>
-            <ac:spMk id="2" creationId="{00000000-0000-0000-0000-000000000000}"/>
-          </ac:spMkLst>
-        </pc:spChg>
-        <pc:spChg chg="mod">
-          <ac:chgData name="Tatsumi Yamamoto" userId="56ad09d3-0015-4845-9e7e-764f67d623d8" providerId="ADAL" clId="{3AD0E615-25BC-465B-92C0-7D5C430F80CC}" dt="2026-07-03T07:48:10.080" v="2414"/>
-          <ac:spMkLst>
-            <pc:docMk/>
-            <pc:sldMk cId="2678703781" sldId="2255"/>
-            <ac:spMk id="3" creationId="{00000000-0000-0000-0000-000000000000}"/>
-          </ac:spMkLst>
-        </pc:spChg>
-        <pc:spChg chg="add del mod">
-          <ac:chgData name="Tatsumi Yamamoto" userId="56ad09d3-0015-4845-9e7e-764f67d623d8" providerId="ADAL" clId="{3AD0E615-25BC-465B-92C0-7D5C430F80CC}" dt="2026-07-03T07:48:10.080" v="2414"/>
-          <ac:spMkLst>
-            <pc:docMk/>
-            <pc:sldMk cId="2678703781" sldId="2255"/>
-            <ac:spMk id="4" creationId="{2D6797D1-471A-0E83-E867-A60B8118BCA2}"/>
-          </ac:spMkLst>
-        </pc:spChg>
-        <pc:spChg chg="add del mod">
-          <ac:chgData name="Tatsumi Yamamoto" userId="56ad09d3-0015-4845-9e7e-764f67d623d8" providerId="ADAL" clId="{3AD0E615-25BC-465B-92C0-7D5C430F80CC}" dt="2026-07-03T05:19:08.423" v="1027"/>
-          <ac:spMkLst>
-            <pc:docMk/>
-            <pc:sldMk cId="2678703781" sldId="2255"/>
-            <ac:spMk id="4" creationId="{AD2FA322-27AC-0C47-532B-546238642383}"/>
-          </ac:spMkLst>
-        </pc:spChg>
-        <pc:spChg chg="add del mod">
-          <ac:chgData name="Tatsumi Yamamoto" userId="56ad09d3-0015-4845-9e7e-764f67d623d8" providerId="ADAL" clId="{3AD0E615-25BC-465B-92C0-7D5C430F80CC}" dt="2026-07-03T05:19:08.371" v="1026"/>
-          <ac:spMkLst>
-            <pc:docMk/>
-            <pc:sldMk cId="2678703781" sldId="2255"/>
-            <ac:spMk id="5" creationId="{1165C5AF-0DCF-D46E-8F65-75AB648AC82E}"/>
-          </ac:spMkLst>
-        </pc:spChg>
-        <pc:spChg chg="add del mod">
-          <ac:chgData name="Tatsumi Yamamoto" userId="56ad09d3-0015-4845-9e7e-764f67d623d8" providerId="ADAL" clId="{3AD0E615-25BC-465B-92C0-7D5C430F80CC}" dt="2026-07-03T07:48:10.080" v="2414"/>
-          <ac:spMkLst>
-            <pc:docMk/>
-            <pc:sldMk cId="2678703781" sldId="2255"/>
-            <ac:spMk id="5" creationId="{970B60C8-0C76-C6C1-C8AE-C74D72A6C2A8}"/>
-          </ac:spMkLst>
-        </pc:spChg>
-        <pc:spChg chg="add mod">
-          <ac:chgData name="Tatsumi Yamamoto" userId="56ad09d3-0015-4845-9e7e-764f67d623d8" providerId="ADAL" clId="{3AD0E615-25BC-465B-92C0-7D5C430F80CC}" dt="2026-07-03T07:48:10.080" v="2414"/>
-          <ac:spMkLst>
-            <pc:docMk/>
-            <pc:sldMk cId="2678703781" sldId="2255"/>
-            <ac:spMk id="6" creationId="{4FF2CE25-5566-A0AD-3734-EEFE3B6A91CF}"/>
-          </ac:spMkLst>
-        </pc:spChg>
-        <pc:spChg chg="add del mod">
-          <ac:chgData name="Tatsumi Yamamoto" userId="56ad09d3-0015-4845-9e7e-764f67d623d8" providerId="ADAL" clId="{3AD0E615-25BC-465B-92C0-7D5C430F80CC}" dt="2026-07-03T05:19:08.369" v="1025"/>
-          <ac:spMkLst>
-            <pc:docMk/>
-            <pc:sldMk cId="2678703781" sldId="2255"/>
-            <ac:spMk id="6" creationId="{CF379A3F-7D62-061F-5018-4C79FFDB2530}"/>
-          </ac:spMkLst>
-        </pc:spChg>
-        <pc:spChg chg="add del mod">
-          <ac:chgData name="Tatsumi Yamamoto" userId="56ad09d3-0015-4845-9e7e-764f67d623d8" providerId="ADAL" clId="{3AD0E615-25BC-465B-92C0-7D5C430F80CC}" dt="2026-07-03T07:39:52" v="2127"/>
-          <ac:spMkLst>
-            <pc:docMk/>
-            <pc:sldMk cId="2678703781" sldId="2255"/>
-            <ac:spMk id="7" creationId="{51938861-8216-ACB3-72C6-2BF0108A22D4}"/>
-          </ac:spMkLst>
-        </pc:spChg>
-        <pc:spChg chg="add mod">
-          <ac:chgData name="Tatsumi Yamamoto" userId="56ad09d3-0015-4845-9e7e-764f67d623d8" providerId="ADAL" clId="{3AD0E615-25BC-465B-92C0-7D5C430F80CC}" dt="2026-07-03T07:48:10.080" v="2414"/>
-          <ac:spMkLst>
-            <pc:docMk/>
-            <pc:sldMk cId="2678703781" sldId="2255"/>
-            <ac:spMk id="7" creationId="{F1DD45DA-75C9-64F3-DF34-4B54A30F8903}"/>
-          </ac:spMkLst>
-        </pc:spChg>
-        <pc:spChg chg="add del mod">
-          <ac:chgData name="Tatsumi Yamamoto" userId="56ad09d3-0015-4845-9e7e-764f67d623d8" providerId="ADAL" clId="{3AD0E615-25BC-465B-92C0-7D5C430F80CC}" dt="2026-07-03T05:19:08.362" v="1022"/>
-          <ac:spMkLst>
-            <pc:docMk/>
-            <pc:sldMk cId="2678703781" sldId="2255"/>
-            <ac:spMk id="9" creationId="{5EEF73AA-EA22-5634-EAEC-4F9C67A82F90}"/>
-          </ac:spMkLst>
-        </pc:spChg>
-        <pc:spChg chg="add del mod">
-          <ac:chgData name="Tatsumi Yamamoto" userId="56ad09d3-0015-4845-9e7e-764f67d623d8" providerId="ADAL" clId="{3AD0E615-25BC-465B-92C0-7D5C430F80CC}" dt="2026-07-03T05:19:08.358" v="1020"/>
-          <ac:spMkLst>
-            <pc:docMk/>
-            <pc:sldMk cId="2678703781" sldId="2255"/>
-            <ac:spMk id="10" creationId="{341C235E-0211-2F9A-93D8-5F779331D265}"/>
-          </ac:spMkLst>
-        </pc:spChg>
-        <pc:spChg chg="add del mod">
-          <ac:chgData name="Tatsumi Yamamoto" userId="56ad09d3-0015-4845-9e7e-764f67d623d8" providerId="ADAL" clId="{3AD0E615-25BC-465B-92C0-7D5C430F80CC}" dt="2026-07-03T05:19:08.354" v="1019"/>
-          <ac:spMkLst>
-            <pc:docMk/>
-            <pc:sldMk cId="2678703781" sldId="2255"/>
-            <ac:spMk id="11" creationId="{5A5DF5BD-5CCD-86A8-F8FC-84D378C92AD4}"/>
-          </ac:spMkLst>
-        </pc:spChg>
-        <pc:spChg chg="add del mod">
-          <ac:chgData name="Tatsumi Yamamoto" userId="56ad09d3-0015-4845-9e7e-764f67d623d8" providerId="ADAL" clId="{3AD0E615-25BC-465B-92C0-7D5C430F80CC}" dt="2026-07-03T05:19:08.350" v="1017"/>
-          <ac:spMkLst>
-            <pc:docMk/>
-            <pc:sldMk cId="2678703781" sldId="2255"/>
-            <ac:spMk id="12" creationId="{DAEF1A21-03D4-A075-7DB1-A5DCE541A7F0}"/>
-          </ac:spMkLst>
-        </pc:spChg>
-        <pc:picChg chg="add del mod">
-          <ac:chgData name="Tatsumi Yamamoto" userId="56ad09d3-0015-4845-9e7e-764f67d623d8" providerId="ADAL" clId="{3AD0E615-25BC-465B-92C0-7D5C430F80CC}" dt="2026-07-03T05:19:08.365" v="1024"/>
-          <ac:picMkLst>
-            <pc:docMk/>
-            <pc:sldMk cId="2678703781" sldId="2255"/>
-            <ac:picMk id="8" creationId="{56FD9BF1-18AE-641C-9875-E68C65A4F1E3}"/>
-          </ac:picMkLst>
-        </pc:picChg>
-      </pc:sldChg>
-      <pc:sldMasterChg chg="modSldLayout">
-        <pc:chgData name="Tatsumi Yamamoto" userId="56ad09d3-0015-4845-9e7e-764f67d623d8" providerId="ADAL" clId="{3AD0E615-25BC-465B-92C0-7D5C430F80CC}" dt="2026-07-03T13:54:32.959" v="2419" actId="1076"/>
-        <pc:sldMasterMkLst>
-          <pc:docMk/>
-          <pc:sldMasterMk cId="3267033896" sldId="2147483660"/>
-        </pc:sldMasterMkLst>
-        <pc:sldLayoutChg chg="addSp delSp modSp mod">
-          <pc:chgData name="Tatsumi Yamamoto" userId="56ad09d3-0015-4845-9e7e-764f67d623d8" providerId="ADAL" clId="{3AD0E615-25BC-465B-92C0-7D5C430F80CC}" dt="2026-07-03T05:19:08.237" v="991" actId="299"/>
-          <pc:sldLayoutMkLst>
-            <pc:docMk/>
-            <pc:sldMasterMk cId="3267033896" sldId="2147483660"/>
-            <pc:sldLayoutMk cId="445834696" sldId="2147483694"/>
-          </pc:sldLayoutMkLst>
-          <pc:spChg chg="add mod">
-            <ac:chgData name="Tatsumi Yamamoto" userId="56ad09d3-0015-4845-9e7e-764f67d623d8" providerId="ADAL" clId="{3AD0E615-25BC-465B-92C0-7D5C430F80CC}" dt="2026-07-03T05:19:07.184" v="900" actId="208"/>
-            <ac:spMkLst>
-              <pc:docMk/>
-              <pc:sldMasterMk cId="3267033896" sldId="2147483660"/>
-              <pc:sldLayoutMk cId="445834696" sldId="2147483694"/>
-              <ac:spMk id="2" creationId="{47B17967-94BB-350F-7AE9-5BB990894CD9}"/>
-            </ac:spMkLst>
-          </pc:spChg>
-          <pc:spChg chg="add mod">
-            <ac:chgData name="Tatsumi Yamamoto" userId="56ad09d3-0015-4845-9e7e-764f67d623d8" providerId="ADAL" clId="{3AD0E615-25BC-465B-92C0-7D5C430F80CC}" dt="2026-07-03T05:19:07.372" v="904" actId="208"/>
-            <ac:spMkLst>
-              <pc:docMk/>
-              <pc:sldMasterMk cId="3267033896" sldId="2147483660"/>
-              <pc:sldLayoutMk cId="445834696" sldId="2147483694"/>
-              <ac:spMk id="3" creationId="{B763DC19-7197-5EBC-139D-7C94C0A76A56}"/>
-            </ac:spMkLst>
-          </pc:spChg>
-          <pc:spChg chg="mod">
-            <ac:chgData name="Tatsumi Yamamoto" userId="56ad09d3-0015-4845-9e7e-764f67d623d8" providerId="ADAL" clId="{3AD0E615-25BC-465B-92C0-7D5C430F80CC}" dt="2026-07-03T05:19:07.938" v="949" actId="207"/>
-            <ac:spMkLst>
-              <pc:docMk/>
-              <pc:sldMasterMk cId="3267033896" sldId="2147483660"/>
-              <pc:sldLayoutMk cId="445834696" sldId="2147483694"/>
-              <ac:spMk id="5" creationId="{00000000-0000-0000-0000-000000000000}"/>
-            </ac:spMkLst>
-          </pc:spChg>
-          <pc:spChg chg="mod">
-            <ac:chgData name="Tatsumi Yamamoto" userId="56ad09d3-0015-4845-9e7e-764f67d623d8" providerId="ADAL" clId="{3AD0E615-25BC-465B-92C0-7D5C430F80CC}" dt="2026-07-03T05:19:08.073" v="961" actId="207"/>
-            <ac:spMkLst>
-              <pc:docMk/>
-              <pc:sldMasterMk cId="3267033896" sldId="2147483660"/>
-              <pc:sldLayoutMk cId="445834696" sldId="2147483694"/>
-              <ac:spMk id="6" creationId="{00000000-0000-0000-0000-000000000000}"/>
-            </ac:spMkLst>
-          </pc:spChg>
-          <pc:spChg chg="add mod">
-            <ac:chgData name="Tatsumi Yamamoto" userId="56ad09d3-0015-4845-9e7e-764f67d623d8" providerId="ADAL" clId="{3AD0E615-25BC-465B-92C0-7D5C430F80CC}" dt="2026-07-03T05:19:07.512" v="908" actId="208"/>
-            <ac:spMkLst>
-              <pc:docMk/>
-              <pc:sldMasterMk cId="3267033896" sldId="2147483660"/>
-              <pc:sldLayoutMk cId="445834696" sldId="2147483694"/>
-              <ac:spMk id="8" creationId="{7D933F66-1DE4-AF66-9698-40403ADBD9A4}"/>
-            </ac:spMkLst>
-          </pc:spChg>
-          <pc:spChg chg="add mod">
-            <ac:chgData name="Tatsumi Yamamoto" userId="56ad09d3-0015-4845-9e7e-764f67d623d8" providerId="ADAL" clId="{3AD0E615-25BC-465B-92C0-7D5C430F80CC}" dt="2026-07-03T05:19:07.711" v="922" actId="299"/>
-            <ac:spMkLst>
-              <pc:docMk/>
-              <pc:sldMasterMk cId="3267033896" sldId="2147483660"/>
-              <pc:sldLayoutMk cId="445834696" sldId="2147483694"/>
-              <ac:spMk id="11" creationId="{272609CF-086C-F06F-1922-B16649779495}"/>
-            </ac:spMkLst>
-          </pc:spChg>
-          <pc:spChg chg="add mod">
-            <ac:chgData name="Tatsumi Yamamoto" userId="56ad09d3-0015-4845-9e7e-764f67d623d8" providerId="ADAL" clId="{3AD0E615-25BC-465B-92C0-7D5C430F80CC}" dt="2026-07-03T05:19:07.863" v="933"/>
-            <ac:spMkLst>
-              <pc:docMk/>
-              <pc:sldMasterMk cId="3267033896" sldId="2147483660"/>
-              <pc:sldLayoutMk cId="445834696" sldId="2147483694"/>
-              <ac:spMk id="12" creationId="{AA99BF70-8679-74A3-1E70-9F9AE20A136E}"/>
-            </ac:spMkLst>
-          </pc:spChg>
-          <pc:spChg chg="add mod">
-            <ac:chgData name="Tatsumi Yamamoto" userId="56ad09d3-0015-4845-9e7e-764f67d623d8" providerId="ADAL" clId="{3AD0E615-25BC-465B-92C0-7D5C430F80CC}" dt="2026-07-03T05:19:07.885" v="937" actId="208"/>
-            <ac:spMkLst>
-              <pc:docMk/>
-              <pc:sldMasterMk cId="3267033896" sldId="2147483660"/>
-              <pc:sldLayoutMk cId="445834696" sldId="2147483694"/>
-              <ac:spMk id="13" creationId="{D0FC113C-0032-290B-8EA4-584AF9894A01}"/>
-            </ac:spMkLst>
-          </pc:spChg>
-          <pc:spChg chg="add mod">
-            <ac:chgData name="Tatsumi Yamamoto" userId="56ad09d3-0015-4845-9e7e-764f67d623d8" providerId="ADAL" clId="{3AD0E615-25BC-465B-92C0-7D5C430F80CC}" dt="2026-07-03T05:19:08.164" v="976" actId="299"/>
-            <ac:spMkLst>
-              <pc:docMk/>
-              <pc:sldMasterMk cId="3267033896" sldId="2147483660"/>
-              <pc:sldLayoutMk cId="445834696" sldId="2147483694"/>
-              <ac:spMk id="14" creationId="{6751F945-C5A9-2890-1168-984334B616B4}"/>
-            </ac:spMkLst>
-          </pc:spChg>
-          <pc:spChg chg="add mod">
-            <ac:chgData name="Tatsumi Yamamoto" userId="56ad09d3-0015-4845-9e7e-764f67d623d8" providerId="ADAL" clId="{3AD0E615-25BC-465B-92C0-7D5C430F80CC}" dt="2026-07-03T05:19:08.237" v="991" actId="299"/>
-            <ac:spMkLst>
-              <pc:docMk/>
-              <pc:sldMasterMk cId="3267033896" sldId="2147483660"/>
-              <pc:sldLayoutMk cId="445834696" sldId="2147483694"/>
-              <ac:spMk id="15" creationId="{5A52DA29-A4B9-A5CB-4F1B-B773B11FA9E2}"/>
-            </ac:spMkLst>
-          </pc:spChg>
-          <pc:picChg chg="del">
-            <ac:chgData name="Tatsumi Yamamoto" userId="56ad09d3-0015-4845-9e7e-764f67d623d8" providerId="ADAL" clId="{3AD0E615-25BC-465B-92C0-7D5C430F80CC}" dt="2026-07-03T05:19:07.148" v="896"/>
-            <ac:picMkLst>
-              <pc:docMk/>
-              <pc:sldMasterMk cId="3267033896" sldId="2147483660"/>
-              <pc:sldLayoutMk cId="445834696" sldId="2147483694"/>
-              <ac:picMk id="4" creationId="{00000000-0000-0000-0000-000000000000}"/>
-            </ac:picMkLst>
-          </pc:picChg>
-          <pc:picChg chg="del">
-            <ac:chgData name="Tatsumi Yamamoto" userId="56ad09d3-0015-4845-9e7e-764f67d623d8" providerId="ADAL" clId="{3AD0E615-25BC-465B-92C0-7D5C430F80CC}" dt="2026-07-03T05:19:07.116" v="894"/>
-            <ac:picMkLst>
-              <pc:docMk/>
-              <pc:sldMasterMk cId="3267033896" sldId="2147483660"/>
-              <pc:sldLayoutMk cId="445834696" sldId="2147483694"/>
-              <ac:picMk id="7" creationId="{00000000-0000-0000-0000-000000000000}"/>
-            </ac:picMkLst>
-          </pc:picChg>
-          <pc:picChg chg="add mod">
-            <ac:chgData name="Tatsumi Yamamoto" userId="56ad09d3-0015-4845-9e7e-764f67d623d8" providerId="ADAL" clId="{3AD0E615-25BC-465B-92C0-7D5C430F80CC}" dt="2026-07-03T05:19:07.553" v="911"/>
-            <ac:picMkLst>
-              <pc:docMk/>
-              <pc:sldMasterMk cId="3267033896" sldId="2147483660"/>
-              <pc:sldLayoutMk cId="445834696" sldId="2147483694"/>
-              <ac:picMk id="10" creationId="{0B972AF2-4E94-69DA-31E7-585D4A5310DB}"/>
-            </ac:picMkLst>
-          </pc:picChg>
-        </pc:sldLayoutChg>
-        <pc:sldLayoutChg chg="addSp delSp modSp mod">
-          <pc:chgData name="Tatsumi Yamamoto" userId="56ad09d3-0015-4845-9e7e-764f67d623d8" providerId="ADAL" clId="{3AD0E615-25BC-465B-92C0-7D5C430F80CC}" dt="2026-07-03T07:42:10.913" v="2411" actId="947"/>
-          <pc:sldLayoutMkLst>
-            <pc:docMk/>
-            <pc:sldMasterMk cId="3267033896" sldId="2147483660"/>
-            <pc:sldLayoutMk cId="430014301" sldId="2147483698"/>
-          </pc:sldLayoutMkLst>
-          <pc:spChg chg="del">
-            <ac:chgData name="Tatsumi Yamamoto" userId="56ad09d3-0015-4845-9e7e-764f67d623d8" providerId="ADAL" clId="{3AD0E615-25BC-465B-92C0-7D5C430F80CC}" dt="2026-07-03T07:39:49.139" v="1719"/>
-            <ac:spMkLst>
-              <pc:docMk/>
-              <pc:sldMasterMk cId="3267033896" sldId="2147483660"/>
-              <pc:sldLayoutMk cId="430014301" sldId="2147483698"/>
-              <ac:spMk id="2" creationId="{00000000-0000-0000-0000-000000000000}"/>
-            </ac:spMkLst>
-          </pc:spChg>
-          <pc:spChg chg="mod">
-            <ac:chgData name="Tatsumi Yamamoto" userId="56ad09d3-0015-4845-9e7e-764f67d623d8" providerId="ADAL" clId="{3AD0E615-25BC-465B-92C0-7D5C430F80CC}" dt="2026-07-03T07:42:10.811" v="2395" actId="947"/>
-            <ac:spMkLst>
-              <pc:docMk/>
-              <pc:sldMasterMk cId="3267033896" sldId="2147483660"/>
-              <pc:sldLayoutMk cId="430014301" sldId="2147483698"/>
-              <ac:spMk id="3" creationId="{00000000-0000-0000-0000-000000000000}"/>
-            </ac:spMkLst>
-          </pc:spChg>
-          <pc:spChg chg="add del mod">
-            <ac:chgData name="Tatsumi Yamamoto" userId="56ad09d3-0015-4845-9e7e-764f67d623d8" providerId="ADAL" clId="{3AD0E615-25BC-465B-92C0-7D5C430F80CC}" dt="2026-07-03T07:39:49.091" v="1707"/>
-            <ac:spMkLst>
-              <pc:docMk/>
-              <pc:sldMasterMk cId="3267033896" sldId="2147483660"/>
-              <pc:sldLayoutMk cId="430014301" sldId="2147483698"/>
-              <ac:spMk id="4" creationId="{125B45DF-B656-F34B-80D7-3B2BAB012997}"/>
-            </ac:spMkLst>
-          </pc:spChg>
-          <pc:spChg chg="add del mod">
-            <ac:chgData name="Tatsumi Yamamoto" userId="56ad09d3-0015-4845-9e7e-764f67d623d8" providerId="ADAL" clId="{3AD0E615-25BC-465B-92C0-7D5C430F80CC}" dt="2026-07-03T07:39:49.067" v="1706"/>
-            <ac:spMkLst>
-              <pc:docMk/>
-              <pc:sldMasterMk cId="3267033896" sldId="2147483660"/>
-              <pc:sldLayoutMk cId="430014301" sldId="2147483698"/>
-              <ac:spMk id="5" creationId="{F57182F5-5CF2-46A4-F5CB-5BF5C28F7302}"/>
-            </ac:spMkLst>
-          </pc:spChg>
-          <pc:spChg chg="add mod">
-            <ac:chgData name="Tatsumi Yamamoto" userId="56ad09d3-0015-4845-9e7e-764f67d623d8" providerId="ADAL" clId="{3AD0E615-25BC-465B-92C0-7D5C430F80CC}" dt="2026-07-03T07:42:10.832" v="2399"/>
-            <ac:spMkLst>
-              <pc:docMk/>
-              <pc:sldMasterMk cId="3267033896" sldId="2147483660"/>
-              <pc:sldLayoutMk cId="430014301" sldId="2147483698"/>
-              <ac:spMk id="6" creationId="{2D58BF5E-FB48-944D-D326-D8C8A023026E}"/>
-            </ac:spMkLst>
-          </pc:spChg>
-          <pc:spChg chg="add mod">
-            <ac:chgData name="Tatsumi Yamamoto" userId="56ad09d3-0015-4845-9e7e-764f67d623d8" providerId="ADAL" clId="{3AD0E615-25BC-465B-92C0-7D5C430F80CC}" dt="2026-07-03T07:42:10.857" v="2403"/>
-            <ac:spMkLst>
-              <pc:docMk/>
-              <pc:sldMasterMk cId="3267033896" sldId="2147483660"/>
-              <pc:sldLayoutMk cId="430014301" sldId="2147483698"/>
-              <ac:spMk id="7" creationId="{382B1EB5-A7CA-88D7-20DD-9007228F87FC}"/>
-            </ac:spMkLst>
-          </pc:spChg>
-          <pc:spChg chg="del mod">
-            <ac:chgData name="Tatsumi Yamamoto" userId="56ad09d3-0015-4845-9e7e-764f67d623d8" providerId="ADAL" clId="{3AD0E615-25BC-465B-92C0-7D5C430F80CC}" dt="2026-07-03T07:42:10.771" v="2391"/>
-            <ac:spMkLst>
-              <pc:docMk/>
-              <pc:sldMasterMk cId="3267033896" sldId="2147483660"/>
-              <pc:sldLayoutMk cId="430014301" sldId="2147483698"/>
-              <ac:spMk id="8" creationId="{00000000-0000-0000-0000-000000000000}"/>
-            </ac:spMkLst>
-          </pc:spChg>
-          <pc:spChg chg="add mod">
-            <ac:chgData name="Tatsumi Yamamoto" userId="56ad09d3-0015-4845-9e7e-764f67d623d8" providerId="ADAL" clId="{3AD0E615-25BC-465B-92C0-7D5C430F80CC}" dt="2026-07-03T07:42:10.884" v="2407" actId="947"/>
-            <ac:spMkLst>
-              <pc:docMk/>
-              <pc:sldMasterMk cId="3267033896" sldId="2147483660"/>
-              <pc:sldLayoutMk cId="430014301" sldId="2147483698"/>
-              <ac:spMk id="9" creationId="{060B65E1-AA93-08AE-6A63-E61A1D417A82}"/>
-            </ac:spMkLst>
-          </pc:spChg>
-          <pc:spChg chg="add mod">
-            <ac:chgData name="Tatsumi Yamamoto" userId="56ad09d3-0015-4845-9e7e-764f67d623d8" providerId="ADAL" clId="{3AD0E615-25BC-465B-92C0-7D5C430F80CC}" dt="2026-07-03T07:42:10.913" v="2411" actId="947"/>
-            <ac:spMkLst>
-              <pc:docMk/>
-              <pc:sldMasterMk cId="3267033896" sldId="2147483660"/>
-              <pc:sldLayoutMk cId="430014301" sldId="2147483698"/>
-              <ac:spMk id="10" creationId="{ADD512BC-66F3-43B2-0D6C-D496D61848A3}"/>
-            </ac:spMkLst>
-          </pc:spChg>
-        </pc:sldLayoutChg>
-        <pc:sldLayoutChg chg="addSp delSp modSp mod">
-          <pc:chgData name="Tatsumi Yamamoto" userId="56ad09d3-0015-4845-9e7e-764f67d623d8" providerId="ADAL" clId="{3AD0E615-25BC-465B-92C0-7D5C430F80CC}" dt="2026-07-03T05:19:08.886" v="1136" actId="299"/>
-          <pc:sldLayoutMkLst>
-            <pc:docMk/>
-            <pc:sldMasterMk cId="3267033896" sldId="2147483660"/>
-            <pc:sldLayoutMk cId="1018352749" sldId="2147483704"/>
-          </pc:sldLayoutMkLst>
-          <pc:spChg chg="add mod">
-            <ac:chgData name="Tatsumi Yamamoto" userId="56ad09d3-0015-4845-9e7e-764f67d623d8" providerId="ADAL" clId="{3AD0E615-25BC-465B-92C0-7D5C430F80CC}" dt="2026-07-03T05:19:08.563" v="1069" actId="208"/>
-            <ac:spMkLst>
-              <pc:docMk/>
-              <pc:sldMasterMk cId="3267033896" sldId="2147483660"/>
-              <pc:sldLayoutMk cId="1018352749" sldId="2147483704"/>
-              <ac:spMk id="2" creationId="{38FE8FF1-A2DD-DD78-0C47-5D8D1760FDF6}"/>
-            </ac:spMkLst>
-          </pc:spChg>
-          <pc:spChg chg="del">
-            <ac:chgData name="Tatsumi Yamamoto" userId="56ad09d3-0015-4845-9e7e-764f67d623d8" providerId="ADAL" clId="{3AD0E615-25BC-465B-92C0-7D5C430F80CC}" dt="2026-07-03T05:19:08.551" v="1065"/>
-            <ac:spMkLst>
-              <pc:docMk/>
-              <pc:sldMasterMk cId="3267033896" sldId="2147483660"/>
-              <pc:sldLayoutMk cId="1018352749" sldId="2147483704"/>
-              <ac:spMk id="3" creationId="{00000000-0000-0000-0000-000000000000}"/>
-            </ac:spMkLst>
-          </pc:spChg>
-          <pc:spChg chg="add mod">
-            <ac:chgData name="Tatsumi Yamamoto" userId="56ad09d3-0015-4845-9e7e-764f67d623d8" providerId="ADAL" clId="{3AD0E615-25BC-465B-92C0-7D5C430F80CC}" dt="2026-07-03T05:19:08.577" v="1073" actId="208"/>
-            <ac:spMkLst>
-              <pc:docMk/>
-              <pc:sldMasterMk cId="3267033896" sldId="2147483660"/>
-              <pc:sldLayoutMk cId="1018352749" sldId="2147483704"/>
-              <ac:spMk id="4" creationId="{15EDDD19-7E60-116B-FEAC-25B35E7FCE35}"/>
-            </ac:spMkLst>
-          </pc:spChg>
-          <pc:spChg chg="add mod">
-            <ac:chgData name="Tatsumi Yamamoto" userId="56ad09d3-0015-4845-9e7e-764f67d623d8" providerId="ADAL" clId="{3AD0E615-25BC-465B-92C0-7D5C430F80CC}" dt="2026-07-03T05:19:08.590" v="1077" actId="208"/>
-            <ac:spMkLst>
-              <pc:docMk/>
-              <pc:sldMasterMk cId="3267033896" sldId="2147483660"/>
-              <pc:sldLayoutMk cId="1018352749" sldId="2147483704"/>
-              <ac:spMk id="6" creationId="{FE0096E5-EF95-8B70-236C-A6C8B6DA2F9D}"/>
-            </ac:spMkLst>
-          </pc:spChg>
-          <pc:spChg chg="add mod">
-            <ac:chgData name="Tatsumi Yamamoto" userId="56ad09d3-0015-4845-9e7e-764f67d623d8" providerId="ADAL" clId="{3AD0E615-25BC-465B-92C0-7D5C430F80CC}" dt="2026-07-03T05:19:08.681" v="1091" actId="299"/>
-            <ac:spMkLst>
-              <pc:docMk/>
-              <pc:sldMasterMk cId="3267033896" sldId="2147483660"/>
-              <pc:sldLayoutMk cId="1018352749" sldId="2147483704"/>
-              <ac:spMk id="9" creationId="{9CEA2EFC-0683-D155-524B-265336269208}"/>
-            </ac:spMkLst>
-          </pc:spChg>
-          <pc:spChg chg="add mod">
-            <ac:chgData name="Tatsumi Yamamoto" userId="56ad09d3-0015-4845-9e7e-764f67d623d8" providerId="ADAL" clId="{3AD0E615-25BC-465B-92C0-7D5C430F80CC}" dt="2026-07-03T05:19:08.722" v="1102"/>
-            <ac:spMkLst>
-              <pc:docMk/>
-              <pc:sldMasterMk cId="3267033896" sldId="2147483660"/>
-              <pc:sldLayoutMk cId="1018352749" sldId="2147483704"/>
-              <ac:spMk id="10" creationId="{CE4FFBC9-0A08-82AF-F84A-F51A326F0A88}"/>
-            </ac:spMkLst>
-          </pc:spChg>
-          <pc:spChg chg="add mod">
-            <ac:chgData name="Tatsumi Yamamoto" userId="56ad09d3-0015-4845-9e7e-764f67d623d8" providerId="ADAL" clId="{3AD0E615-25BC-465B-92C0-7D5C430F80CC}" dt="2026-07-03T05:19:08.732" v="1106" actId="208"/>
-            <ac:spMkLst>
-              <pc:docMk/>
-              <pc:sldMasterMk cId="3267033896" sldId="2147483660"/>
-              <pc:sldLayoutMk cId="1018352749" sldId="2147483704"/>
-              <ac:spMk id="11" creationId="{F695F79A-8FBC-41E1-B4CE-DA60905FC07B}"/>
-            </ac:spMkLst>
-          </pc:spChg>
-          <pc:spChg chg="add mod">
-            <ac:chgData name="Tatsumi Yamamoto" userId="56ad09d3-0015-4845-9e7e-764f67d623d8" providerId="ADAL" clId="{3AD0E615-25BC-465B-92C0-7D5C430F80CC}" dt="2026-07-03T05:19:08.794" v="1121" actId="299"/>
-            <ac:spMkLst>
-              <pc:docMk/>
-              <pc:sldMasterMk cId="3267033896" sldId="2147483660"/>
-              <pc:sldLayoutMk cId="1018352749" sldId="2147483704"/>
-              <ac:spMk id="12" creationId="{5D29D7FE-77E5-41CC-7A52-0A03C5BDB160}"/>
-            </ac:spMkLst>
-          </pc:spChg>
-          <pc:spChg chg="add mod">
-            <ac:chgData name="Tatsumi Yamamoto" userId="56ad09d3-0015-4845-9e7e-764f67d623d8" providerId="ADAL" clId="{3AD0E615-25BC-465B-92C0-7D5C430F80CC}" dt="2026-07-03T05:19:08.886" v="1136" actId="299"/>
-            <ac:spMkLst>
-              <pc:docMk/>
-              <pc:sldMasterMk cId="3267033896" sldId="2147483660"/>
-              <pc:sldLayoutMk cId="1018352749" sldId="2147483704"/>
-              <ac:spMk id="13" creationId="{D1A573D3-F418-FF89-E5BB-BCE2023A4D16}"/>
-            </ac:spMkLst>
-          </pc:spChg>
-          <pc:picChg chg="del">
-            <ac:chgData name="Tatsumi Yamamoto" userId="56ad09d3-0015-4845-9e7e-764f67d623d8" providerId="ADAL" clId="{3AD0E615-25BC-465B-92C0-7D5C430F80CC}" dt="2026-07-03T05:19:08.547" v="1063"/>
-            <ac:picMkLst>
-              <pc:docMk/>
-              <pc:sldMasterMk cId="3267033896" sldId="2147483660"/>
-              <pc:sldLayoutMk cId="1018352749" sldId="2147483704"/>
-              <ac:picMk id="5" creationId="{00000000-0000-0000-0000-000000000000}"/>
-            </ac:picMkLst>
-          </pc:picChg>
-          <pc:picChg chg="add mod">
-            <ac:chgData name="Tatsumi Yamamoto" userId="56ad09d3-0015-4845-9e7e-764f67d623d8" providerId="ADAL" clId="{3AD0E615-25BC-465B-92C0-7D5C430F80CC}" dt="2026-07-03T05:19:08.627" v="1080"/>
-            <ac:picMkLst>
-              <pc:docMk/>
-              <pc:sldMasterMk cId="3267033896" sldId="2147483660"/>
-              <pc:sldLayoutMk cId="1018352749" sldId="2147483704"/>
-              <ac:picMk id="8" creationId="{55FAC80A-9B97-0916-99EF-8C2AA133B3FE}"/>
-            </ac:picMkLst>
-          </pc:picChg>
-        </pc:sldLayoutChg>
-        <pc:sldLayoutChg chg="addSp delSp modSp mod">
-          <pc:chgData name="Tatsumi Yamamoto" userId="56ad09d3-0015-4845-9e7e-764f67d623d8" providerId="ADAL" clId="{3AD0E615-25BC-465B-92C0-7D5C430F80CC}" dt="2026-07-03T07:42:09.860" v="2285" actId="947"/>
-          <pc:sldLayoutMkLst>
-            <pc:docMk/>
-            <pc:sldMasterMk cId="3267033896" sldId="2147483660"/>
-            <pc:sldLayoutMk cId="3160647301" sldId="2147483705"/>
-          </pc:sldLayoutMkLst>
-          <pc:spChg chg="del">
-            <ac:chgData name="Tatsumi Yamamoto" userId="56ad09d3-0015-4845-9e7e-764f67d623d8" providerId="ADAL" clId="{3AD0E615-25BC-465B-92C0-7D5C430F80CC}" dt="2026-07-03T07:39:48.699" v="1649"/>
-            <ac:spMkLst>
-              <pc:docMk/>
-              <pc:sldMasterMk cId="3267033896" sldId="2147483660"/>
-              <pc:sldLayoutMk cId="3160647301" sldId="2147483705"/>
-              <ac:spMk id="2" creationId="{00000000-0000-0000-0000-000000000000}"/>
-            </ac:spMkLst>
-          </pc:spChg>
-          <pc:spChg chg="mod">
-            <ac:chgData name="Tatsumi Yamamoto" userId="56ad09d3-0015-4845-9e7e-764f67d623d8" providerId="ADAL" clId="{3AD0E615-25BC-465B-92C0-7D5C430F80CC}" dt="2026-07-03T07:42:09.588" v="2269" actId="947"/>
-            <ac:spMkLst>
-              <pc:docMk/>
-              <pc:sldMasterMk cId="3267033896" sldId="2147483660"/>
-              <pc:sldLayoutMk cId="3160647301" sldId="2147483705"/>
-              <ac:spMk id="3" creationId="{00000000-0000-0000-0000-000000000000}"/>
-            </ac:spMkLst>
-          </pc:spChg>
-          <pc:spChg chg="add del mod">
-            <ac:chgData name="Tatsumi Yamamoto" userId="56ad09d3-0015-4845-9e7e-764f67d623d8" providerId="ADAL" clId="{3AD0E615-25BC-465B-92C0-7D5C430F80CC}" dt="2026-07-03T07:39:48.651" v="1637"/>
-            <ac:spMkLst>
-              <pc:docMk/>
-              <pc:sldMasterMk cId="3267033896" sldId="2147483660"/>
-              <pc:sldLayoutMk cId="3160647301" sldId="2147483705"/>
-              <ac:spMk id="4" creationId="{227B8FD3-A9BA-37E3-20B6-8B7E51DC9159}"/>
-            </ac:spMkLst>
-          </pc:spChg>
-          <pc:spChg chg="del">
-            <ac:chgData name="Tatsumi Yamamoto" userId="56ad09d3-0015-4845-9e7e-764f67d623d8" providerId="ADAL" clId="{3AD0E615-25BC-465B-92C0-7D5C430F80CC}" dt="2026-07-03T07:39:48.759" v="1668"/>
-            <ac:spMkLst>
-              <pc:docMk/>
-              <pc:sldMasterMk cId="3267033896" sldId="2147483660"/>
-              <pc:sldLayoutMk cId="3160647301" sldId="2147483705"/>
-              <ac:spMk id="5" creationId="{00000000-0000-0000-0000-000000000000}"/>
-            </ac:spMkLst>
-          </pc:spChg>
-          <pc:spChg chg="add del mod">
-            <ac:chgData name="Tatsumi Yamamoto" userId="56ad09d3-0015-4845-9e7e-764f67d623d8" providerId="ADAL" clId="{3AD0E615-25BC-465B-92C0-7D5C430F80CC}" dt="2026-07-03T07:39:48.648" v="1636"/>
-            <ac:spMkLst>
-              <pc:docMk/>
-              <pc:sldMasterMk cId="3267033896" sldId="2147483660"/>
-              <pc:sldLayoutMk cId="3160647301" sldId="2147483705"/>
-              <ac:spMk id="6" creationId="{4BE514C3-59FA-051F-5D49-38D9DD61A065}"/>
-            </ac:spMkLst>
-          </pc:spChg>
-          <pc:spChg chg="add mod">
-            <ac:chgData name="Tatsumi Yamamoto" userId="56ad09d3-0015-4845-9e7e-764f67d623d8" providerId="ADAL" clId="{3AD0E615-25BC-465B-92C0-7D5C430F80CC}" dt="2026-07-03T07:42:09.646" v="2273"/>
-            <ac:spMkLst>
-              <pc:docMk/>
-              <pc:sldMasterMk cId="3267033896" sldId="2147483660"/>
-              <pc:sldLayoutMk cId="3160647301" sldId="2147483705"/>
-              <ac:spMk id="7" creationId="{3A1CA77B-C473-30AE-B3D9-7907F8BD51B9}"/>
-            </ac:spMkLst>
-          </pc:spChg>
-          <pc:spChg chg="add mod">
-            <ac:chgData name="Tatsumi Yamamoto" userId="56ad09d3-0015-4845-9e7e-764f67d623d8" providerId="ADAL" clId="{3AD0E615-25BC-465B-92C0-7D5C430F80CC}" dt="2026-07-03T07:42:09.749" v="2277"/>
-            <ac:spMkLst>
-              <pc:docMk/>
-              <pc:sldMasterMk cId="3267033896" sldId="2147483660"/>
-              <pc:sldLayoutMk cId="3160647301" sldId="2147483705"/>
-              <ac:spMk id="8" creationId="{E3ADEE4F-B9E2-310E-B0ED-45C7A5445C1B}"/>
-            </ac:spMkLst>
-          </pc:spChg>
-          <pc:spChg chg="add mod">
-            <ac:chgData name="Tatsumi Yamamoto" userId="56ad09d3-0015-4845-9e7e-764f67d623d8" providerId="ADAL" clId="{3AD0E615-25BC-465B-92C0-7D5C430F80CC}" dt="2026-07-03T07:42:09.808" v="2281" actId="947"/>
-            <ac:spMkLst>
-              <pc:docMk/>
-              <pc:sldMasterMk cId="3267033896" sldId="2147483660"/>
-              <pc:sldLayoutMk cId="3160647301" sldId="2147483705"/>
-              <ac:spMk id="9" creationId="{F98BFBAA-1AF7-EE0E-0913-3016AEA8C1A3}"/>
-            </ac:spMkLst>
-          </pc:spChg>
-          <pc:spChg chg="add mod">
-            <ac:chgData name="Tatsumi Yamamoto" userId="56ad09d3-0015-4845-9e7e-764f67d623d8" providerId="ADAL" clId="{3AD0E615-25BC-465B-92C0-7D5C430F80CC}" dt="2026-07-03T07:42:09.860" v="2285" actId="947"/>
-            <ac:spMkLst>
-              <pc:docMk/>
-              <pc:sldMasterMk cId="3267033896" sldId="2147483660"/>
-              <pc:sldLayoutMk cId="3160647301" sldId="2147483705"/>
-              <ac:spMk id="10" creationId="{62119DB6-FAEE-2BD9-AB08-0C23FC65142D}"/>
-            </ac:spMkLst>
-          </pc:spChg>
-        </pc:sldLayoutChg>
-        <pc:sldLayoutChg chg="addSp delSp modSp mod">
-          <pc:chgData name="Tatsumi Yamamoto" userId="56ad09d3-0015-4845-9e7e-764f67d623d8" providerId="ADAL" clId="{3AD0E615-25BC-465B-92C0-7D5C430F80CC}" dt="2026-07-03T07:42:08.334" v="2173" actId="947"/>
-          <pc:sldLayoutMkLst>
-            <pc:docMk/>
-            <pc:sldMasterMk cId="3267033896" sldId="2147483660"/>
-            <pc:sldLayoutMk cId="3871808901" sldId="2147483706"/>
-          </pc:sldLayoutMkLst>
-          <pc:spChg chg="del">
-            <ac:chgData name="Tatsumi Yamamoto" userId="56ad09d3-0015-4845-9e7e-764f67d623d8" providerId="ADAL" clId="{3AD0E615-25BC-465B-92C0-7D5C430F80CC}" dt="2026-07-03T07:39:46.058" v="1193"/>
-            <ac:spMkLst>
-              <pc:docMk/>
-              <pc:sldMasterMk cId="3267033896" sldId="2147483660"/>
-              <pc:sldLayoutMk cId="3871808901" sldId="2147483706"/>
-              <ac:spMk id="2" creationId="{C6A287A0-B83B-2A73-E367-0416EC366D80}"/>
-            </ac:spMkLst>
-          </pc:spChg>
-          <pc:spChg chg="del mod">
-            <ac:chgData name="Tatsumi Yamamoto" userId="56ad09d3-0015-4845-9e7e-764f67d623d8" providerId="ADAL" clId="{3AD0E615-25BC-465B-92C0-7D5C430F80CC}" dt="2026-07-03T07:42:07.977" v="2133"/>
-            <ac:spMkLst>
-              <pc:docMk/>
-              <pc:sldMasterMk cId="3267033896" sldId="2147483660"/>
-              <pc:sldLayoutMk cId="3871808901" sldId="2147483706"/>
-              <ac:spMk id="3" creationId="{335853D0-70C8-DB57-DCEF-0DD9D31EF70C}"/>
-            </ac:spMkLst>
-          </pc:spChg>
-          <pc:spChg chg="add mod">
-            <ac:chgData name="Tatsumi Yamamoto" userId="56ad09d3-0015-4845-9e7e-764f67d623d8" providerId="ADAL" clId="{3AD0E615-25BC-465B-92C0-7D5C430F80CC}" dt="2026-07-03T07:42:08.042" v="2137"/>
-            <ac:spMkLst>
-              <pc:docMk/>
-              <pc:sldMasterMk cId="3267033896" sldId="2147483660"/>
-              <pc:sldLayoutMk cId="3871808901" sldId="2147483706"/>
-              <ac:spMk id="4" creationId="{E64ED933-7335-8673-0E68-33551B7E014B}"/>
-            </ac:spMkLst>
-          </pc:spChg>
-          <pc:spChg chg="add mod">
-            <ac:chgData name="Tatsumi Yamamoto" userId="56ad09d3-0015-4845-9e7e-764f67d623d8" providerId="ADAL" clId="{3AD0E615-25BC-465B-92C0-7D5C430F80CC}" dt="2026-07-03T07:42:08.060" v="2141"/>
-            <ac:spMkLst>
-              <pc:docMk/>
-              <pc:sldMasterMk cId="3267033896" sldId="2147483660"/>
-              <pc:sldLayoutMk cId="3871808901" sldId="2147483706"/>
-              <ac:spMk id="5" creationId="{A3686CD9-9CDF-469F-7383-294DE5829F2A}"/>
-            </ac:spMkLst>
-          </pc:spChg>
-          <pc:spChg chg="add mod">
-            <ac:chgData name="Tatsumi Yamamoto" userId="56ad09d3-0015-4845-9e7e-764f67d623d8" providerId="ADAL" clId="{3AD0E615-25BC-465B-92C0-7D5C430F80CC}" dt="2026-07-03T07:42:08.082" v="2145" actId="947"/>
-            <ac:spMkLst>
-              <pc:docMk/>
-              <pc:sldMasterMk cId="3267033896" sldId="2147483660"/>
-              <pc:sldLayoutMk cId="3871808901" sldId="2147483706"/>
-              <ac:spMk id="6" creationId="{3D514691-82CF-1D78-D942-42F364F71273}"/>
-            </ac:spMkLst>
-          </pc:spChg>
-          <pc:spChg chg="add mod">
-            <ac:chgData name="Tatsumi Yamamoto" userId="56ad09d3-0015-4845-9e7e-764f67d623d8" providerId="ADAL" clId="{3AD0E615-25BC-465B-92C0-7D5C430F80CC}" dt="2026-07-03T07:42:08.104" v="2149" actId="947"/>
-            <ac:spMkLst>
-              <pc:docMk/>
-              <pc:sldMasterMk cId="3267033896" sldId="2147483660"/>
-              <pc:sldLayoutMk cId="3871808901" sldId="2147483706"/>
-              <ac:spMk id="7" creationId="{7974BB06-209C-25D2-3CFB-4B7785215D0D}"/>
-            </ac:spMkLst>
-          </pc:spChg>
-          <pc:spChg chg="add mod">
-            <ac:chgData name="Tatsumi Yamamoto" userId="56ad09d3-0015-4845-9e7e-764f67d623d8" providerId="ADAL" clId="{3AD0E615-25BC-465B-92C0-7D5C430F80CC}" dt="2026-07-03T07:42:08.131" v="2153"/>
-            <ac:spMkLst>
-              <pc:docMk/>
-              <pc:sldMasterMk cId="3267033896" sldId="2147483660"/>
-              <pc:sldLayoutMk cId="3871808901" sldId="2147483706"/>
-              <ac:spMk id="8" creationId="{C2650D02-0820-9A8A-4116-BEDF09CCB83A}"/>
-            </ac:spMkLst>
-          </pc:spChg>
-          <pc:spChg chg="add mod">
-            <ac:chgData name="Tatsumi Yamamoto" userId="56ad09d3-0015-4845-9e7e-764f67d623d8" providerId="ADAL" clId="{3AD0E615-25BC-465B-92C0-7D5C430F80CC}" dt="2026-07-03T07:42:08.160" v="2157"/>
-            <ac:spMkLst>
-              <pc:docMk/>
-              <pc:sldMasterMk cId="3267033896" sldId="2147483660"/>
-              <pc:sldLayoutMk cId="3871808901" sldId="2147483706"/>
-              <ac:spMk id="9" creationId="{A5410F89-63F8-6C76-0369-3CC7A018F321}"/>
-            </ac:spMkLst>
-          </pc:spChg>
-          <pc:spChg chg="add mod">
-            <ac:chgData name="Tatsumi Yamamoto" userId="56ad09d3-0015-4845-9e7e-764f67d623d8" providerId="ADAL" clId="{3AD0E615-25BC-465B-92C0-7D5C430F80CC}" dt="2026-07-03T07:42:08.211" v="2161" actId="947"/>
-            <ac:spMkLst>
-              <pc:docMk/>
-              <pc:sldMasterMk cId="3267033896" sldId="2147483660"/>
-              <pc:sldLayoutMk cId="3871808901" sldId="2147483706"/>
-              <ac:spMk id="10" creationId="{54A7EC09-A990-FA01-4B2E-C511DFB8ACED}"/>
-            </ac:spMkLst>
-          </pc:spChg>
-          <pc:spChg chg="add mod">
-            <ac:chgData name="Tatsumi Yamamoto" userId="56ad09d3-0015-4845-9e7e-764f67d623d8" providerId="ADAL" clId="{3AD0E615-25BC-465B-92C0-7D5C430F80CC}" dt="2026-07-03T07:42:08.277" v="2165" actId="947"/>
-            <ac:spMkLst>
-              <pc:docMk/>
-              <pc:sldMasterMk cId="3267033896" sldId="2147483660"/>
-              <pc:sldLayoutMk cId="3871808901" sldId="2147483706"/>
-              <ac:spMk id="11" creationId="{C1A8ED5D-105F-95CF-3F08-BF48932118CF}"/>
-            </ac:spMkLst>
-          </pc:spChg>
-          <pc:spChg chg="add mod">
-            <ac:chgData name="Tatsumi Yamamoto" userId="56ad09d3-0015-4845-9e7e-764f67d623d8" providerId="ADAL" clId="{3AD0E615-25BC-465B-92C0-7D5C430F80CC}" dt="2026-07-03T07:42:08.304" v="2169" actId="947"/>
-            <ac:spMkLst>
-              <pc:docMk/>
-              <pc:sldMasterMk cId="3267033896" sldId="2147483660"/>
-              <pc:sldLayoutMk cId="3871808901" sldId="2147483706"/>
-              <ac:spMk id="12" creationId="{BB45A7E1-3A5E-AE5F-1CAE-5E41EC497A58}"/>
-            </ac:spMkLst>
-          </pc:spChg>
-          <pc:spChg chg="add mod">
-            <ac:chgData name="Tatsumi Yamamoto" userId="56ad09d3-0015-4845-9e7e-764f67d623d8" providerId="ADAL" clId="{3AD0E615-25BC-465B-92C0-7D5C430F80CC}" dt="2026-07-03T07:42:08.334" v="2173" actId="947"/>
-            <ac:spMkLst>
-              <pc:docMk/>
-              <pc:sldMasterMk cId="3267033896" sldId="2147483660"/>
-              <pc:sldLayoutMk cId="3871808901" sldId="2147483706"/>
-              <ac:spMk id="13" creationId="{B60C487B-F448-E969-ADC2-2914D7308757}"/>
-            </ac:spMkLst>
-          </pc:spChg>
-        </pc:sldLayoutChg>
-        <pc:sldLayoutChg chg="addSp delSp modSp mod">
-          <pc:chgData name="Tatsumi Yamamoto" userId="56ad09d3-0015-4845-9e7e-764f67d623d8" providerId="ADAL" clId="{3AD0E615-25BC-465B-92C0-7D5C430F80CC}" dt="2026-07-03T07:42:08.724" v="2219" actId="947"/>
-          <pc:sldLayoutMkLst>
-            <pc:docMk/>
-            <pc:sldMasterMk cId="3267033896" sldId="2147483660"/>
-            <pc:sldLayoutMk cId="2678532073" sldId="2147483707"/>
-          </pc:sldLayoutMkLst>
-          <pc:spChg chg="del">
-            <ac:chgData name="Tatsumi Yamamoto" userId="56ad09d3-0015-4845-9e7e-764f67d623d8" providerId="ADAL" clId="{3AD0E615-25BC-465B-92C0-7D5C430F80CC}" dt="2026-07-03T07:39:47.012" v="1350"/>
-            <ac:spMkLst>
-              <pc:docMk/>
-              <pc:sldMasterMk cId="3267033896" sldId="2147483660"/>
-              <pc:sldLayoutMk cId="2678532073" sldId="2147483707"/>
-              <ac:spMk id="2" creationId="{36E9156A-7C54-0ACB-6B33-A9356588D074}"/>
-            </ac:spMkLst>
-          </pc:spChg>
-          <pc:spChg chg="del mod">
-            <ac:chgData name="Tatsumi Yamamoto" userId="56ad09d3-0015-4845-9e7e-764f67d623d8" providerId="ADAL" clId="{3AD0E615-25BC-465B-92C0-7D5C430F80CC}" dt="2026-07-03T07:42:08.356" v="2175"/>
-            <ac:spMkLst>
-              <pc:docMk/>
-              <pc:sldMasterMk cId="3267033896" sldId="2147483660"/>
-              <pc:sldLayoutMk cId="2678532073" sldId="2147483707"/>
-              <ac:spMk id="3" creationId="{AF6BE926-7433-DF44-B94B-AFCFD2BF5BAC}"/>
-            </ac:spMkLst>
-          </pc:spChg>
-          <pc:spChg chg="add mod">
-            <ac:chgData name="Tatsumi Yamamoto" userId="56ad09d3-0015-4845-9e7e-764f67d623d8" providerId="ADAL" clId="{3AD0E615-25BC-465B-92C0-7D5C430F80CC}" dt="2026-07-03T07:42:08.384" v="2179"/>
-            <ac:spMkLst>
-              <pc:docMk/>
-              <pc:sldMasterMk cId="3267033896" sldId="2147483660"/>
-              <pc:sldLayoutMk cId="2678532073" sldId="2147483707"/>
-              <ac:spMk id="4" creationId="{79233A8C-1093-5BC2-16C2-DA6500EED6AB}"/>
-            </ac:spMkLst>
-          </pc:spChg>
-          <pc:spChg chg="add mod">
-            <ac:chgData name="Tatsumi Yamamoto" userId="56ad09d3-0015-4845-9e7e-764f67d623d8" providerId="ADAL" clId="{3AD0E615-25BC-465B-92C0-7D5C430F80CC}" dt="2026-07-03T07:42:08.419" v="2183"/>
-            <ac:spMkLst>
-              <pc:docMk/>
-              <pc:sldMasterMk cId="3267033896" sldId="2147483660"/>
-              <pc:sldLayoutMk cId="2678532073" sldId="2147483707"/>
-              <ac:spMk id="5" creationId="{DD8E8BA7-0FB6-A837-96A1-16537D2E0EB6}"/>
-            </ac:spMkLst>
-          </pc:spChg>
-          <pc:spChg chg="add mod">
-            <ac:chgData name="Tatsumi Yamamoto" userId="56ad09d3-0015-4845-9e7e-764f67d623d8" providerId="ADAL" clId="{3AD0E615-25BC-465B-92C0-7D5C430F80CC}" dt="2026-07-03T07:42:08.468" v="2187"/>
-            <ac:spMkLst>
-              <pc:docMk/>
-              <pc:sldMasterMk cId="3267033896" sldId="2147483660"/>
-              <pc:sldLayoutMk cId="2678532073" sldId="2147483707"/>
-              <ac:spMk id="6" creationId="{EFC95162-8ED1-D439-D200-F68F21DDD673}"/>
-            </ac:spMkLst>
-          </pc:spChg>
-          <pc:spChg chg="add mod">
-            <ac:chgData name="Tatsumi Yamamoto" userId="56ad09d3-0015-4845-9e7e-764f67d623d8" providerId="ADAL" clId="{3AD0E615-25BC-465B-92C0-7D5C430F80CC}" dt="2026-07-03T07:42:08.493" v="2191" actId="947"/>
-            <ac:spMkLst>
-              <pc:docMk/>
-              <pc:sldMasterMk cId="3267033896" sldId="2147483660"/>
-              <pc:sldLayoutMk cId="2678532073" sldId="2147483707"/>
-              <ac:spMk id="7" creationId="{D57EEAE4-578D-C01D-5A1C-2629C17020A5}"/>
-            </ac:spMkLst>
-          </pc:spChg>
-          <pc:spChg chg="add mod">
-            <ac:chgData name="Tatsumi Yamamoto" userId="56ad09d3-0015-4845-9e7e-764f67d623d8" providerId="ADAL" clId="{3AD0E615-25BC-465B-92C0-7D5C430F80CC}" dt="2026-07-03T07:42:08.522" v="2195" actId="947"/>
-            <ac:spMkLst>
-              <pc:docMk/>
-              <pc:sldMasterMk cId="3267033896" sldId="2147483660"/>
-              <pc:sldLayoutMk cId="2678532073" sldId="2147483707"/>
-              <ac:spMk id="8" creationId="{CC6C6CDE-4492-43F0-917A-CB1DB3CDCCF6}"/>
-            </ac:spMkLst>
-          </pc:spChg>
-          <pc:spChg chg="add mod">
-            <ac:chgData name="Tatsumi Yamamoto" userId="56ad09d3-0015-4845-9e7e-764f67d623d8" providerId="ADAL" clId="{3AD0E615-25BC-465B-92C0-7D5C430F80CC}" dt="2026-07-03T07:42:08.546" v="2199" actId="947"/>
-            <ac:spMkLst>
-              <pc:docMk/>
-              <pc:sldMasterMk cId="3267033896" sldId="2147483660"/>
-              <pc:sldLayoutMk cId="2678532073" sldId="2147483707"/>
-              <ac:spMk id="9" creationId="{95FC07C8-E3BB-55A4-2660-3A8423D61AC7}"/>
-            </ac:spMkLst>
-          </pc:spChg>
-          <pc:spChg chg="add mod">
-            <ac:chgData name="Tatsumi Yamamoto" userId="56ad09d3-0015-4845-9e7e-764f67d623d8" providerId="ADAL" clId="{3AD0E615-25BC-465B-92C0-7D5C430F80CC}" dt="2026-07-03T07:42:08.572" v="2203"/>
-            <ac:spMkLst>
-              <pc:docMk/>
-              <pc:sldMasterMk cId="3267033896" sldId="2147483660"/>
-              <pc:sldLayoutMk cId="2678532073" sldId="2147483707"/>
-              <ac:spMk id="10" creationId="{D3467D85-F51A-2908-4E22-EFD9C50F9C42}"/>
-            </ac:spMkLst>
-          </pc:spChg>
-          <pc:spChg chg="add mod">
-            <ac:chgData name="Tatsumi Yamamoto" userId="56ad09d3-0015-4845-9e7e-764f67d623d8" providerId="ADAL" clId="{3AD0E615-25BC-465B-92C0-7D5C430F80CC}" dt="2026-07-03T07:42:08.606" v="2207" actId="947"/>
-            <ac:spMkLst>
-              <pc:docMk/>
-              <pc:sldMasterMk cId="3267033896" sldId="2147483660"/>
-              <pc:sldLayoutMk cId="2678532073" sldId="2147483707"/>
-              <ac:spMk id="11" creationId="{57A019E2-F098-90B3-82A5-FC002FF7029D}"/>
-            </ac:spMkLst>
-          </pc:spChg>
-          <pc:spChg chg="add mod">
-            <ac:chgData name="Tatsumi Yamamoto" userId="56ad09d3-0015-4845-9e7e-764f67d623d8" providerId="ADAL" clId="{3AD0E615-25BC-465B-92C0-7D5C430F80CC}" dt="2026-07-03T07:42:08.676" v="2211" actId="947"/>
-            <ac:spMkLst>
-              <pc:docMk/>
-              <pc:sldMasterMk cId="3267033896" sldId="2147483660"/>
-              <pc:sldLayoutMk cId="2678532073" sldId="2147483707"/>
-              <ac:spMk id="12" creationId="{807410DB-EA86-EA47-80B1-53D4A66D4FE0}"/>
-            </ac:spMkLst>
-          </pc:spChg>
-          <pc:spChg chg="add mod">
-            <ac:chgData name="Tatsumi Yamamoto" userId="56ad09d3-0015-4845-9e7e-764f67d623d8" providerId="ADAL" clId="{3AD0E615-25BC-465B-92C0-7D5C430F80CC}" dt="2026-07-03T07:42:08.698" v="2215" actId="947"/>
-            <ac:spMkLst>
-              <pc:docMk/>
-              <pc:sldMasterMk cId="3267033896" sldId="2147483660"/>
-              <pc:sldLayoutMk cId="2678532073" sldId="2147483707"/>
-              <ac:spMk id="13" creationId="{6D38A0D3-F0EC-6F53-A429-33F08FE71895}"/>
-            </ac:spMkLst>
-          </pc:spChg>
-          <pc:spChg chg="add mod">
-            <ac:chgData name="Tatsumi Yamamoto" userId="56ad09d3-0015-4845-9e7e-764f67d623d8" providerId="ADAL" clId="{3AD0E615-25BC-465B-92C0-7D5C430F80CC}" dt="2026-07-03T07:42:08.724" v="2219" actId="947"/>
-            <ac:spMkLst>
-              <pc:docMk/>
-              <pc:sldMasterMk cId="3267033896" sldId="2147483660"/>
-              <pc:sldLayoutMk cId="2678532073" sldId="2147483707"/>
-              <ac:spMk id="14" creationId="{93682CD9-EC8D-C4CA-31F0-2B86CF6433EA}"/>
-            </ac:spMkLst>
-          </pc:spChg>
-        </pc:sldLayoutChg>
-        <pc:sldLayoutChg chg="addSp delSp modSp mod">
-          <pc:chgData name="Tatsumi Yamamoto" userId="56ad09d3-0015-4845-9e7e-764f67d623d8" providerId="ADAL" clId="{3AD0E615-25BC-465B-92C0-7D5C430F80CC}" dt="2026-07-03T07:42:09.348" v="2265" actId="947"/>
-          <pc:sldLayoutMkLst>
-            <pc:docMk/>
-            <pc:sldMasterMk cId="3267033896" sldId="2147483660"/>
-            <pc:sldLayoutMk cId="2940214492" sldId="2147483708"/>
-          </pc:sldLayoutMkLst>
-          <pc:spChg chg="del">
-            <ac:chgData name="Tatsumi Yamamoto" userId="56ad09d3-0015-4845-9e7e-764f67d623d8" providerId="ADAL" clId="{3AD0E615-25BC-465B-92C0-7D5C430F80CC}" dt="2026-07-03T07:39:47.855" v="1519"/>
-            <ac:spMkLst>
-              <pc:docMk/>
-              <pc:sldMasterMk cId="3267033896" sldId="2147483660"/>
-              <pc:sldLayoutMk cId="2940214492" sldId="2147483708"/>
-              <ac:spMk id="2" creationId="{684EEA79-7D15-DAEB-9DA5-B6C9A4133B0B}"/>
-            </ac:spMkLst>
-          </pc:spChg>
-          <pc:spChg chg="del mod">
-            <ac:chgData name="Tatsumi Yamamoto" userId="56ad09d3-0015-4845-9e7e-764f67d623d8" providerId="ADAL" clId="{3AD0E615-25BC-465B-92C0-7D5C430F80CC}" dt="2026-07-03T07:42:08.762" v="2221"/>
-            <ac:spMkLst>
-              <pc:docMk/>
-              <pc:sldMasterMk cId="3267033896" sldId="2147483660"/>
-              <pc:sldLayoutMk cId="2940214492" sldId="2147483708"/>
-              <ac:spMk id="3" creationId="{BBC62F9A-9D43-53A6-3E6B-F612B95E5CEF}"/>
-            </ac:spMkLst>
-          </pc:spChg>
-          <pc:spChg chg="add mod">
-            <ac:chgData name="Tatsumi Yamamoto" userId="56ad09d3-0015-4845-9e7e-764f67d623d8" providerId="ADAL" clId="{3AD0E615-25BC-465B-92C0-7D5C430F80CC}" dt="2026-07-03T07:42:08.796" v="2225"/>
-            <ac:spMkLst>
-              <pc:docMk/>
-              <pc:sldMasterMk cId="3267033896" sldId="2147483660"/>
-              <pc:sldLayoutMk cId="2940214492" sldId="2147483708"/>
-              <ac:spMk id="4" creationId="{2E3E8448-1635-E5AE-64C7-290632DA7F74}"/>
-            </ac:spMkLst>
-          </pc:spChg>
-          <pc:spChg chg="add mod">
-            <ac:chgData name="Tatsumi Yamamoto" userId="56ad09d3-0015-4845-9e7e-764f67d623d8" providerId="ADAL" clId="{3AD0E615-25BC-465B-92C0-7D5C430F80CC}" dt="2026-07-03T07:42:08.822" v="2229"/>
-            <ac:spMkLst>
-              <pc:docMk/>
-              <pc:sldMasterMk cId="3267033896" sldId="2147483660"/>
-              <pc:sldLayoutMk cId="2940214492" sldId="2147483708"/>
-              <ac:spMk id="5" creationId="{CA1B49E0-8DFB-7247-F999-9AF986E4D403}"/>
-            </ac:spMkLst>
-          </pc:spChg>
-          <pc:spChg chg="add mod">
-            <ac:chgData name="Tatsumi Yamamoto" userId="56ad09d3-0015-4845-9e7e-764f67d623d8" providerId="ADAL" clId="{3AD0E615-25BC-465B-92C0-7D5C430F80CC}" dt="2026-07-03T07:42:08.890" v="2233"/>
-            <ac:spMkLst>
-              <pc:docMk/>
-              <pc:sldMasterMk cId="3267033896" sldId="2147483660"/>
-              <pc:sldLayoutMk cId="2940214492" sldId="2147483708"/>
-              <ac:spMk id="6" creationId="{9F55ED3E-A3DB-74C8-D241-D8DF4FCCEC9D}"/>
-            </ac:spMkLst>
-          </pc:spChg>
-          <pc:spChg chg="add mod">
-            <ac:chgData name="Tatsumi Yamamoto" userId="56ad09d3-0015-4845-9e7e-764f67d623d8" providerId="ADAL" clId="{3AD0E615-25BC-465B-92C0-7D5C430F80CC}" dt="2026-07-03T07:42:08.939" v="2237" actId="947"/>
-            <ac:spMkLst>
-              <pc:docMk/>
-              <pc:sldMasterMk cId="3267033896" sldId="2147483660"/>
-              <pc:sldLayoutMk cId="2940214492" sldId="2147483708"/>
-              <ac:spMk id="7" creationId="{493EF373-B76C-7750-EF75-0C2E2657D382}"/>
-            </ac:spMkLst>
-          </pc:spChg>
-          <pc:spChg chg="add mod">
-            <ac:chgData name="Tatsumi Yamamoto" userId="56ad09d3-0015-4845-9e7e-764f67d623d8" providerId="ADAL" clId="{3AD0E615-25BC-465B-92C0-7D5C430F80CC}" dt="2026-07-03T07:42:08.968" v="2241" actId="947"/>
-            <ac:spMkLst>
-              <pc:docMk/>
-              <pc:sldMasterMk cId="3267033896" sldId="2147483660"/>
-              <pc:sldLayoutMk cId="2940214492" sldId="2147483708"/>
-              <ac:spMk id="8" creationId="{523CD866-ED91-2996-32B8-F46965C72C59}"/>
-            </ac:spMkLst>
-          </pc:spChg>
-          <pc:spChg chg="add mod">
-            <ac:chgData name="Tatsumi Yamamoto" userId="56ad09d3-0015-4845-9e7e-764f67d623d8" providerId="ADAL" clId="{3AD0E615-25BC-465B-92C0-7D5C430F80CC}" dt="2026-07-03T07:42:08.999" v="2245" actId="947"/>
-            <ac:spMkLst>
-              <pc:docMk/>
-              <pc:sldMasterMk cId="3267033896" sldId="2147483660"/>
-              <pc:sldLayoutMk cId="2940214492" sldId="2147483708"/>
-              <ac:spMk id="9" creationId="{94A50F8B-F436-8818-7C39-FF888B6DFF95}"/>
-            </ac:spMkLst>
-          </pc:spChg>
-          <pc:spChg chg="add mod">
-            <ac:chgData name="Tatsumi Yamamoto" userId="56ad09d3-0015-4845-9e7e-764f67d623d8" providerId="ADAL" clId="{3AD0E615-25BC-465B-92C0-7D5C430F80CC}" dt="2026-07-03T07:42:09.052" v="2249"/>
-            <ac:spMkLst>
-              <pc:docMk/>
-              <pc:sldMasterMk cId="3267033896" sldId="2147483660"/>
-              <pc:sldLayoutMk cId="2940214492" sldId="2147483708"/>
-              <ac:spMk id="10" creationId="{24C7057B-690A-DF23-4238-74C63CD85BC7}"/>
-            </ac:spMkLst>
-          </pc:spChg>
-          <pc:spChg chg="add mod">
-            <ac:chgData name="Tatsumi Yamamoto" userId="56ad09d3-0015-4845-9e7e-764f67d623d8" providerId="ADAL" clId="{3AD0E615-25BC-465B-92C0-7D5C430F80CC}" dt="2026-07-03T07:42:09.097" v="2253" actId="947"/>
-            <ac:spMkLst>
-              <pc:docMk/>
-              <pc:sldMasterMk cId="3267033896" sldId="2147483660"/>
-              <pc:sldLayoutMk cId="2940214492" sldId="2147483708"/>
-              <ac:spMk id="11" creationId="{D050CF8A-7442-875C-FB6D-0107A9ECA081}"/>
-            </ac:spMkLst>
-          </pc:spChg>
-          <pc:spChg chg="add mod">
-            <ac:chgData name="Tatsumi Yamamoto" userId="56ad09d3-0015-4845-9e7e-764f67d623d8" providerId="ADAL" clId="{3AD0E615-25BC-465B-92C0-7D5C430F80CC}" dt="2026-07-03T07:42:09.135" v="2257" actId="947"/>
-            <ac:spMkLst>
-              <pc:docMk/>
-              <pc:sldMasterMk cId="3267033896" sldId="2147483660"/>
-              <pc:sldLayoutMk cId="2940214492" sldId="2147483708"/>
-              <ac:spMk id="12" creationId="{37948EA6-D438-600E-2123-5ED5CB2B5ADC}"/>
-            </ac:spMkLst>
-          </pc:spChg>
-          <pc:spChg chg="add mod">
-            <ac:chgData name="Tatsumi Yamamoto" userId="56ad09d3-0015-4845-9e7e-764f67d623d8" providerId="ADAL" clId="{3AD0E615-25BC-465B-92C0-7D5C430F80CC}" dt="2026-07-03T07:42:09.167" v="2261" actId="947"/>
-            <ac:spMkLst>
-              <pc:docMk/>
-              <pc:sldMasterMk cId="3267033896" sldId="2147483660"/>
-              <pc:sldLayoutMk cId="2940214492" sldId="2147483708"/>
-              <ac:spMk id="13" creationId="{72907BF5-5B9A-9EE5-3A12-4193A846BBF1}"/>
-            </ac:spMkLst>
-          </pc:spChg>
-          <pc:spChg chg="add mod">
-            <ac:chgData name="Tatsumi Yamamoto" userId="56ad09d3-0015-4845-9e7e-764f67d623d8" providerId="ADAL" clId="{3AD0E615-25BC-465B-92C0-7D5C430F80CC}" dt="2026-07-03T07:42:09.348" v="2265" actId="947"/>
-            <ac:spMkLst>
-              <pc:docMk/>
-              <pc:sldMasterMk cId="3267033896" sldId="2147483660"/>
-              <pc:sldLayoutMk cId="2940214492" sldId="2147483708"/>
-              <ac:spMk id="14" creationId="{3901AEB7-3D49-A6EA-0D1D-3A69B56F60F3}"/>
-            </ac:spMkLst>
-          </pc:spChg>
-        </pc:sldLayoutChg>
-        <pc:sldLayoutChg chg="addSp delSp modSp mod">
-          <pc:chgData name="Tatsumi Yamamoto" userId="56ad09d3-0015-4845-9e7e-764f67d623d8" providerId="ADAL" clId="{3AD0E615-25BC-465B-92C0-7D5C430F80CC}" dt="2026-07-03T07:42:10.513" v="2351" actId="947"/>
-          <pc:sldLayoutMkLst>
-            <pc:docMk/>
-            <pc:sldMasterMk cId="3267033896" sldId="2147483660"/>
-            <pc:sldLayoutMk cId="4283499241" sldId="2147483709"/>
-          </pc:sldLayoutMkLst>
-          <pc:spChg chg="mod">
-            <ac:chgData name="Tatsumi Yamamoto" userId="56ad09d3-0015-4845-9e7e-764f67d623d8" providerId="ADAL" clId="{3AD0E615-25BC-465B-92C0-7D5C430F80CC}" dt="2026-07-03T07:42:09.964" v="2291" actId="947"/>
-            <ac:spMkLst>
-              <pc:docMk/>
-              <pc:sldMasterMk cId="3267033896" sldId="2147483660"/>
-              <pc:sldLayoutMk cId="4283499241" sldId="2147483709"/>
-              <ac:spMk id="2" creationId="{A157C537-AA65-EC49-ED59-29F3B647BD2A}"/>
-            </ac:spMkLst>
-          </pc:spChg>
-          <pc:spChg chg="del mod">
-            <ac:chgData name="Tatsumi Yamamoto" userId="56ad09d3-0015-4845-9e7e-764f67d623d8" providerId="ADAL" clId="{3AD0E615-25BC-465B-92C0-7D5C430F80CC}" dt="2026-07-03T07:42:09.918" v="2287"/>
-            <ac:spMkLst>
-              <pc:docMk/>
-              <pc:sldMasterMk cId="3267033896" sldId="2147483660"/>
-              <pc:sldLayoutMk cId="4283499241" sldId="2147483709"/>
-              <ac:spMk id="3" creationId="{2224B5B6-1A7B-22E3-FCE0-39916D20D8A6}"/>
-            </ac:spMkLst>
-          </pc:spChg>
-          <pc:spChg chg="add mod">
-            <ac:chgData name="Tatsumi Yamamoto" userId="56ad09d3-0015-4845-9e7e-764f67d623d8" providerId="ADAL" clId="{3AD0E615-25BC-465B-92C0-7D5C430F80CC}" dt="2026-07-03T07:42:09.993" v="2295"/>
-            <ac:spMkLst>
-              <pc:docMk/>
-              <pc:sldMasterMk cId="3267033896" sldId="2147483660"/>
-              <pc:sldLayoutMk cId="4283499241" sldId="2147483709"/>
-              <ac:spMk id="4" creationId="{7D2DF01A-EB27-B115-18B1-6990F4592E2B}"/>
-            </ac:spMkLst>
-          </pc:spChg>
-          <pc:spChg chg="add mod">
-            <ac:chgData name="Tatsumi Yamamoto" userId="56ad09d3-0015-4845-9e7e-764f67d623d8" providerId="ADAL" clId="{3AD0E615-25BC-465B-92C0-7D5C430F80CC}" dt="2026-07-03T07:42:10.024" v="2299"/>
-            <ac:spMkLst>
-              <pc:docMk/>
-              <pc:sldMasterMk cId="3267033896" sldId="2147483660"/>
-              <pc:sldLayoutMk cId="4283499241" sldId="2147483709"/>
-              <ac:spMk id="5" creationId="{C4E9B504-DA34-9DB4-F15D-EDEE1FE9B88D}"/>
-            </ac:spMkLst>
-          </pc:spChg>
-          <pc:spChg chg="add mod">
-            <ac:chgData name="Tatsumi Yamamoto" userId="56ad09d3-0015-4845-9e7e-764f67d623d8" providerId="ADAL" clId="{3AD0E615-25BC-465B-92C0-7D5C430F80CC}" dt="2026-07-03T07:42:10.056" v="2303"/>
-            <ac:spMkLst>
-              <pc:docMk/>
-              <pc:sldMasterMk cId="3267033896" sldId="2147483660"/>
-              <pc:sldLayoutMk cId="4283499241" sldId="2147483709"/>
-              <ac:spMk id="6" creationId="{F1D17F6F-6916-D9D6-6E3D-24B329DBAA73}"/>
-            </ac:spMkLst>
-          </pc:spChg>
-          <pc:spChg chg="add mod">
-            <ac:chgData name="Tatsumi Yamamoto" userId="56ad09d3-0015-4845-9e7e-764f67d623d8" providerId="ADAL" clId="{3AD0E615-25BC-465B-92C0-7D5C430F80CC}" dt="2026-07-03T07:42:10.083" v="2307" actId="947"/>
-            <ac:spMkLst>
-              <pc:docMk/>
-              <pc:sldMasterMk cId="3267033896" sldId="2147483660"/>
-              <pc:sldLayoutMk cId="4283499241" sldId="2147483709"/>
-              <ac:spMk id="7" creationId="{8E27C80E-DE69-9398-2AC5-0E23DCDF3B30}"/>
-            </ac:spMkLst>
-          </pc:spChg>
-          <pc:spChg chg="add mod">
-            <ac:chgData name="Tatsumi Yamamoto" userId="56ad09d3-0015-4845-9e7e-764f67d623d8" providerId="ADAL" clId="{3AD0E615-25BC-465B-92C0-7D5C430F80CC}" dt="2026-07-03T07:42:10.117" v="2311" actId="947"/>
-            <ac:spMkLst>
-              <pc:docMk/>
-              <pc:sldMasterMk cId="3267033896" sldId="2147483660"/>
-              <pc:sldLayoutMk cId="4283499241" sldId="2147483709"/>
-              <ac:spMk id="8" creationId="{1D5A89B0-EFE2-E7DB-9585-A74EE84515C0}"/>
-            </ac:spMkLst>
-          </pc:spChg>
-          <pc:spChg chg="add mod">
-            <ac:chgData name="Tatsumi Yamamoto" userId="56ad09d3-0015-4845-9e7e-764f67d623d8" providerId="ADAL" clId="{3AD0E615-25BC-465B-92C0-7D5C430F80CC}" dt="2026-07-03T07:42:10.145" v="2315" actId="947"/>
-            <ac:spMkLst>
-              <pc:docMk/>
-              <pc:sldMasterMk cId="3267033896" sldId="2147483660"/>
-              <pc:sldLayoutMk cId="4283499241" sldId="2147483709"/>
-              <ac:spMk id="9" creationId="{20AB9571-AB41-A121-7226-8E05C7D66C5D}"/>
-            </ac:spMkLst>
-          </pc:spChg>
-          <pc:spChg chg="add mod">
-            <ac:chgData name="Tatsumi Yamamoto" userId="56ad09d3-0015-4845-9e7e-764f67d623d8" providerId="ADAL" clId="{3AD0E615-25BC-465B-92C0-7D5C430F80CC}" dt="2026-07-03T07:42:10.180" v="2319" actId="947"/>
-            <ac:spMkLst>
-              <pc:docMk/>
-              <pc:sldMasterMk cId="3267033896" sldId="2147483660"/>
-              <pc:sldLayoutMk cId="4283499241" sldId="2147483709"/>
-              <ac:spMk id="10" creationId="{3938F0CE-FBE7-DCB5-4B56-4ED0769268D8}"/>
-            </ac:spMkLst>
-          </pc:spChg>
-          <pc:spChg chg="add mod">
-            <ac:chgData name="Tatsumi Yamamoto" userId="56ad09d3-0015-4845-9e7e-764f67d623d8" providerId="ADAL" clId="{3AD0E615-25BC-465B-92C0-7D5C430F80CC}" dt="2026-07-03T07:42:10.220" v="2323" actId="947"/>
-            <ac:spMkLst>
-              <pc:docMk/>
-              <pc:sldMasterMk cId="3267033896" sldId="2147483660"/>
-              <pc:sldLayoutMk cId="4283499241" sldId="2147483709"/>
-              <ac:spMk id="11" creationId="{C8EFB395-0058-E149-A502-7AA457278613}"/>
-            </ac:spMkLst>
-          </pc:spChg>
-          <pc:spChg chg="add mod">
-            <ac:chgData name="Tatsumi Yamamoto" userId="56ad09d3-0015-4845-9e7e-764f67d623d8" providerId="ADAL" clId="{3AD0E615-25BC-465B-92C0-7D5C430F80CC}" dt="2026-07-03T07:42:10.294" v="2327" actId="947"/>
-            <ac:spMkLst>
-              <pc:docMk/>
-              <pc:sldMasterMk cId="3267033896" sldId="2147483660"/>
-              <pc:sldLayoutMk cId="4283499241" sldId="2147483709"/>
-              <ac:spMk id="12" creationId="{317ABF93-D783-7107-519B-7ED6EE04BF35}"/>
-            </ac:spMkLst>
-          </pc:spChg>
-          <pc:spChg chg="add mod">
-            <ac:chgData name="Tatsumi Yamamoto" userId="56ad09d3-0015-4845-9e7e-764f67d623d8" providerId="ADAL" clId="{3AD0E615-25BC-465B-92C0-7D5C430F80CC}" dt="2026-07-03T07:42:10.319" v="2331" actId="947"/>
-            <ac:spMkLst>
-              <pc:docMk/>
-              <pc:sldMasterMk cId="3267033896" sldId="2147483660"/>
-              <pc:sldLayoutMk cId="4283499241" sldId="2147483709"/>
-              <ac:spMk id="13" creationId="{4A57AEC8-7251-BDB2-2F8B-5FA5BDC2BB29}"/>
-            </ac:spMkLst>
-          </pc:spChg>
-          <pc:spChg chg="add mod">
-            <ac:chgData name="Tatsumi Yamamoto" userId="56ad09d3-0015-4845-9e7e-764f67d623d8" providerId="ADAL" clId="{3AD0E615-25BC-465B-92C0-7D5C430F80CC}" dt="2026-07-03T07:42:10.348" v="2335" actId="947"/>
-            <ac:spMkLst>
-              <pc:docMk/>
-              <pc:sldMasterMk cId="3267033896" sldId="2147483660"/>
-              <pc:sldLayoutMk cId="4283499241" sldId="2147483709"/>
-              <ac:spMk id="14" creationId="{4B698B36-3D72-FE5F-ADC3-163D62BF55B6}"/>
-            </ac:spMkLst>
-          </pc:spChg>
-          <pc:spChg chg="add mod">
-            <ac:chgData name="Tatsumi Yamamoto" userId="56ad09d3-0015-4845-9e7e-764f67d623d8" providerId="ADAL" clId="{3AD0E615-25BC-465B-92C0-7D5C430F80CC}" dt="2026-07-03T07:42:10.389" v="2339" actId="947"/>
-            <ac:spMkLst>
-              <pc:docMk/>
-              <pc:sldMasterMk cId="3267033896" sldId="2147483660"/>
-              <pc:sldLayoutMk cId="4283499241" sldId="2147483709"/>
-              <ac:spMk id="15" creationId="{680C8AC0-5767-B26A-0BD5-09CE5C501C52}"/>
-            </ac:spMkLst>
-          </pc:spChg>
-          <pc:spChg chg="add mod">
-            <ac:chgData name="Tatsumi Yamamoto" userId="56ad09d3-0015-4845-9e7e-764f67d623d8" providerId="ADAL" clId="{3AD0E615-25BC-465B-92C0-7D5C430F80CC}" dt="2026-07-03T07:42:10.413" v="2343" actId="947"/>
-            <ac:spMkLst>
-              <pc:docMk/>
-              <pc:sldMasterMk cId="3267033896" sldId="2147483660"/>
-              <pc:sldLayoutMk cId="4283499241" sldId="2147483709"/>
-              <ac:spMk id="16" creationId="{AD54B102-BFCB-82DA-CEED-FBDE01973945}"/>
-            </ac:spMkLst>
-          </pc:spChg>
-          <pc:spChg chg="add mod">
-            <ac:chgData name="Tatsumi Yamamoto" userId="56ad09d3-0015-4845-9e7e-764f67d623d8" providerId="ADAL" clId="{3AD0E615-25BC-465B-92C0-7D5C430F80CC}" dt="2026-07-03T07:42:10.455" v="2347" actId="947"/>
-            <ac:spMkLst>
-              <pc:docMk/>
-              <pc:sldMasterMk cId="3267033896" sldId="2147483660"/>
-              <pc:sldLayoutMk cId="4283499241" sldId="2147483709"/>
-              <ac:spMk id="17" creationId="{1D5C899C-6FD0-CE1F-79F8-7E8745939D31}"/>
-            </ac:spMkLst>
-          </pc:spChg>
-          <pc:spChg chg="add mod">
-            <ac:chgData name="Tatsumi Yamamoto" userId="56ad09d3-0015-4845-9e7e-764f67d623d8" providerId="ADAL" clId="{3AD0E615-25BC-465B-92C0-7D5C430F80CC}" dt="2026-07-03T07:42:10.513" v="2351" actId="947"/>
-            <ac:spMkLst>
-              <pc:docMk/>
-              <pc:sldMasterMk cId="3267033896" sldId="2147483660"/>
-              <pc:sldLayoutMk cId="4283499241" sldId="2147483709"/>
-              <ac:spMk id="18" creationId="{977460B9-E2ED-99B7-3929-379E248D84DD}"/>
-            </ac:spMkLst>
-          </pc:spChg>
-        </pc:sldLayoutChg>
-        <pc:sldLayoutChg chg="addSp delSp modSp mod">
-          <pc:chgData name="Tatsumi Yamamoto" userId="56ad09d3-0015-4845-9e7e-764f67d623d8" providerId="ADAL" clId="{3AD0E615-25BC-465B-92C0-7D5C430F80CC}" dt="2026-07-03T07:42:10.756" v="2389" actId="947"/>
-          <pc:sldLayoutMkLst>
-            <pc:docMk/>
-            <pc:sldMasterMk cId="3267033896" sldId="2147483660"/>
-            <pc:sldLayoutMk cId="697451680" sldId="2147483710"/>
-          </pc:sldLayoutMkLst>
-          <pc:spChg chg="mod">
-            <ac:chgData name="Tatsumi Yamamoto" userId="56ad09d3-0015-4845-9e7e-764f67d623d8" providerId="ADAL" clId="{3AD0E615-25BC-465B-92C0-7D5C430F80CC}" dt="2026-07-03T07:42:10.563" v="2357" actId="947"/>
-            <ac:spMkLst>
-              <pc:docMk/>
-              <pc:sldMasterMk cId="3267033896" sldId="2147483660"/>
-              <pc:sldLayoutMk cId="697451680" sldId="2147483710"/>
-              <ac:spMk id="2" creationId="{07E9CD90-E1D0-83A6-B412-9E9D26D92577}"/>
-            </ac:spMkLst>
-          </pc:spChg>
-          <pc:spChg chg="del mod">
-            <ac:chgData name="Tatsumi Yamamoto" userId="56ad09d3-0015-4845-9e7e-764f67d623d8" providerId="ADAL" clId="{3AD0E615-25BC-465B-92C0-7D5C430F80CC}" dt="2026-07-03T07:42:10.537" v="2353"/>
-            <ac:spMkLst>
-              <pc:docMk/>
-              <pc:sldMasterMk cId="3267033896" sldId="2147483660"/>
-              <pc:sldLayoutMk cId="697451680" sldId="2147483710"/>
-              <ac:spMk id="3" creationId="{C135CD13-FEFC-D246-C16B-333705F97EDB}"/>
-            </ac:spMkLst>
-          </pc:spChg>
-          <pc:spChg chg="add mod">
-            <ac:chgData name="Tatsumi Yamamoto" userId="56ad09d3-0015-4845-9e7e-764f67d623d8" providerId="ADAL" clId="{3AD0E615-25BC-465B-92C0-7D5C430F80CC}" dt="2026-07-03T07:42:10.583" v="2361"/>
-            <ac:spMkLst>
-              <pc:docMk/>
-              <pc:sldMasterMk cId="3267033896" sldId="2147483660"/>
-              <pc:sldLayoutMk cId="697451680" sldId="2147483710"/>
-              <ac:spMk id="4" creationId="{388027DA-7DBD-EC8F-2F25-89C15FB73828}"/>
-            </ac:spMkLst>
-          </pc:spChg>
-          <pc:spChg chg="add mod">
-            <ac:chgData name="Tatsumi Yamamoto" userId="56ad09d3-0015-4845-9e7e-764f67d623d8" providerId="ADAL" clId="{3AD0E615-25BC-465B-92C0-7D5C430F80CC}" dt="2026-07-03T07:42:10.600" v="2365"/>
-            <ac:spMkLst>
-              <pc:docMk/>
-              <pc:sldMasterMk cId="3267033896" sldId="2147483660"/>
-              <pc:sldLayoutMk cId="697451680" sldId="2147483710"/>
-              <ac:spMk id="5" creationId="{B6AB3496-399C-E030-B85C-3E59B79D0F34}"/>
-            </ac:spMkLst>
-          </pc:spChg>
-          <pc:spChg chg="add mod">
-            <ac:chgData name="Tatsumi Yamamoto" userId="56ad09d3-0015-4845-9e7e-764f67d623d8" providerId="ADAL" clId="{3AD0E615-25BC-465B-92C0-7D5C430F80CC}" dt="2026-07-03T07:42:10.619" v="2369"/>
-            <ac:spMkLst>
-              <pc:docMk/>
-              <pc:sldMasterMk cId="3267033896" sldId="2147483660"/>
-              <pc:sldLayoutMk cId="697451680" sldId="2147483710"/>
-              <ac:spMk id="6" creationId="{463F7EE3-7EAE-5BB1-79FD-7D8C19CA61D6}"/>
-            </ac:spMkLst>
-          </pc:spChg>
-          <pc:spChg chg="add mod">
-            <ac:chgData name="Tatsumi Yamamoto" userId="56ad09d3-0015-4845-9e7e-764f67d623d8" providerId="ADAL" clId="{3AD0E615-25BC-465B-92C0-7D5C430F80CC}" dt="2026-07-03T07:42:10.642" v="2373" actId="947"/>
-            <ac:spMkLst>
-              <pc:docMk/>
-              <pc:sldMasterMk cId="3267033896" sldId="2147483660"/>
-              <pc:sldLayoutMk cId="697451680" sldId="2147483710"/>
-              <ac:spMk id="7" creationId="{99C4A540-E2EC-1DA5-ACE2-9CF96F5D7483}"/>
-            </ac:spMkLst>
-          </pc:spChg>
-          <pc:spChg chg="add mod">
-            <ac:chgData name="Tatsumi Yamamoto" userId="56ad09d3-0015-4845-9e7e-764f67d623d8" providerId="ADAL" clId="{3AD0E615-25BC-465B-92C0-7D5C430F80CC}" dt="2026-07-03T07:42:10.696" v="2377" actId="947"/>
-            <ac:spMkLst>
-              <pc:docMk/>
-              <pc:sldMasterMk cId="3267033896" sldId="2147483660"/>
-              <pc:sldLayoutMk cId="697451680" sldId="2147483710"/>
-              <ac:spMk id="8" creationId="{3BB37931-E496-5CBC-CA8E-49E344B23128}"/>
-            </ac:spMkLst>
-          </pc:spChg>
-          <pc:spChg chg="add mod">
-            <ac:chgData name="Tatsumi Yamamoto" userId="56ad09d3-0015-4845-9e7e-764f67d623d8" providerId="ADAL" clId="{3AD0E615-25BC-465B-92C0-7D5C430F80CC}" dt="2026-07-03T07:42:10.716" v="2381" actId="947"/>
-            <ac:spMkLst>
-              <pc:docMk/>
-              <pc:sldMasterMk cId="3267033896" sldId="2147483660"/>
-              <pc:sldLayoutMk cId="697451680" sldId="2147483710"/>
-              <ac:spMk id="9" creationId="{412A7A8C-7620-0BB0-4CB3-90D2BD3C6FE7}"/>
-            </ac:spMkLst>
-          </pc:spChg>
-          <pc:spChg chg="add mod">
-            <ac:chgData name="Tatsumi Yamamoto" userId="56ad09d3-0015-4845-9e7e-764f67d623d8" providerId="ADAL" clId="{3AD0E615-25BC-465B-92C0-7D5C430F80CC}" dt="2026-07-03T07:42:10.733" v="2385"/>
-            <ac:spMkLst>
-              <pc:docMk/>
-              <pc:sldMasterMk cId="3267033896" sldId="2147483660"/>
-              <pc:sldLayoutMk cId="697451680" sldId="2147483710"/>
-              <ac:spMk id="10" creationId="{6A0F71C9-BAAA-739E-2790-C7E83A8C7578}"/>
-            </ac:spMkLst>
-          </pc:spChg>
-          <pc:spChg chg="add mod">
-            <ac:chgData name="Tatsumi Yamamoto" userId="56ad09d3-0015-4845-9e7e-764f67d623d8" providerId="ADAL" clId="{3AD0E615-25BC-465B-92C0-7D5C430F80CC}" dt="2026-07-03T07:42:10.756" v="2389" actId="947"/>
-            <ac:spMkLst>
-              <pc:docMk/>
-              <pc:sldMasterMk cId="3267033896" sldId="2147483660"/>
-              <pc:sldLayoutMk cId="697451680" sldId="2147483710"/>
-              <ac:spMk id="11" creationId="{C49BED88-C981-0325-1F5F-B680C9EB73A7}"/>
-            </ac:spMkLst>
-          </pc:spChg>
-        </pc:sldLayoutChg>
-        <pc:sldLayoutChg chg="modSp mod">
-          <pc:chgData name="Tatsumi Yamamoto" userId="56ad09d3-0015-4845-9e7e-764f67d623d8" providerId="ADAL" clId="{3AD0E615-25BC-465B-92C0-7D5C430F80CC}" dt="2026-07-03T13:54:32.959" v="2419" actId="1076"/>
-          <pc:sldLayoutMkLst>
-            <pc:docMk/>
-            <pc:sldMasterMk cId="3267033896" sldId="2147483660"/>
-            <pc:sldLayoutMk cId="3871808901" sldId="2147483715"/>
-          </pc:sldLayoutMkLst>
-          <pc:spChg chg="mod">
-            <ac:chgData name="Tatsumi Yamamoto" userId="56ad09d3-0015-4845-9e7e-764f67d623d8" providerId="ADAL" clId="{3AD0E615-25BC-465B-92C0-7D5C430F80CC}" dt="2026-07-03T13:54:32.959" v="2419" actId="1076"/>
-            <ac:spMkLst>
-              <pc:docMk/>
-              <pc:sldMasterMk cId="3267033896" sldId="2147483660"/>
-              <pc:sldLayoutMk cId="3871808901" sldId="2147483715"/>
-              <ac:spMk id="6" creationId="{3D514691-82CF-1D78-D942-42F364F71273}"/>
-            </ac:spMkLst>
-          </pc:spChg>
-        </pc:sldLayoutChg>
-      </pc:sldMasterChg>
-    </pc:docChg>
-  </pc:docChgLst>
-</pc:chgInfo>
-</file>
-
 <file path=ppt/handoutMasters/handoutMaster1.xml><?xml version="1.0" encoding="utf-8"?>
 <p:handoutMaster xmlns:a="http://schemas.openxmlformats.org/drawingml/2006/main" xmlns:r="http://schemas.openxmlformats.org/officeDocument/2006/relationships" xmlns:p="http://schemas.openxmlformats.org/presentationml/2006/main">
   <p:cSld>
@@ -2020,7 +254,7 @@
           <a:p>
             <a:fld id="{CFED7833-891C-3348-9D2F-0663F8C220D5}" type="datetimeFigureOut">
               <a:rPr kumimoji="1" lang="en-US" altLang="ja-JP" smtClean="0"/>
-              <a:t>7/3/2026</a:t>
+              <a:t>7/6/2026</a:t>
             </a:fld>
             <a:endParaRPr kumimoji="1" lang="ja-JP" altLang="en-US"/>
           </a:p>
@@ -2185,7 +419,7 @@
           <a:p>
             <a:fld id="{8FE93EE4-5148-4373-BFAF-8426F065D214}" type="datetimeFigureOut">
               <a:rPr kumimoji="1" lang="ja-JP" altLang="en-US" smtClean="0"/>
-              <a:t>2026/7/3</a:t>
+              <a:t>2026/7/6</a:t>
             </a:fld>
             <a:endParaRPr kumimoji="1" lang="ja-JP" altLang="en-US"/>
           </a:p>
@@ -4312,482 +2546,6 @@
 </p:notes>
 </file>
 
-<file path=ppt/notesSlides/notesSlide7.xml><?xml version="1.0" encoding="utf-8"?>
-<p:notes xmlns:a="http://schemas.openxmlformats.org/drawingml/2006/main" xmlns:r="http://schemas.openxmlformats.org/officeDocument/2006/relationships" xmlns:p="http://schemas.openxmlformats.org/presentationml/2006/main">
-  <p:cSld>
-    <p:spTree>
-      <p:nvGrpSpPr>
-        <p:cNvPr id="1" name=""/>
-        <p:cNvGrpSpPr/>
-        <p:nvPr/>
-      </p:nvGrpSpPr>
-      <p:grpSpPr>
-        <a:xfrm>
-          <a:off x="0" y="0"/>
-          <a:ext cx="0" cy="0"/>
-          <a:chOff x="0" y="0"/>
-          <a:chExt cx="0" cy="0"/>
-        </a:xfrm>
-      </p:grpSpPr>
-      <p:sp>
-        <p:nvSpPr>
-          <p:cNvPr id="2" name="スライド イメージ プレースホルダー 1"/>
-          <p:cNvSpPr>
-            <a:spLocks noGrp="1" noRot="1" noChangeAspect="1"/>
-          </p:cNvSpPr>
-          <p:nvPr>
-            <p:ph type="sldImg"/>
-          </p:nvPr>
-        </p:nvSpPr>
-        <p:spPr/>
-      </p:sp>
-      <p:sp>
-        <p:nvSpPr>
-          <p:cNvPr id="3" name="ノート プレースホルダー 2"/>
-          <p:cNvSpPr>
-            <a:spLocks noGrp="1"/>
-          </p:cNvSpPr>
-          <p:nvPr>
-            <p:ph type="body" idx="1"/>
-          </p:nvPr>
-        </p:nvSpPr>
-        <p:spPr/>
-        <p:txBody>
-          <a:bodyPr/>
-          <a:lstStyle/>
-          <a:p>
-            <a:pPr>
-              <a:buNone/>
-            </a:pPr>
-            <a:r>
-              <a:rPr lang="en-US" altLang="ja-JP"/>
-              <a:t>Copilot </a:t>
-            </a:r>
-            <a:r>
-              <a:rPr lang="ja-JP" altLang="en-US"/>
-              <a:t>によって生成されました</a:t>
-            </a:r>
-            <a:br>
-              <a:rPr lang="ja-JP" altLang="en-US"/>
-            </a:br>
-            <a:br>
-              <a:rPr lang="ja-JP" altLang="en-US"/>
-            </a:br>
-            <a:r>
-              <a:rPr lang="ja-JP" altLang="en-US"/>
-              <a:t>このスライドは</a:t>
-            </a:r>
-            <a:r>
-              <a:rPr lang="en-US" altLang="ja-JP"/>
-              <a:t>Microsoft</a:t>
-            </a:r>
-            <a:r>
-              <a:rPr lang="ja-JP" altLang="en-US"/>
-              <a:t>の著作権と免責事項を示しています。</a:t>
-            </a:r>
-            <a:r>
-              <a:rPr lang="en-US" altLang="ja-JP"/>
-              <a:t>Microsoft</a:t>
-            </a:r>
-            <a:r>
-              <a:rPr lang="ja-JP" altLang="en-US"/>
-              <a:t>の商標や情報の提供目的、内容の正確性保証の制限について明記されており、ブランドイメージの強調と法的注意事項を伝えています。プレゼンテーションの締めくくりとして、</a:t>
-            </a:r>
-            <a:r>
-              <a:rPr lang="en-US" altLang="ja-JP"/>
-              <a:t>Microsoft</a:t>
-            </a:r>
-            <a:r>
-              <a:rPr lang="ja-JP" altLang="en-US"/>
-              <a:t>の信頼性と情報の位置づけを理解いただくための重要なスライドです。 </a:t>
-            </a:r>
-            <a:br>
-              <a:rPr lang="ja-JP" altLang="en-US"/>
-            </a:br>
-            <a:r>
-              <a:rPr lang="en-US" altLang="ja-JP"/>
-              <a:t>______</a:t>
-            </a:r>
-          </a:p>
-          <a:p>
-            <a:pPr>
-              <a:buNone/>
-            </a:pPr>
-            <a:br>
-              <a:rPr lang="en-US" altLang="ja-JP"/>
-            </a:br>
-            <a:r>
-              <a:rPr lang="en-US" altLang="ja-JP"/>
-              <a:t>Copilot </a:t>
-            </a:r>
-            <a:r>
-              <a:rPr lang="ja-JP" altLang="en-US"/>
-              <a:t>によって生成されました</a:t>
-            </a:r>
-            <a:br>
-              <a:rPr lang="ja-JP" altLang="en-US"/>
-            </a:br>
-            <a:br>
-              <a:rPr lang="ja-JP" altLang="en-US"/>
-            </a:br>
-            <a:r>
-              <a:rPr lang="ja-JP" altLang="en-US"/>
-              <a:t>このスライドは</a:t>
-            </a:r>
-            <a:r>
-              <a:rPr lang="en-US" altLang="ja-JP"/>
-              <a:t>Microsoft</a:t>
-            </a:r>
-            <a:r>
-              <a:rPr lang="ja-JP" altLang="en-US"/>
-              <a:t>のブランドイメージを強調するシンプルなデザインで、著作権情報と免責事項が記載されています。</a:t>
-            </a:r>
-            <a:r>
-              <a:rPr lang="en-US" altLang="ja-JP"/>
-              <a:t>Microsoft</a:t>
-            </a:r>
-            <a:r>
-              <a:rPr lang="ja-JP" altLang="en-US"/>
-              <a:t>の商標や情報の性質について説明し、内容の正確性保証はないことを明示しています。 </a:t>
-            </a:r>
-            <a:br>
-              <a:rPr lang="ja-JP" altLang="en-US"/>
-            </a:br>
-            <a:r>
-              <a:rPr lang="en-US" altLang="ja-JP"/>
-              <a:t>______</a:t>
-            </a:r>
-          </a:p>
-          <a:p>
-            <a:pPr>
-              <a:buNone/>
-            </a:pPr>
-            <a:br>
-              <a:rPr lang="en-US" altLang="ja-JP"/>
-            </a:br>
-            <a:r>
-              <a:rPr lang="en-US" altLang="ja-JP"/>
-              <a:t>Copilot </a:t>
-            </a:r>
-            <a:r>
-              <a:rPr lang="ja-JP" altLang="en-US"/>
-              <a:t>によって生成されました</a:t>
-            </a:r>
-            <a:br>
-              <a:rPr lang="ja-JP" altLang="en-US"/>
-            </a:br>
-            <a:br>
-              <a:rPr lang="ja-JP" altLang="en-US"/>
-            </a:br>
-            <a:r>
-              <a:rPr lang="ja-JP" altLang="en-US"/>
-              <a:t>このスライドは</a:t>
-            </a:r>
-            <a:r>
-              <a:rPr lang="en-US" altLang="ja-JP"/>
-              <a:t>Microsoft</a:t>
-            </a:r>
-            <a:r>
-              <a:rPr lang="ja-JP" altLang="en-US"/>
-              <a:t>のブランドイメージを強調するシンプルなデザインで、著作権情報と免責事項が記載されています。</a:t>
-            </a:r>
-            <a:r>
-              <a:rPr lang="en-US" altLang="ja-JP"/>
-              <a:t>Microsoft</a:t>
-            </a:r>
-            <a:r>
-              <a:rPr lang="ja-JP" altLang="en-US"/>
-              <a:t>の商標や情報の性質についての注意喚起が含まれており、プレゼンテーションの締めくくりや公式文書としての位置づけを示しています。 </a:t>
-            </a:r>
-            <a:br>
-              <a:rPr lang="ja-JP" altLang="en-US"/>
-            </a:br>
-            <a:r>
-              <a:rPr lang="en-US" altLang="ja-JP"/>
-              <a:t>______</a:t>
-            </a:r>
-          </a:p>
-          <a:p>
-            <a:pPr>
-              <a:buNone/>
-            </a:pPr>
-            <a:br>
-              <a:rPr lang="en-US" altLang="ja-JP"/>
-            </a:br>
-            <a:r>
-              <a:rPr lang="en-US" altLang="ja-JP"/>
-              <a:t>Copilot </a:t>
-            </a:r>
-            <a:r>
-              <a:rPr lang="ja-JP" altLang="en-US"/>
-              <a:t>によって生成されました</a:t>
-            </a:r>
-            <a:br>
-              <a:rPr lang="ja-JP" altLang="en-US"/>
-            </a:br>
-            <a:br>
-              <a:rPr lang="ja-JP" altLang="en-US"/>
-            </a:br>
-            <a:r>
-              <a:rPr lang="ja-JP" altLang="en-US"/>
-              <a:t>このスライドは</a:t>
-            </a:r>
-            <a:r>
-              <a:rPr lang="en-US" altLang="ja-JP"/>
-              <a:t>Microsoft</a:t>
-            </a:r>
-            <a:r>
-              <a:rPr lang="ja-JP" altLang="en-US"/>
-              <a:t>のブランドイメージを強調するためのもので、明るいシアン色の背景に</a:t>
-            </a:r>
-            <a:r>
-              <a:rPr lang="en-US" altLang="ja-JP"/>
-              <a:t>Microsoft</a:t>
-            </a:r>
-            <a:r>
-              <a:rPr lang="ja-JP" altLang="en-US"/>
-              <a:t>のロゴと著作権情報が記載されています。プレゼンテーションの締めくくりや区切りとして使用され、追加のテキストや図表はありません。 </a:t>
-            </a:r>
-            <a:br>
-              <a:rPr lang="ja-JP" altLang="en-US"/>
-            </a:br>
-            <a:r>
-              <a:rPr lang="en-US" altLang="ja-JP"/>
-              <a:t>______</a:t>
-            </a:r>
-          </a:p>
-          <a:p>
-            <a:pPr>
-              <a:buNone/>
-            </a:pPr>
-            <a:br>
-              <a:rPr lang="en-US" altLang="ja-JP"/>
-            </a:br>
-            <a:r>
-              <a:rPr lang="en-US" altLang="ja-JP"/>
-              <a:t>Copilot </a:t>
-            </a:r>
-            <a:r>
-              <a:rPr lang="ja-JP" altLang="en-US"/>
-              <a:t>によって生成されました</a:t>
-            </a:r>
-            <a:br>
-              <a:rPr lang="ja-JP" altLang="en-US"/>
-            </a:br>
-            <a:br>
-              <a:rPr lang="ja-JP" altLang="en-US"/>
-            </a:br>
-            <a:r>
-              <a:rPr lang="ja-JP" altLang="en-US"/>
-              <a:t>このスライドは</a:t>
-            </a:r>
-            <a:r>
-              <a:rPr lang="en-US" altLang="ja-JP"/>
-              <a:t>Microsoft</a:t>
-            </a:r>
-            <a:r>
-              <a:rPr lang="ja-JP" altLang="en-US"/>
-              <a:t>のブランドイメージを強調するシンプルなデザインで、著作権情報と免責事項が記載されています。</a:t>
-            </a:r>
-            <a:r>
-              <a:rPr lang="en-US" altLang="ja-JP"/>
-              <a:t>Microsoft</a:t>
-            </a:r>
-            <a:r>
-              <a:rPr lang="ja-JP" altLang="en-US"/>
-              <a:t>の商標や情報の性質について説明し、内容の正確性保証や約束ではないことを明示しています。プレゼンテーションの締めくくりとして、信頼性と透明性を示す役割を果たします。 </a:t>
-            </a:r>
-            <a:br>
-              <a:rPr lang="ja-JP" altLang="en-US"/>
-            </a:br>
-            <a:r>
-              <a:rPr lang="en-US" altLang="ja-JP"/>
-              <a:t>______</a:t>
-            </a:r>
-          </a:p>
-          <a:p>
-            <a:pPr>
-              <a:buNone/>
-            </a:pPr>
-            <a:br>
-              <a:rPr lang="en-US" altLang="ja-JP"/>
-            </a:br>
-            <a:r>
-              <a:rPr lang="en-US" altLang="ja-JP"/>
-              <a:t>Copilot </a:t>
-            </a:r>
-            <a:r>
-              <a:rPr lang="ja-JP" altLang="en-US"/>
-              <a:t>によって生成されました</a:t>
-            </a:r>
-            <a:br>
-              <a:rPr lang="ja-JP" altLang="en-US"/>
-            </a:br>
-            <a:br>
-              <a:rPr lang="ja-JP" altLang="en-US"/>
-            </a:br>
-            <a:r>
-              <a:rPr lang="ja-JP" altLang="en-US"/>
-              <a:t>このスライドには、</a:t>
-            </a:r>
-            <a:r>
-              <a:rPr lang="en-US" altLang="ja-JP"/>
-              <a:t>Microsoft</a:t>
-            </a:r>
-            <a:r>
-              <a:rPr lang="ja-JP" altLang="en-US"/>
-              <a:t>のロゴと著作権情報が含まれています。特に、</a:t>
-            </a:r>
-            <a:r>
-              <a:rPr lang="en-US" altLang="ja-JP"/>
-              <a:t>Microsoft</a:t>
-            </a:r>
-            <a:r>
-              <a:rPr lang="ja-JP" altLang="en-US"/>
-              <a:t>の製品名が商標であることや、情報が現在の見解を示すものであることが強調されています。 </a:t>
-            </a:r>
-            <a:br>
-              <a:rPr lang="ja-JP" altLang="en-US"/>
-            </a:br>
-            <a:r>
-              <a:rPr lang="en-US" altLang="ja-JP"/>
-              <a:t>______</a:t>
-            </a:r>
-          </a:p>
-          <a:p>
-            <a:br>
-              <a:rPr lang="en-US" altLang="ja-JP"/>
-            </a:br>
-            <a:r>
-              <a:rPr lang="en-US" altLang="ja-JP"/>
-              <a:t>Copilot </a:t>
-            </a:r>
-            <a:r>
-              <a:rPr lang="ja-JP" altLang="en-US"/>
-              <a:t>によって生成されました</a:t>
-            </a:r>
-            <a:br>
-              <a:rPr lang="ja-JP" altLang="en-US"/>
-            </a:br>
-            <a:br>
-              <a:rPr lang="ja-JP" altLang="en-US"/>
-            </a:br>
-            <a:r>
-              <a:rPr lang="ja-JP" altLang="en-US"/>
-              <a:t>このスライドには、スピーカー ノートを生成するためのコンテンツがありません </a:t>
-            </a:r>
-            <a:br>
-              <a:rPr lang="ja-JP" altLang="en-US"/>
-            </a:br>
-            <a:r>
-              <a:rPr lang="en-US" altLang="ja-JP"/>
-              <a:t>______</a:t>
-            </a:r>
-          </a:p>
-          <a:p>
-            <a:br>
-              <a:rPr lang="en-US" altLang="ja-JP"/>
-            </a:br>
-            <a:r>
-              <a:rPr lang="en-US" altLang="ja-JP"/>
-              <a:t>Copilot </a:t>
-            </a:r>
-            <a:r>
-              <a:rPr lang="ja-JP" altLang="en-US"/>
-              <a:t>によって生成されました</a:t>
-            </a:r>
-            <a:br>
-              <a:rPr lang="ja-JP" altLang="en-US"/>
-            </a:br>
-            <a:br>
-              <a:rPr lang="ja-JP" altLang="en-US"/>
-            </a:br>
-            <a:r>
-              <a:rPr lang="ja-JP" altLang="en-US"/>
-              <a:t>このスライドには、スピーカー ノートを生成するためのコンテンツがありません </a:t>
-            </a:r>
-            <a:br>
-              <a:rPr lang="ja-JP" altLang="en-US"/>
-            </a:br>
-            <a:r>
-              <a:rPr lang="en-US" altLang="ja-JP"/>
-              <a:t>______</a:t>
-            </a:r>
-          </a:p>
-          <a:p>
-            <a:br>
-              <a:rPr lang="en-US" altLang="ja-JP"/>
-            </a:br>
-            <a:r>
-              <a:rPr lang="en-US" altLang="ja-JP"/>
-              <a:t>Copilot </a:t>
-            </a:r>
-            <a:r>
-              <a:rPr lang="ja-JP" altLang="en-US"/>
-              <a:t>によって生成されました</a:t>
-            </a:r>
-            <a:br>
-              <a:rPr lang="ja-JP" altLang="en-US"/>
-            </a:br>
-            <a:br>
-              <a:rPr lang="ja-JP" altLang="en-US"/>
-            </a:br>
-            <a:r>
-              <a:rPr lang="ja-JP" altLang="en-US"/>
-              <a:t>このスライドには、スピーカー ノートを生成するためのコンテンツがありません </a:t>
-            </a:r>
-            <a:br>
-              <a:rPr lang="ja-JP" altLang="en-US"/>
-            </a:br>
-            <a:r>
-              <a:rPr lang="en-US" altLang="ja-JP"/>
-              <a:t>______</a:t>
-            </a:r>
-          </a:p>
-          <a:p>
-            <a:br>
-              <a:rPr lang="en-US" altLang="ja-JP"/>
-            </a:br>
-            <a:endParaRPr kumimoji="1" lang="ja-JP" altLang="en-US"/>
-          </a:p>
-        </p:txBody>
-      </p:sp>
-      <p:sp>
-        <p:nvSpPr>
-          <p:cNvPr id="4" name="スライド番号プレースホルダー 3"/>
-          <p:cNvSpPr>
-            <a:spLocks noGrp="1"/>
-          </p:cNvSpPr>
-          <p:nvPr>
-            <p:ph type="sldNum" sz="quarter" idx="10"/>
-          </p:nvPr>
-        </p:nvSpPr>
-        <p:spPr/>
-        <p:txBody>
-          <a:bodyPr/>
-          <a:lstStyle/>
-          <a:p>
-            <a:fld id="{C24B01B9-7FD4-4F48-86F8-F42E725C19DC}" type="slidenum">
-              <a:rPr kumimoji="1" lang="ja-JP" altLang="en-US" smtClean="0"/>
-              <a:t>7</a:t>
-            </a:fld>
-            <a:endParaRPr kumimoji="1" lang="ja-JP" altLang="en-US"/>
-          </a:p>
-        </p:txBody>
-      </p:sp>
-    </p:spTree>
-    <p:extLst>
-      <p:ext uri="{BB962C8B-B14F-4D97-AF65-F5344CB8AC3E}">
-        <p14:creationId xmlns:p14="http://schemas.microsoft.com/office/powerpoint/2010/main" val="330446751"/>
-      </p:ext>
-    </p:extLst>
-  </p:cSld>
-  <p:clrMapOvr>
-    <a:masterClrMapping/>
-  </p:clrMapOvr>
-</p:notes>
-</file>
-
 <file path=ppt/slideLayouts/slideLayout1.xml><?xml version="1.0" encoding="utf-8"?>
 <p:sldLayout xmlns:a="http://schemas.openxmlformats.org/drawingml/2006/main" xmlns:r="http://schemas.openxmlformats.org/officeDocument/2006/relationships" xmlns:p="http://schemas.openxmlformats.org/presentationml/2006/main" userDrawn="1">
   <p:cSld name="Azure Update Cover - Indigo Amber">
@@ -5442,6 +3200,604 @@
   <p:clrMapOvr>
     <a:masterClrMapping/>
   </p:clrMapOvr>
+</p:sldLayout>
+</file>
+
+<file path=ppt/slideLayouts/slideLayout10.xml><?xml version="1.0" encoding="utf-8"?>
+<p:sldLayout xmlns:a="http://schemas.openxmlformats.org/drawingml/2006/main" xmlns:r="http://schemas.openxmlformats.org/officeDocument/2006/relationships" xmlns:p="http://schemas.openxmlformats.org/presentationml/2006/main" type="obj" preserve="1">
+  <p:cSld name="Azure Update Ending - Indigo Amber">
+    <p:spTree>
+      <p:nvGrpSpPr>
+        <p:cNvPr id="1" name=""/>
+        <p:cNvGrpSpPr/>
+        <p:nvPr/>
+      </p:nvGrpSpPr>
+      <p:grpSpPr>
+        <a:xfrm>
+          <a:off x="0" y="0"/>
+          <a:ext cx="0" cy="0"/>
+          <a:chOff x="0" y="0"/>
+          <a:chExt cx="0" cy="0"/>
+        </a:xfrm>
+      </p:grpSpPr>
+      <p:sp>
+        <p:nvSpPr>
+          <p:cNvPr id="2" name="EndingBase"/>
+          <p:cNvSpPr/>
+          <p:nvPr userDrawn="1"/>
+        </p:nvSpPr>
+        <p:spPr>
+          <a:xfrm>
+            <a:off x="0" y="0"/>
+            <a:ext cx="12192000" cy="6858000"/>
+          </a:xfrm>
+          <a:prstGeom prst="rect">
+            <a:avLst/>
+          </a:prstGeom>
+          <a:solidFill>
+            <a:srgbClr val="FFFFFF"/>
+          </a:solidFill>
+          <a:ln>
+            <a:noFill/>
+          </a:ln>
+        </p:spPr>
+        <p:txBody>
+          <a:bodyPr/>
+          <a:lstStyle/>
+          <a:p>
+            <a:endParaRPr lang="ja-JP"/>
+          </a:p>
+        </p:txBody>
+      </p:sp>
+      <p:sp>
+        <p:nvSpPr>
+          <p:cNvPr id="3" name="EndingHeader"/>
+          <p:cNvSpPr/>
+          <p:nvPr userDrawn="1"/>
+        </p:nvSpPr>
+        <p:spPr>
+          <a:xfrm>
+            <a:off x="0" y="0"/>
+            <a:ext cx="12192000" cy="1200000"/>
+          </a:xfrm>
+          <a:prstGeom prst="rect">
+            <a:avLst/>
+          </a:prstGeom>
+          <a:solidFill>
+            <a:srgbClr val="2E3C72"/>
+          </a:solidFill>
+          <a:ln>
+            <a:noFill/>
+          </a:ln>
+        </p:spPr>
+        <p:txBody>
+          <a:bodyPr wrap="square" lIns="0" tIns="0" rIns="0" bIns="0" anchor="ctr"/>
+          <a:lstStyle/>
+          <a:p>
+            <a:pPr algn="l">
+              <a:defRPr/>
+            </a:pPr>
+            <a:r>
+              <a:rPr lang="en-US" sz="2000" b="1" kern="1200">
+                <a:solidFill>
+                  <a:srgbClr val="FFFFFF"/>
+                </a:solidFill>
+                <a:latin typeface="Segoe UI Semibold"/>
+                <a:ea typeface="BIZ UDPゴシック"/>
+                <a:cs typeface="Segoe UI Semibold"/>
+              </a:rPr>
+              <a:t>    Microsoft Azure</a:t>
+            </a:r>
+            <a:endParaRPr lang="ja-JP" sz="2000"/>
+          </a:p>
+        </p:txBody>
+      </p:sp>
+      <p:sp>
+        <p:nvSpPr>
+          <p:cNvPr id="4" name="EndingAccentBand"/>
+          <p:cNvSpPr/>
+          <p:nvPr userDrawn="1"/>
+        </p:nvSpPr>
+        <p:spPr>
+          <a:xfrm>
+            <a:off x="0" y="1200000"/>
+            <a:ext cx="12192000" cy="90000"/>
+          </a:xfrm>
+          <a:prstGeom prst="rect">
+            <a:avLst/>
+          </a:prstGeom>
+          <a:solidFill>
+            <a:srgbClr val="3B4C8A"/>
+          </a:solidFill>
+          <a:ln>
+            <a:noFill/>
+          </a:ln>
+        </p:spPr>
+        <p:txBody>
+          <a:bodyPr/>
+          <a:lstStyle/>
+          <a:p>
+            <a:endParaRPr lang="ja-JP"/>
+          </a:p>
+        </p:txBody>
+      </p:sp>
+      <p:sp>
+        <p:nvSpPr>
+          <p:cNvPr id="5" name="EndingClosingHeadline"/>
+          <p:cNvSpPr txBox="1"/>
+          <p:nvPr userDrawn="1"/>
+        </p:nvSpPr>
+        <p:spPr>
+          <a:xfrm>
+            <a:off x="0" y="2200000"/>
+            <a:ext cx="12192000" cy="1400000"/>
+          </a:xfrm>
+          <a:prstGeom prst="rect">
+            <a:avLst/>
+          </a:prstGeom>
+          <a:noFill/>
+          <a:ln>
+            <a:noFill/>
+          </a:ln>
+        </p:spPr>
+        <p:txBody>
+          <a:bodyPr wrap="square" lIns="0" tIns="0" rIns="0" bIns="0" anchor="ctr" anchorCtr="0"/>
+          <a:lstStyle/>
+          <a:p>
+            <a:pPr algn="ctr"/>
+            <a:r>
+              <a:rPr lang="en-US" sz="5400" b="1" kern="1200" spc="200">
+                <a:solidFill>
+                  <a:srgbClr val="2E3C72"/>
+                </a:solidFill>
+                <a:latin typeface="Segoe UI Semibold"/>
+                <a:ea typeface="BIZ UDPゴシック"/>
+                <a:cs typeface="Segoe UI Semibold"/>
+              </a:rPr>
+              <a:t>AZURE UPDATE </a:t>
+            </a:r>
+            <a:r>
+              <a:rPr lang="ja-JP" altLang="en-US" sz="5400" b="1" kern="1200" spc="200">
+                <a:solidFill>
+                  <a:srgbClr val="2E3C72"/>
+                </a:solidFill>
+                <a:latin typeface="Segoe UI Semibold"/>
+                <a:ea typeface="BIZ UDPゴシック"/>
+                <a:cs typeface="Segoe UI Semibold"/>
+              </a:rPr>
+              <a:t>情報 </a:t>
+            </a:r>
+            <a:r>
+              <a:rPr lang="en-US" sz="5400" b="1" kern="1200" spc="200">
+                <a:solidFill>
+                  <a:srgbClr val="3B4C8A"/>
+                </a:solidFill>
+                <a:latin typeface="Segoe UI Semibold"/>
+                <a:ea typeface="BIZ UDPゴシック"/>
+                <a:cs typeface="Segoe UI Semibold"/>
+              </a:rPr>
+              <a:t>END</a:t>
+            </a:r>
+            <a:endParaRPr lang="ja-JP" sz="5400" b="1"/>
+          </a:p>
+        </p:txBody>
+      </p:sp>
+      <p:sp>
+        <p:nvSpPr>
+          <p:cNvPr id="6" name="EndingInfoPanel"/>
+          <p:cNvSpPr/>
+          <p:nvPr userDrawn="1"/>
+        </p:nvSpPr>
+        <p:spPr>
+          <a:xfrm>
+            <a:off x="900000" y="4800000"/>
+            <a:ext cx="10392000" cy="900000"/>
+          </a:xfrm>
+          <a:prstGeom prst="rect">
+            <a:avLst/>
+          </a:prstGeom>
+          <a:solidFill>
+            <a:srgbClr val="3B4C8A"/>
+          </a:solidFill>
+          <a:ln>
+            <a:noFill/>
+          </a:ln>
+        </p:spPr>
+        <p:txBody>
+          <a:bodyPr/>
+          <a:lstStyle/>
+          <a:p>
+            <a:endParaRPr lang="ja-JP"/>
+          </a:p>
+        </p:txBody>
+      </p:sp>
+      <p:sp>
+        <p:nvSpPr>
+          <p:cNvPr id="7" name="EndingKeyMessagePlaceholder"/>
+          <p:cNvSpPr>
+            <a:spLocks noGrp="1"/>
+          </p:cNvSpPr>
+          <p:nvPr>
+            <p:ph type="body" sz="quarter" idx="10"/>
+          </p:nvPr>
+        </p:nvSpPr>
+        <p:spPr>
+          <a:xfrm>
+            <a:off x="1080000" y="4800000"/>
+            <a:ext cx="10032000" cy="900000"/>
+          </a:xfrm>
+          <a:prstGeom prst="rect">
+            <a:avLst/>
+          </a:prstGeom>
+        </p:spPr>
+        <p:txBody>
+          <a:bodyPr wrap="square" lIns="180000" tIns="90000" rIns="180000" bIns="90000" anchor="ctr" anchorCtr="0"/>
+          <a:lstStyle>
+            <a:lvl1pPr marL="0" indent="0">
+              <a:buNone/>
+              <a:defRPr sz="2000" b="1">
+                <a:solidFill>
+                  <a:srgbClr val="FFFFFF"/>
+                </a:solidFill>
+                <a:latin typeface="Segoe UI Semibold"/>
+                <a:ea typeface="BIZ UDPゴシック"/>
+              </a:defRPr>
+            </a:lvl1pPr>
+          </a:lstStyle>
+          <a:p>
+            <a:pPr marL="0" indent="0" algn="l">
+              <a:buNone/>
+            </a:pPr>
+            <a:endParaRPr lang="ja-JP"/>
+          </a:p>
+        </p:txBody>
+      </p:sp>
+      <p:sp>
+        <p:nvSpPr>
+          <p:cNvPr id="8" name="EndingReferencePlaceholder"/>
+          <p:cNvSpPr>
+            <a:spLocks noGrp="1"/>
+          </p:cNvSpPr>
+          <p:nvPr>
+            <p:ph type="body" sz="quarter" idx="11"/>
+          </p:nvPr>
+        </p:nvSpPr>
+        <p:spPr>
+          <a:xfrm>
+            <a:off x="900000" y="3800000"/>
+            <a:ext cx="10392000" cy="900000"/>
+          </a:xfrm>
+          <a:prstGeom prst="rect">
+            <a:avLst/>
+          </a:prstGeom>
+        </p:spPr>
+        <p:txBody>
+          <a:bodyPr wrap="square" anchor="ctr" anchorCtr="0"/>
+          <a:lstStyle>
+            <a:lvl1pPr marL="0" indent="0">
+              <a:buNone/>
+              <a:defRPr sz="1400">
+                <a:solidFill>
+                  <a:srgbClr val="6E6E6E"/>
+                </a:solidFill>
+                <a:latin typeface="Segoe UI"/>
+                <a:ea typeface="BIZ UDPゴシック"/>
+              </a:defRPr>
+            </a:lvl1pPr>
+          </a:lstStyle>
+          <a:p>
+            <a:pPr marL="0" indent="0" algn="ctr">
+              <a:buNone/>
+            </a:pPr>
+            <a:endParaRPr lang="ja-JP"/>
+          </a:p>
+        </p:txBody>
+      </p:sp>
+    </p:spTree>
+  </p:cSld>
+  <p:clrMapOvr>
+    <a:masterClrMapping/>
+  </p:clrMapOvr>
+  <p:hf sldNum="0" hdr="0" ftr="0" dt="0"/>
+</p:sldLayout>
+</file>
+
+<file path=ppt/slideLayouts/slideLayout11.xml><?xml version="1.0" encoding="utf-8"?>
+<p:sldLayout xmlns:a="http://schemas.openxmlformats.org/drawingml/2006/main" xmlns:r="http://schemas.openxmlformats.org/officeDocument/2006/relationships" xmlns:p="http://schemas.openxmlformats.org/presentationml/2006/main" type="obj" preserve="1">
+  <p:cSld name="Azure Update Ending - Teal Fresh">
+    <p:spTree>
+      <p:nvGrpSpPr>
+        <p:cNvPr id="1" name=""/>
+        <p:cNvGrpSpPr/>
+        <p:nvPr/>
+      </p:nvGrpSpPr>
+      <p:grpSpPr>
+        <a:xfrm>
+          <a:off x="0" y="0"/>
+          <a:ext cx="0" cy="0"/>
+          <a:chOff x="0" y="0"/>
+          <a:chExt cx="0" cy="0"/>
+        </a:xfrm>
+      </p:grpSpPr>
+      <p:sp>
+        <p:nvSpPr>
+          <p:cNvPr id="2" name="EndingBase"/>
+          <p:cNvSpPr/>
+          <p:nvPr userDrawn="1"/>
+        </p:nvSpPr>
+        <p:spPr>
+          <a:xfrm>
+            <a:off x="0" y="0"/>
+            <a:ext cx="12192000" cy="6858000"/>
+          </a:xfrm>
+          <a:prstGeom prst="rect">
+            <a:avLst/>
+          </a:prstGeom>
+          <a:solidFill>
+            <a:srgbClr val="FFFFFF"/>
+          </a:solidFill>
+          <a:ln>
+            <a:noFill/>
+          </a:ln>
+        </p:spPr>
+        <p:txBody>
+          <a:bodyPr/>
+          <a:lstStyle/>
+          <a:p>
+            <a:endParaRPr lang="ja-JP"/>
+          </a:p>
+        </p:txBody>
+      </p:sp>
+      <p:sp>
+        <p:nvSpPr>
+          <p:cNvPr id="3" name="EndingHeader"/>
+          <p:cNvSpPr/>
+          <p:nvPr userDrawn="1"/>
+        </p:nvSpPr>
+        <p:spPr>
+          <a:xfrm>
+            <a:off x="0" y="0"/>
+            <a:ext cx="12192000" cy="1200000"/>
+          </a:xfrm>
+          <a:prstGeom prst="rect">
+            <a:avLst/>
+          </a:prstGeom>
+          <a:solidFill>
+            <a:srgbClr val="008C7F"/>
+          </a:solidFill>
+          <a:ln>
+            <a:noFill/>
+          </a:ln>
+        </p:spPr>
+        <p:txBody>
+          <a:bodyPr wrap="square" lIns="0" tIns="0" rIns="0" bIns="0" anchor="ctr"/>
+          <a:lstStyle/>
+          <a:p>
+            <a:pPr algn="l">
+              <a:defRPr/>
+            </a:pPr>
+            <a:r>
+              <a:rPr lang="en-US" sz="2000" b="1" kern="1200">
+                <a:solidFill>
+                  <a:srgbClr val="FFFFFF"/>
+                </a:solidFill>
+                <a:latin typeface="Segoe UI Semibold"/>
+                <a:ea typeface="BIZ UDPゴシック"/>
+                <a:cs typeface="Segoe UI Semibold"/>
+              </a:rPr>
+              <a:t>    Microsoft Azure</a:t>
+            </a:r>
+            <a:endParaRPr lang="ja-JP" sz="2000"/>
+          </a:p>
+        </p:txBody>
+      </p:sp>
+      <p:sp>
+        <p:nvSpPr>
+          <p:cNvPr id="4" name="EndingAccentBand"/>
+          <p:cNvSpPr/>
+          <p:nvPr userDrawn="1"/>
+        </p:nvSpPr>
+        <p:spPr>
+          <a:xfrm>
+            <a:off x="0" y="1200000"/>
+            <a:ext cx="12192000" cy="90000"/>
+          </a:xfrm>
+          <a:prstGeom prst="rect">
+            <a:avLst/>
+          </a:prstGeom>
+          <a:solidFill>
+            <a:srgbClr val="00B050"/>
+          </a:solidFill>
+          <a:ln>
+            <a:noFill/>
+          </a:ln>
+        </p:spPr>
+        <p:txBody>
+          <a:bodyPr/>
+          <a:lstStyle/>
+          <a:p>
+            <a:endParaRPr lang="ja-JP"/>
+          </a:p>
+        </p:txBody>
+      </p:sp>
+      <p:sp>
+        <p:nvSpPr>
+          <p:cNvPr id="5" name="EndingClosingHeadline"/>
+          <p:cNvSpPr txBox="1"/>
+          <p:nvPr userDrawn="1"/>
+        </p:nvSpPr>
+        <p:spPr>
+          <a:xfrm>
+            <a:off x="0" y="2200000"/>
+            <a:ext cx="12192000" cy="1400000"/>
+          </a:xfrm>
+          <a:prstGeom prst="rect">
+            <a:avLst/>
+          </a:prstGeom>
+          <a:noFill/>
+          <a:ln>
+            <a:noFill/>
+          </a:ln>
+        </p:spPr>
+        <p:txBody>
+          <a:bodyPr wrap="square" lIns="0" tIns="0" rIns="0" bIns="0" anchor="ctr" anchorCtr="0"/>
+          <a:lstStyle/>
+          <a:p>
+            <a:pPr algn="ctr"/>
+            <a:r>
+              <a:rPr lang="en-US" sz="5400" b="1" kern="1200" spc="200">
+                <a:solidFill>
+                  <a:srgbClr val="008C7F"/>
+                </a:solidFill>
+                <a:latin typeface="Segoe UI Semibold"/>
+                <a:ea typeface="BIZ UDPゴシック"/>
+                <a:cs typeface="Segoe UI Semibold"/>
+              </a:rPr>
+              <a:t>AZURE UPDATE </a:t>
+            </a:r>
+            <a:r>
+              <a:rPr lang="ja-JP" altLang="en-US" sz="5400" b="1" kern="1200" spc="200">
+                <a:solidFill>
+                  <a:srgbClr val="008C7F"/>
+                </a:solidFill>
+                <a:latin typeface="Segoe UI Semibold"/>
+                <a:ea typeface="BIZ UDPゴシック"/>
+                <a:cs typeface="Segoe UI Semibold"/>
+              </a:rPr>
+              <a:t>情報 </a:t>
+            </a:r>
+            <a:r>
+              <a:rPr lang="en-US" sz="5400" b="1" kern="1200" spc="200">
+                <a:solidFill>
+                  <a:srgbClr val="00B050"/>
+                </a:solidFill>
+                <a:latin typeface="Segoe UI Semibold"/>
+                <a:ea typeface="BIZ UDPゴシック"/>
+                <a:cs typeface="Segoe UI Semibold"/>
+              </a:rPr>
+              <a:t>END</a:t>
+            </a:r>
+            <a:endParaRPr lang="ja-JP" sz="5400" b="1"/>
+          </a:p>
+        </p:txBody>
+      </p:sp>
+      <p:sp>
+        <p:nvSpPr>
+          <p:cNvPr id="6" name="EndingInfoPanel"/>
+          <p:cNvSpPr/>
+          <p:nvPr userDrawn="1"/>
+        </p:nvSpPr>
+        <p:spPr>
+          <a:xfrm>
+            <a:off x="900000" y="4800000"/>
+            <a:ext cx="10392000" cy="900000"/>
+          </a:xfrm>
+          <a:prstGeom prst="rect">
+            <a:avLst/>
+          </a:prstGeom>
+          <a:solidFill>
+            <a:srgbClr val="287A4F"/>
+          </a:solidFill>
+          <a:ln>
+            <a:noFill/>
+          </a:ln>
+        </p:spPr>
+        <p:txBody>
+          <a:bodyPr/>
+          <a:lstStyle/>
+          <a:p>
+            <a:endParaRPr lang="ja-JP"/>
+          </a:p>
+        </p:txBody>
+      </p:sp>
+      <p:sp>
+        <p:nvSpPr>
+          <p:cNvPr id="7" name="EndingKeyMessagePlaceholder"/>
+          <p:cNvSpPr>
+            <a:spLocks noGrp="1"/>
+          </p:cNvSpPr>
+          <p:nvPr>
+            <p:ph type="body" sz="quarter" idx="10"/>
+          </p:nvPr>
+        </p:nvSpPr>
+        <p:spPr>
+          <a:xfrm>
+            <a:off x="1080000" y="4800000"/>
+            <a:ext cx="10032000" cy="900000"/>
+          </a:xfrm>
+          <a:prstGeom prst="rect">
+            <a:avLst/>
+          </a:prstGeom>
+        </p:spPr>
+        <p:txBody>
+          <a:bodyPr wrap="square" lIns="180000" tIns="90000" rIns="180000" bIns="90000" anchor="ctr" anchorCtr="0"/>
+          <a:lstStyle>
+            <a:lvl1pPr marL="0" indent="0">
+              <a:buNone/>
+              <a:defRPr sz="2000" b="1">
+                <a:solidFill>
+                  <a:srgbClr val="FFFFFF"/>
+                </a:solidFill>
+                <a:latin typeface="Segoe UI Semibold"/>
+                <a:ea typeface="BIZ UDPゴシック"/>
+              </a:defRPr>
+            </a:lvl1pPr>
+          </a:lstStyle>
+          <a:p>
+            <a:pPr marL="0" indent="0" algn="l">
+              <a:buNone/>
+            </a:pPr>
+            <a:endParaRPr lang="ja-JP"/>
+          </a:p>
+        </p:txBody>
+      </p:sp>
+      <p:sp>
+        <p:nvSpPr>
+          <p:cNvPr id="8" name="EndingReferencePlaceholder"/>
+          <p:cNvSpPr>
+            <a:spLocks noGrp="1"/>
+          </p:cNvSpPr>
+          <p:nvPr>
+            <p:ph type="body" sz="quarter" idx="11"/>
+          </p:nvPr>
+        </p:nvSpPr>
+        <p:spPr>
+          <a:xfrm>
+            <a:off x="900000" y="3800000"/>
+            <a:ext cx="10392000" cy="900000"/>
+          </a:xfrm>
+          <a:prstGeom prst="rect">
+            <a:avLst/>
+          </a:prstGeom>
+        </p:spPr>
+        <p:txBody>
+          <a:bodyPr wrap="square" anchor="ctr" anchorCtr="0"/>
+          <a:lstStyle>
+            <a:lvl1pPr marL="0" indent="0">
+              <a:buNone/>
+              <a:defRPr sz="1400">
+                <a:solidFill>
+                  <a:srgbClr val="6E6E6E"/>
+                </a:solidFill>
+                <a:latin typeface="Segoe UI"/>
+                <a:ea typeface="BIZ UDPゴシック"/>
+              </a:defRPr>
+            </a:lvl1pPr>
+          </a:lstStyle>
+          <a:p>
+            <a:pPr marL="0" indent="0" algn="ctr">
+              <a:buNone/>
+            </a:pPr>
+            <a:endParaRPr lang="ja-JP"/>
+          </a:p>
+        </p:txBody>
+      </p:sp>
+    </p:spTree>
+  </p:cSld>
+  <p:clrMapOvr>
+    <a:masterClrMapping/>
+  </p:clrMapOvr>
+  <p:hf sldNum="0" hdr="0" ftr="0" dt="0"/>
 </p:sldLayout>
 </file>
 
@@ -7158,8 +5514,8 @@
 </file>
 
 <file path=ppt/slideLayouts/slideLayout5.xml><?xml version="1.0" encoding="utf-8"?>
-<p:sldLayout xmlns:a="http://schemas.openxmlformats.org/drawingml/2006/main" xmlns:r="http://schemas.openxmlformats.org/officeDocument/2006/relationships" xmlns:p="http://schemas.openxmlformats.org/presentationml/2006/main" type="titleOnly">
-  <p:cSld name="Azure Update Ending - Resources">
+<p:sldLayout xmlns:a="http://schemas.openxmlformats.org/drawingml/2006/main" xmlns:r="http://schemas.openxmlformats.org/officeDocument/2006/relationships" xmlns:p="http://schemas.openxmlformats.org/presentationml/2006/main" type="obj" preserve="1">
+  <p:cSld name="Azure Update Ending - Azure Blue">
     <p:spTree>
       <p:nvGrpSpPr>
         <p:cNvPr id="1" name=""/>
@@ -7176,18 +5532,610 @@
       </p:grpSpPr>
       <p:sp>
         <p:nvSpPr>
-          <p:cNvPr id="2" name="タイトル 1">
-            <a:extLst>
-              <a:ext uri="{FF2B5EF4-FFF2-40B4-BE49-F238E27FC236}">
-                <a16:creationId xmlns:a16="http://schemas.microsoft.com/office/drawing/2014/main" id="{07E9CD90-E1D0-83A6-B412-9E9D26D92577}"/>
-              </a:ext>
-            </a:extLst>
-          </p:cNvPr>
+          <p:cNvPr id="2" name="EndingBase"/>
+          <p:cNvSpPr/>
+          <p:nvPr userDrawn="1"/>
+        </p:nvSpPr>
+        <p:spPr>
+          <a:xfrm>
+            <a:off x="0" y="0"/>
+            <a:ext cx="12192000" cy="6858000"/>
+          </a:xfrm>
+          <a:prstGeom prst="rect">
+            <a:avLst/>
+          </a:prstGeom>
+          <a:solidFill>
+            <a:srgbClr val="FFFFFF"/>
+          </a:solidFill>
+          <a:ln>
+            <a:noFill/>
+          </a:ln>
+        </p:spPr>
+        <p:txBody>
+          <a:bodyPr/>
+          <a:lstStyle/>
+          <a:p>
+            <a:endParaRPr lang="ja-JP"/>
+          </a:p>
+        </p:txBody>
+      </p:sp>
+      <p:sp>
+        <p:nvSpPr>
+          <p:cNvPr id="3" name="EndingHeader"/>
+          <p:cNvSpPr/>
+          <p:nvPr userDrawn="1"/>
+        </p:nvSpPr>
+        <p:spPr>
+          <a:xfrm>
+            <a:off x="0" y="0"/>
+            <a:ext cx="12192000" cy="1200000"/>
+          </a:xfrm>
+          <a:prstGeom prst="rect">
+            <a:avLst/>
+          </a:prstGeom>
+          <a:solidFill>
+            <a:srgbClr val="0078D4"/>
+          </a:solidFill>
+          <a:ln>
+            <a:noFill/>
+          </a:ln>
+        </p:spPr>
+        <p:txBody>
+          <a:bodyPr wrap="square" lIns="0" tIns="0" rIns="0" bIns="0" anchor="ctr"/>
+          <a:lstStyle/>
+          <a:p>
+            <a:pPr algn="l">
+              <a:defRPr/>
+            </a:pPr>
+            <a:r>
+              <a:rPr lang="en-US" sz="2000" b="1" kern="1200">
+                <a:solidFill>
+                  <a:srgbClr val="FFFFFF"/>
+                </a:solidFill>
+                <a:latin typeface="Segoe UI Semibold"/>
+                <a:ea typeface="BIZ UDPゴシック"/>
+                <a:cs typeface="Segoe UI Semibold"/>
+              </a:rPr>
+              <a:t>    Microsoft Azure</a:t>
+            </a:r>
+            <a:endParaRPr lang="ja-JP" sz="2000"/>
+          </a:p>
+        </p:txBody>
+      </p:sp>
+      <p:sp>
+        <p:nvSpPr>
+          <p:cNvPr id="4" name="EndingAccentBand"/>
+          <p:cNvSpPr/>
+          <p:nvPr userDrawn="1"/>
+        </p:nvSpPr>
+        <p:spPr>
+          <a:xfrm>
+            <a:off x="0" y="1200000"/>
+            <a:ext cx="12192000" cy="90000"/>
+          </a:xfrm>
+          <a:prstGeom prst="rect">
+            <a:avLst/>
+          </a:prstGeom>
+          <a:solidFill>
+            <a:srgbClr val="00B0F0"/>
+          </a:solidFill>
+          <a:ln>
+            <a:noFill/>
+          </a:ln>
+        </p:spPr>
+        <p:txBody>
+          <a:bodyPr/>
+          <a:lstStyle/>
+          <a:p>
+            <a:endParaRPr lang="ja-JP"/>
+          </a:p>
+        </p:txBody>
+      </p:sp>
+      <p:sp>
+        <p:nvSpPr>
+          <p:cNvPr id="5" name="EndingClosingHeadline"/>
+          <p:cNvSpPr txBox="1"/>
+          <p:nvPr userDrawn="1"/>
+        </p:nvSpPr>
+        <p:spPr>
+          <a:xfrm>
+            <a:off x="0" y="2200000"/>
+            <a:ext cx="12192000" cy="1400000"/>
+          </a:xfrm>
+          <a:prstGeom prst="rect">
+            <a:avLst/>
+          </a:prstGeom>
+          <a:noFill/>
+          <a:ln>
+            <a:noFill/>
+          </a:ln>
+        </p:spPr>
+        <p:txBody>
+          <a:bodyPr wrap="square" lIns="0" tIns="0" rIns="0" bIns="0" anchor="ctr" anchorCtr="0"/>
+          <a:lstStyle/>
+          <a:p>
+            <a:pPr algn="ctr"/>
+            <a:r>
+              <a:rPr lang="en-US" sz="5400" b="1" kern="1200" spc="200">
+                <a:solidFill>
+                  <a:srgbClr val="0078D4"/>
+                </a:solidFill>
+                <a:latin typeface="Segoe UI Semibold"/>
+                <a:ea typeface="BIZ UDPゴシック"/>
+                <a:cs typeface="Segoe UI Semibold"/>
+              </a:rPr>
+              <a:t>AZURE UPDATE </a:t>
+            </a:r>
+            <a:r>
+              <a:rPr lang="ja-JP" altLang="en-US" sz="5400" b="1" kern="1200" spc="200">
+                <a:solidFill>
+                  <a:srgbClr val="0078D4"/>
+                </a:solidFill>
+                <a:latin typeface="Segoe UI Semibold"/>
+                <a:ea typeface="BIZ UDPゴシック"/>
+                <a:cs typeface="Segoe UI Semibold"/>
+              </a:rPr>
+              <a:t>情報 </a:t>
+            </a:r>
+            <a:r>
+              <a:rPr lang="en-US" sz="5400" b="1" kern="1200" spc="200">
+                <a:solidFill>
+                  <a:srgbClr val="00B0F0"/>
+                </a:solidFill>
+                <a:latin typeface="Segoe UI Semibold"/>
+                <a:ea typeface="BIZ UDPゴシック"/>
+                <a:cs typeface="Segoe UI Semibold"/>
+              </a:rPr>
+              <a:t>END</a:t>
+            </a:r>
+            <a:endParaRPr lang="ja-JP" sz="5400" b="1"/>
+          </a:p>
+        </p:txBody>
+      </p:sp>
+      <p:sp>
+        <p:nvSpPr>
+          <p:cNvPr id="6" name="EndingInfoPanel"/>
+          <p:cNvSpPr/>
+          <p:nvPr userDrawn="1"/>
+        </p:nvSpPr>
+        <p:spPr>
+          <a:xfrm>
+            <a:off x="900000" y="4800000"/>
+            <a:ext cx="10392000" cy="900000"/>
+          </a:xfrm>
+          <a:prstGeom prst="rect">
+            <a:avLst/>
+          </a:prstGeom>
+          <a:solidFill>
+            <a:srgbClr val="005EB8"/>
+          </a:solidFill>
+          <a:ln>
+            <a:noFill/>
+          </a:ln>
+        </p:spPr>
+        <p:txBody>
+          <a:bodyPr/>
+          <a:lstStyle/>
+          <a:p>
+            <a:endParaRPr lang="ja-JP"/>
+          </a:p>
+        </p:txBody>
+      </p:sp>
+      <p:sp>
+        <p:nvSpPr>
+          <p:cNvPr id="7" name="EndingKeyMessagePlaceholder"/>
           <p:cNvSpPr>
             <a:spLocks noGrp="1"/>
           </p:cNvSpPr>
           <p:nvPr>
-            <p:ph type="title"/>
+            <p:ph type="body" sz="quarter" idx="10"/>
+          </p:nvPr>
+        </p:nvSpPr>
+        <p:spPr>
+          <a:xfrm>
+            <a:off x="1080000" y="4800000"/>
+            <a:ext cx="10032000" cy="900000"/>
+          </a:xfrm>
+          <a:prstGeom prst="rect">
+            <a:avLst/>
+          </a:prstGeom>
+        </p:spPr>
+        <p:txBody>
+          <a:bodyPr wrap="square" lIns="180000" tIns="90000" rIns="180000" bIns="90000" anchor="ctr" anchorCtr="0"/>
+          <a:lstStyle>
+            <a:lvl1pPr marL="0" indent="0">
+              <a:buNone/>
+              <a:defRPr sz="2000" b="1">
+                <a:solidFill>
+                  <a:srgbClr val="FFFFFF"/>
+                </a:solidFill>
+                <a:latin typeface="Segoe UI Semibold"/>
+                <a:ea typeface="BIZ UDPゴシック"/>
+              </a:defRPr>
+            </a:lvl1pPr>
+          </a:lstStyle>
+          <a:p>
+            <a:pPr marL="0" indent="0" algn="l">
+              <a:buNone/>
+            </a:pPr>
+            <a:endParaRPr lang="ja-JP"/>
+          </a:p>
+        </p:txBody>
+      </p:sp>
+      <p:sp>
+        <p:nvSpPr>
+          <p:cNvPr id="8" name="EndingReferencePlaceholder"/>
+          <p:cNvSpPr>
+            <a:spLocks noGrp="1"/>
+          </p:cNvSpPr>
+          <p:nvPr>
+            <p:ph type="body" sz="quarter" idx="11"/>
+          </p:nvPr>
+        </p:nvSpPr>
+        <p:spPr>
+          <a:xfrm>
+            <a:off x="900000" y="3800000"/>
+            <a:ext cx="10392000" cy="900000"/>
+          </a:xfrm>
+          <a:prstGeom prst="rect">
+            <a:avLst/>
+          </a:prstGeom>
+        </p:spPr>
+        <p:txBody>
+          <a:bodyPr wrap="square" anchor="ctr" anchorCtr="0"/>
+          <a:lstStyle>
+            <a:lvl1pPr marL="0" indent="0">
+              <a:buNone/>
+              <a:defRPr sz="1400">
+                <a:solidFill>
+                  <a:srgbClr val="6E6E6E"/>
+                </a:solidFill>
+                <a:latin typeface="Segoe UI"/>
+                <a:ea typeface="BIZ UDPゴシック"/>
+              </a:defRPr>
+            </a:lvl1pPr>
+          </a:lstStyle>
+          <a:p>
+            <a:pPr marL="0" indent="0" algn="ctr">
+              <a:buNone/>
+            </a:pPr>
+            <a:endParaRPr lang="ja-JP"/>
+          </a:p>
+        </p:txBody>
+      </p:sp>
+    </p:spTree>
+  </p:cSld>
+  <p:clrMapOvr>
+    <a:masterClrMapping/>
+  </p:clrMapOvr>
+  <p:hf sldNum="0" hdr="0" ftr="0" dt="0"/>
+</p:sldLayout>
+</file>
+
+<file path=ppt/slideLayouts/slideLayout6.xml><?xml version="1.0" encoding="utf-8"?>
+<p:sldLayout xmlns:a="http://schemas.openxmlformats.org/drawingml/2006/main" xmlns:r="http://schemas.openxmlformats.org/officeDocument/2006/relationships" xmlns:p="http://schemas.openxmlformats.org/presentationml/2006/main" type="obj" preserve="1">
+  <p:cSld name="Azure Update Ending - Azure Blue">
+    <p:spTree>
+      <p:nvGrpSpPr>
+        <p:cNvPr id="1" name=""/>
+        <p:cNvGrpSpPr/>
+        <p:nvPr/>
+      </p:nvGrpSpPr>
+      <p:grpSpPr>
+        <a:xfrm>
+          <a:off x="0" y="0"/>
+          <a:ext cx="0" cy="0"/>
+          <a:chOff x="0" y="0"/>
+          <a:chExt cx="0" cy="0"/>
+        </a:xfrm>
+      </p:grpSpPr>
+      <p:sp>
+        <p:nvSpPr>
+          <p:cNvPr id="2" name="EndingBase"/>
+          <p:cNvSpPr/>
+          <p:nvPr userDrawn="1"/>
+        </p:nvSpPr>
+        <p:spPr>
+          <a:xfrm>
+            <a:off x="0" y="0"/>
+            <a:ext cx="12192000" cy="6858000"/>
+          </a:xfrm>
+          <a:prstGeom prst="rect">
+            <a:avLst/>
+          </a:prstGeom>
+          <a:solidFill>
+            <a:srgbClr val="FFFFFF"/>
+          </a:solidFill>
+          <a:ln>
+            <a:noFill/>
+          </a:ln>
+        </p:spPr>
+        <p:txBody>
+          <a:bodyPr/>
+          <a:lstStyle/>
+          <a:p>
+            <a:endParaRPr lang="ja-JP"/>
+          </a:p>
+        </p:txBody>
+      </p:sp>
+      <p:sp>
+        <p:nvSpPr>
+          <p:cNvPr id="3" name="EndingHeader"/>
+          <p:cNvSpPr/>
+          <p:nvPr userDrawn="1"/>
+        </p:nvSpPr>
+        <p:spPr>
+          <a:xfrm>
+            <a:off x="0" y="0"/>
+            <a:ext cx="12192000" cy="1200000"/>
+          </a:xfrm>
+          <a:prstGeom prst="rect">
+            <a:avLst/>
+          </a:prstGeom>
+          <a:solidFill>
+            <a:srgbClr val="0078D4"/>
+          </a:solidFill>
+          <a:ln>
+            <a:noFill/>
+          </a:ln>
+        </p:spPr>
+        <p:txBody>
+          <a:bodyPr wrap="square" lIns="0" tIns="0" rIns="0" bIns="0" anchor="ctr"/>
+          <a:lstStyle/>
+          <a:p>
+            <a:pPr algn="l">
+              <a:defRPr/>
+            </a:pPr>
+            <a:r>
+              <a:rPr lang="en-US" sz="2000" b="1" kern="1200">
+                <a:solidFill>
+                  <a:srgbClr val="FFFFFF"/>
+                </a:solidFill>
+                <a:latin typeface="Segoe UI Semibold"/>
+                <a:ea typeface="BIZ UDPゴシック"/>
+                <a:cs typeface="Segoe UI Semibold"/>
+              </a:rPr>
+              <a:t>    Microsoft Azure</a:t>
+            </a:r>
+            <a:endParaRPr lang="ja-JP" sz="2000"/>
+          </a:p>
+        </p:txBody>
+      </p:sp>
+      <p:sp>
+        <p:nvSpPr>
+          <p:cNvPr id="4" name="EndingAccentBand"/>
+          <p:cNvSpPr/>
+          <p:nvPr userDrawn="1"/>
+        </p:nvSpPr>
+        <p:spPr>
+          <a:xfrm>
+            <a:off x="0" y="1200000"/>
+            <a:ext cx="12192000" cy="90000"/>
+          </a:xfrm>
+          <a:prstGeom prst="rect">
+            <a:avLst/>
+          </a:prstGeom>
+          <a:solidFill>
+            <a:srgbClr val="00B0F0"/>
+          </a:solidFill>
+          <a:ln>
+            <a:noFill/>
+          </a:ln>
+        </p:spPr>
+        <p:txBody>
+          <a:bodyPr/>
+          <a:lstStyle/>
+          <a:p>
+            <a:endParaRPr lang="ja-JP"/>
+          </a:p>
+        </p:txBody>
+      </p:sp>
+      <p:sp>
+        <p:nvSpPr>
+          <p:cNvPr id="5" name="EndingClosingHeadline"/>
+          <p:cNvSpPr txBox="1"/>
+          <p:nvPr userDrawn="1"/>
+        </p:nvSpPr>
+        <p:spPr>
+          <a:xfrm>
+            <a:off x="0" y="2200000"/>
+            <a:ext cx="12192000" cy="1400000"/>
+          </a:xfrm>
+          <a:prstGeom prst="rect">
+            <a:avLst/>
+          </a:prstGeom>
+          <a:noFill/>
+          <a:ln>
+            <a:noFill/>
+          </a:ln>
+        </p:spPr>
+        <p:txBody>
+          <a:bodyPr wrap="square" lIns="0" tIns="0" rIns="0" bIns="0" anchor="ctr" anchorCtr="0"/>
+          <a:lstStyle/>
+          <a:p>
+            <a:pPr algn="ctr"/>
+            <a:r>
+              <a:rPr lang="en-US" sz="5400" b="1" kern="1200" spc="200">
+                <a:solidFill>
+                  <a:srgbClr val="0078D4"/>
+                </a:solidFill>
+                <a:latin typeface="Segoe UI Semibold"/>
+                <a:ea typeface="BIZ UDPゴシック"/>
+                <a:cs typeface="Segoe UI Semibold"/>
+              </a:rPr>
+              <a:t>AZURE UPDATE </a:t>
+            </a:r>
+            <a:r>
+              <a:rPr lang="ja-JP" altLang="en-US" sz="5400" b="1" kern="1200" spc="200">
+                <a:solidFill>
+                  <a:srgbClr val="0078D4"/>
+                </a:solidFill>
+                <a:latin typeface="Segoe UI Semibold"/>
+                <a:ea typeface="BIZ UDPゴシック"/>
+                <a:cs typeface="Segoe UI Semibold"/>
+              </a:rPr>
+              <a:t>情報 </a:t>
+            </a:r>
+            <a:r>
+              <a:rPr lang="en-US" sz="5400" b="1" kern="1200" spc="200">
+                <a:solidFill>
+                  <a:srgbClr val="00B0F0"/>
+                </a:solidFill>
+                <a:latin typeface="Segoe UI Semibold"/>
+                <a:ea typeface="BIZ UDPゴシック"/>
+                <a:cs typeface="Segoe UI Semibold"/>
+              </a:rPr>
+              <a:t>END</a:t>
+            </a:r>
+            <a:endParaRPr lang="ja-JP" sz="5400" b="1"/>
+          </a:p>
+        </p:txBody>
+      </p:sp>
+      <p:sp>
+        <p:nvSpPr>
+          <p:cNvPr id="6" name="EndingInfoPanel"/>
+          <p:cNvSpPr/>
+          <p:nvPr userDrawn="1"/>
+        </p:nvSpPr>
+        <p:spPr>
+          <a:xfrm>
+            <a:off x="900000" y="4800000"/>
+            <a:ext cx="10392000" cy="900000"/>
+          </a:xfrm>
+          <a:prstGeom prst="rect">
+            <a:avLst/>
+          </a:prstGeom>
+          <a:solidFill>
+            <a:srgbClr val="005EB8"/>
+          </a:solidFill>
+          <a:ln>
+            <a:noFill/>
+          </a:ln>
+        </p:spPr>
+        <p:txBody>
+          <a:bodyPr/>
+          <a:lstStyle/>
+          <a:p>
+            <a:endParaRPr lang="ja-JP"/>
+          </a:p>
+        </p:txBody>
+      </p:sp>
+      <p:sp>
+        <p:nvSpPr>
+          <p:cNvPr id="7" name="EndingKeyMessagePlaceholder"/>
+          <p:cNvSpPr>
+            <a:spLocks noGrp="1"/>
+          </p:cNvSpPr>
+          <p:nvPr>
+            <p:ph type="body" sz="quarter" idx="10"/>
+          </p:nvPr>
+        </p:nvSpPr>
+        <p:spPr>
+          <a:xfrm>
+            <a:off x="1080000" y="4800000"/>
+            <a:ext cx="10032000" cy="900000"/>
+          </a:xfrm>
+          <a:prstGeom prst="rect">
+            <a:avLst/>
+          </a:prstGeom>
+        </p:spPr>
+        <p:txBody>
+          <a:bodyPr wrap="square" lIns="180000" tIns="90000" rIns="180000" bIns="90000" anchor="ctr" anchorCtr="0"/>
+          <a:lstStyle>
+            <a:lvl1pPr marL="0" indent="0">
+              <a:buNone/>
+              <a:defRPr sz="2000" b="1">
+                <a:solidFill>
+                  <a:srgbClr val="FFFFFF"/>
+                </a:solidFill>
+                <a:latin typeface="Segoe UI Semibold"/>
+                <a:ea typeface="BIZ UDPゴシック"/>
+              </a:defRPr>
+            </a:lvl1pPr>
+          </a:lstStyle>
+          <a:p>
+            <a:pPr marL="0" indent="0" algn="l">
+              <a:buNone/>
+            </a:pPr>
+            <a:endParaRPr lang="ja-JP"/>
+          </a:p>
+        </p:txBody>
+      </p:sp>
+      <p:sp>
+        <p:nvSpPr>
+          <p:cNvPr id="8" name="EndingReferencePlaceholder"/>
+          <p:cNvSpPr>
+            <a:spLocks noGrp="1"/>
+          </p:cNvSpPr>
+          <p:nvPr>
+            <p:ph type="body" sz="quarter" idx="11"/>
+          </p:nvPr>
+        </p:nvSpPr>
+        <p:spPr>
+          <a:xfrm>
+            <a:off x="900000" y="3800000"/>
+            <a:ext cx="10392000" cy="900000"/>
+          </a:xfrm>
+          <a:prstGeom prst="rect">
+            <a:avLst/>
+          </a:prstGeom>
+        </p:spPr>
+        <p:txBody>
+          <a:bodyPr wrap="square" anchor="ctr" anchorCtr="0"/>
+          <a:lstStyle>
+            <a:lvl1pPr marL="0" indent="0">
+              <a:buNone/>
+              <a:defRPr sz="1400">
+                <a:solidFill>
+                  <a:srgbClr val="6E6E6E"/>
+                </a:solidFill>
+                <a:latin typeface="Segoe UI"/>
+                <a:ea typeface="BIZ UDPゴシック"/>
+              </a:defRPr>
+            </a:lvl1pPr>
+          </a:lstStyle>
+          <a:p>
+            <a:pPr marL="0" indent="0" algn="ctr">
+              <a:buNone/>
+            </a:pPr>
+            <a:endParaRPr lang="ja-JP"/>
+          </a:p>
+        </p:txBody>
+      </p:sp>
+    </p:spTree>
+  </p:cSld>
+  <p:clrMapOvr>
+    <a:masterClrMapping/>
+  </p:clrMapOvr>
+  <p:hf sldNum="0" hdr="0" ftr="0" dt="0"/>
+</p:sldLayout>
+</file>
+
+<file path=ppt/slideLayouts/slideLayout7.xml><?xml version="1.0" encoding="utf-8"?>
+<p:sldLayout xmlns:a="http://schemas.openxmlformats.org/drawingml/2006/main" xmlns:r="http://schemas.openxmlformats.org/officeDocument/2006/relationships" xmlns:p="http://schemas.openxmlformats.org/presentationml/2006/main" preserve="1" userDrawn="1">
+  <p:cSld name="Azure Update Body">
+    <p:spTree>
+      <p:nvGrpSpPr>
+        <p:cNvPr id="1" name=""/>
+        <p:cNvGrpSpPr/>
+        <p:nvPr/>
+      </p:nvGrpSpPr>
+      <p:grpSpPr>
+        <a:xfrm>
+          <a:off x="0" y="0"/>
+          <a:ext cx="0" cy="0"/>
+          <a:chOff x="0" y="0"/>
+          <a:chExt cx="0" cy="0"/>
+        </a:xfrm>
+      </p:grpSpPr>
+      <p:sp>
+        <p:nvSpPr>
+          <p:cNvPr id="3" name="スライド番号プレースホルダー 2"/>
+          <p:cNvSpPr>
+            <a:spLocks noGrp="1"/>
+          </p:cNvSpPr>
+          <p:nvPr>
+            <p:ph type="sldNum" sz="quarter" idx="10"/>
           </p:nvPr>
         </p:nvSpPr>
         <p:spPr/>
@@ -7203,19 +6151,38 @@
             </a:lvl1pPr>
           </a:lstStyle>
           <a:p>
-            <a:r>
-              <a:rPr kumimoji="1" lang="ja-JP" altLang="en-US"/>
-              <a:t>マスター タイトルの書式設定</a:t>
-            </a:r>
-          </a:p>
-        </p:txBody>
-      </p:sp>
-      <p:sp>
-        <p:nvSpPr>
-          <p:cNvPr id="4" name="EndingBase">
+            <a:pPr>
+              <a:defRPr/>
+            </a:pPr>
+            <a:fld id="{057595E4-A9A2-4DBB-9DF9-29E61EE6FF4B}" type="slidenum">
+              <a:rPr kumimoji="0" lang="en-US" smtClean="0">
+                <a:solidFill>
+                  <a:prstClr val="black">
+                    <a:tint val="75000"/>
+                  </a:prstClr>
+                </a:solidFill>
+              </a:rPr>
+              <a:pPr>
+                <a:defRPr/>
+              </a:pPr>
+              <a:t>‹#›</a:t>
+            </a:fld>
+            <a:endParaRPr kumimoji="0" lang="en-US">
+              <a:solidFill>
+                <a:prstClr val="black">
+                  <a:tint val="75000"/>
+                </a:prstClr>
+              </a:solidFill>
+            </a:endParaRPr>
+          </a:p>
+        </p:txBody>
+      </p:sp>
+      <p:sp>
+        <p:nvSpPr>
+          <p:cNvPr id="6" name="BodyAccentBar">
             <a:extLst>
               <a:ext uri="{FF2B5EF4-FFF2-40B4-BE49-F238E27FC236}">
-                <a16:creationId xmlns:a16="http://schemas.microsoft.com/office/drawing/2014/main" id="{388027DA-7DBD-EC8F-2F25-89C15FB73828}"/>
+                <a16:creationId xmlns:a16="http://schemas.microsoft.com/office/drawing/2014/main" id="{2D58BF5E-FB48-944D-D326-D8C8A023026E}"/>
               </a:ext>
             </a:extLst>
           </p:cNvPr>
@@ -7225,13 +6192,13 @@
         <p:spPr>
           <a:xfrm>
             <a:off x="0" y="0"/>
-            <a:ext cx="12192000" cy="6858000"/>
+            <a:ext cx="127000" cy="6858000"/>
           </a:xfrm>
           <a:prstGeom prst="rect">
             <a:avLst/>
           </a:prstGeom>
           <a:solidFill>
-            <a:srgbClr val="FFFFFF"/>
+            <a:srgbClr val="2E3C72"/>
           </a:solidFill>
           <a:ln w="12700" cap="flat" cmpd="sng" algn="ctr">
             <a:noFill/>
@@ -7282,10 +6249,10 @@
       </p:sp>
       <p:sp>
         <p:nvSpPr>
-          <p:cNvPr id="5" name="EndingHeader">
+          <p:cNvPr id="7" name="BodyTitleRule">
             <a:extLst>
               <a:ext uri="{FF2B5EF4-FFF2-40B4-BE49-F238E27FC236}">
-                <a16:creationId xmlns:a16="http://schemas.microsoft.com/office/drawing/2014/main" id="{B6AB3496-399C-E030-B85C-3E59B79D0F34}"/>
+                <a16:creationId xmlns:a16="http://schemas.microsoft.com/office/drawing/2014/main" id="{382B1EB5-A7CA-88D7-20DD-9007228F87FC}"/>
               </a:ext>
             </a:extLst>
           </p:cNvPr>
@@ -7294,14 +6261,14 @@
         </p:nvSpPr>
         <p:spPr>
           <a:xfrm>
-            <a:off x="0" y="0"/>
-            <a:ext cx="12192000" cy="1524000"/>
+            <a:off x="190500" y="1066800"/>
+            <a:ext cx="11811000" cy="25400"/>
           </a:xfrm>
           <a:prstGeom prst="rect">
             <a:avLst/>
           </a:prstGeom>
           <a:solidFill>
-            <a:srgbClr val="0078D4"/>
+            <a:srgbClr val="F5A623"/>
           </a:solidFill>
           <a:ln w="12700" cap="flat" cmpd="sng" algn="ctr">
             <a:noFill/>
@@ -7352,182 +6319,10 @@
       </p:sp>
       <p:sp>
         <p:nvSpPr>
-          <p:cNvPr id="6" name="EndingAccent">
+          <p:cNvPr id="9" name="Title 1">
             <a:extLst>
               <a:ext uri="{FF2B5EF4-FFF2-40B4-BE49-F238E27FC236}">
-                <a16:creationId xmlns:a16="http://schemas.microsoft.com/office/drawing/2014/main" id="{463F7EE3-7EAE-5BB1-79FD-7D8C19CA61D6}"/>
-              </a:ext>
-            </a:extLst>
-          </p:cNvPr>
-          <p:cNvSpPr/>
-          <p:nvPr userDrawn="1"/>
-        </p:nvSpPr>
-        <p:spPr>
-          <a:xfrm>
-            <a:off x="0" y="1524000"/>
-            <a:ext cx="12192000" cy="101600"/>
-          </a:xfrm>
-          <a:prstGeom prst="rect">
-            <a:avLst/>
-          </a:prstGeom>
-          <a:solidFill>
-            <a:srgbClr val="00B0F0"/>
-          </a:solidFill>
-          <a:ln w="12700" cap="flat" cmpd="sng" algn="ctr">
-            <a:noFill/>
-            <a:prstDash val="solid"/>
-            <a:miter lim="800000"/>
-          </a:ln>
-          <a:effectLst/>
-          <a:extLst>
-            <a:ext uri="{91240B29-F687-4F45-9708-019B960494DF}">
-              <a14:hiddenLine xmlns:a14="http://schemas.microsoft.com/office/drawing/2010/main" w="12700" cap="flat" cmpd="sng" algn="ctr">
-                <a:solidFill>
-                  <a:srgbClr val="FFFFFF"/>
-                </a:solidFill>
-                <a:prstDash val="solid"/>
-                <a:miter lim="800000"/>
-              </a14:hiddenLine>
-            </a:ext>
-          </a:extLst>
-        </p:spPr>
-        <p:style>
-          <a:lnRef idx="2">
-            <a:schemeClr val="accent1">
-              <a:shade val="15000"/>
-            </a:schemeClr>
-          </a:lnRef>
-          <a:fillRef idx="1">
-            <a:schemeClr val="accent1"/>
-          </a:fillRef>
-          <a:effectRef idx="0">
-            <a:schemeClr val="accent1"/>
-          </a:effectRef>
-          <a:fontRef idx="minor">
-            <a:schemeClr val="lt1"/>
-          </a:fontRef>
-        </p:style>
-        <p:txBody>
-          <a:bodyPr rtlCol="0" anchor="ctr"/>
-          <a:lstStyle/>
-          <a:p>
-            <a:pPr algn="ctr"/>
-            <a:endParaRPr kumimoji="1" lang="ja-JP" altLang="en-US">
-              <a:latin typeface="Segoe UI" panose="020B0502040204020203" pitchFamily="34" charset="0"/>
-              <a:ea typeface="BIZ UDPゴシック" panose="020B0400000000000000" pitchFamily="50" charset="-128"/>
-              <a:cs typeface="Segoe UI" panose="020B0502040204020203" pitchFamily="34" charset="0"/>
-            </a:endParaRPr>
-          </a:p>
-        </p:txBody>
-      </p:sp>
-      <p:sp>
-        <p:nvSpPr>
-          <p:cNvPr id="7" name="EndingAzureLabel">
-            <a:extLst>
-              <a:ext uri="{FF2B5EF4-FFF2-40B4-BE49-F238E27FC236}">
-                <a16:creationId xmlns:a16="http://schemas.microsoft.com/office/drawing/2014/main" id="{99C4A540-E2EC-1DA5-ACE2-9CF96F5D7483}"/>
-              </a:ext>
-            </a:extLst>
-          </p:cNvPr>
-          <p:cNvSpPr txBox="1"/>
-          <p:nvPr userDrawn="1"/>
-        </p:nvSpPr>
-        <p:spPr>
-          <a:xfrm>
-            <a:off x="1371600" y="609600"/>
-            <a:ext cx="3048000" cy="261610"/>
-          </a:xfrm>
-          <a:prstGeom prst="rect">
-            <a:avLst/>
-          </a:prstGeom>
-          <a:noFill/>
-        </p:spPr>
-        <p:txBody>
-          <a:bodyPr vert="horz" lIns="0" tIns="0" rIns="0" bIns="0" rtlCol="0">
-            <a:spAutoFit/>
-          </a:bodyPr>
-          <a:lstStyle/>
-          <a:p>
-            <a:pPr algn="l"/>
-            <a:r>
-              <a:rPr kumimoji="1" lang="en-US" altLang="ja-JP" sz="1700" b="0">
-                <a:solidFill>
-                  <a:srgbClr val="FFFFFF"/>
-                </a:solidFill>
-                <a:latin typeface="Segoe UI" panose="020B0502040204020203" pitchFamily="34" charset="0"/>
-                <a:ea typeface="BIZ UDPゴシック" panose="020B0400000000000000" pitchFamily="50" charset="-128"/>
-                <a:cs typeface="Segoe UI" panose="020B0502040204020203" pitchFamily="34" charset="0"/>
-              </a:rPr>
-              <a:t>Microsoft Azure</a:t>
-            </a:r>
-            <a:endParaRPr kumimoji="1" lang="ja-JP" altLang="en-US" sz="1700" b="0">
-              <a:solidFill>
-                <a:srgbClr val="FFFFFF"/>
-              </a:solidFill>
-              <a:latin typeface="Segoe UI" panose="020B0502040204020203" pitchFamily="34" charset="0"/>
-              <a:ea typeface="BIZ UDPゴシック" panose="020B0400000000000000" pitchFamily="50" charset="-128"/>
-              <a:cs typeface="Segoe UI" panose="020B0502040204020203" pitchFamily="34" charset="0"/>
-            </a:endParaRPr>
-          </a:p>
-        </p:txBody>
-      </p:sp>
-      <p:sp>
-        <p:nvSpPr>
-          <p:cNvPr id="8" name="EndingTitlePlaceholder">
-            <a:extLst>
-              <a:ext uri="{FF2B5EF4-FFF2-40B4-BE49-F238E27FC236}">
-                <a16:creationId xmlns:a16="http://schemas.microsoft.com/office/drawing/2014/main" id="{3BB37931-E496-5CBC-CA8E-49E344B23128}"/>
-              </a:ext>
-            </a:extLst>
-          </p:cNvPr>
-          <p:cNvSpPr txBox="1"/>
-          <p:nvPr userDrawn="1"/>
-        </p:nvSpPr>
-        <p:spPr>
-          <a:xfrm>
-            <a:off x="1016000" y="2159000"/>
-            <a:ext cx="7112000" cy="523220"/>
-          </a:xfrm>
-          <a:prstGeom prst="rect">
-            <a:avLst/>
-          </a:prstGeom>
-          <a:noFill/>
-        </p:spPr>
-        <p:txBody>
-          <a:bodyPr vert="horz" lIns="0" tIns="0" rIns="0" bIns="0" rtlCol="0">
-            <a:spAutoFit/>
-          </a:bodyPr>
-          <a:lstStyle/>
-          <a:p>
-            <a:pPr algn="l"/>
-            <a:r>
-              <a:rPr kumimoji="1" lang="en-US" altLang="ja-JP" sz="3400" b="0">
-                <a:solidFill>
-                  <a:srgbClr val="2F2F2F"/>
-                </a:solidFill>
-                <a:latin typeface="Segoe UI" panose="020B0502040204020203" pitchFamily="34" charset="0"/>
-                <a:ea typeface="BIZ UDPゴシック" panose="020B0400000000000000" pitchFamily="50" charset="-128"/>
-                <a:cs typeface="Segoe UI" panose="020B0502040204020203" pitchFamily="34" charset="0"/>
-              </a:rPr>
-              <a:t>Reference &amp; resources</a:t>
-            </a:r>
-            <a:endParaRPr kumimoji="1" lang="ja-JP" altLang="en-US" sz="3400" b="0">
-              <a:solidFill>
-                <a:srgbClr val="2F2F2F"/>
-              </a:solidFill>
-              <a:latin typeface="Segoe UI" panose="020B0502040204020203" pitchFamily="34" charset="0"/>
-              <a:ea typeface="BIZ UDPゴシック" panose="020B0400000000000000" pitchFamily="50" charset="-128"/>
-              <a:cs typeface="Segoe UI" panose="020B0502040204020203" pitchFamily="34" charset="0"/>
-            </a:endParaRPr>
-          </a:p>
-        </p:txBody>
-      </p:sp>
-      <p:sp>
-        <p:nvSpPr>
-          <p:cNvPr id="9" name="EndingSubtitlePlaceholder">
-            <a:extLst>
-              <a:ext uri="{FF2B5EF4-FFF2-40B4-BE49-F238E27FC236}">
-                <a16:creationId xmlns:a16="http://schemas.microsoft.com/office/drawing/2014/main" id="{412A7A8C-7620-0BB0-4CB3-90D2BD3C6FE7}"/>
+                <a16:creationId xmlns:a16="http://schemas.microsoft.com/office/drawing/2014/main" id="{060B65E1-AA93-08AE-6A63-E61A1D417A82}"/>
               </a:ext>
             </a:extLst>
           </p:cNvPr>
@@ -7535,25 +6330,22 @@
             <a:spLocks noGrp="1"/>
           </p:cNvSpPr>
           <p:nvPr>
-            <p:ph type="body" sz="quarter" idx="11" hasCustomPrompt="1"/>
+            <p:ph type="title" idx="12"/>
           </p:nvPr>
         </p:nvSpPr>
         <p:spPr>
           <a:xfrm>
-            <a:off x="1016000" y="3111500"/>
-            <a:ext cx="8763000" cy="1524000"/>
+            <a:off x="190500" y="152400"/>
+            <a:ext cx="10541000" cy="952500"/>
           </a:xfrm>
-          <a:prstGeom prst="rect">
-            <a:avLst/>
-          </a:prstGeom>
         </p:spPr>
         <p:txBody>
           <a:bodyPr lIns="0" tIns="0" rIns="0" bIns="0"/>
           <a:lstStyle>
             <a:lvl1pPr algn="l">
-              <a:defRPr sz="1800" b="0">
-                <a:solidFill>
-                  <a:srgbClr val="333333"/>
+              <a:defRPr sz="2400" b="1">
+                <a:solidFill>
+                  <a:srgbClr val="2F2F2F"/>
                 </a:solidFill>
                 <a:latin typeface="Segoe UI" panose="020B0502040204020203" pitchFamily="34" charset="0"/>
                 <a:ea typeface="BIZ UDPゴシック" panose="020B0400000000000000" pitchFamily="50" charset="-128"/>
@@ -7562,140 +6354,70 @@
             </a:lvl1pPr>
           </a:lstStyle>
           <a:p>
-            <a:pPr lvl="0"/>
-            <a:r>
-              <a:rPr kumimoji="1" lang="en-US" altLang="ja-JP"/>
-              <a:t>{{REFERENCE URLS / CONTACT}}</a:t>
-            </a:r>
-            <a:endParaRPr kumimoji="1" lang="ja-JP" altLang="en-US"/>
-          </a:p>
-        </p:txBody>
-      </p:sp>
-      <p:sp>
-        <p:nvSpPr>
-          <p:cNvPr id="10" name="EndingInfoPanel">
+            <a:r>
+              <a:rPr kumimoji="1" lang="ja-JP" altLang="en-US"/>
+              <a:t>マスター タイトルの書式設定</a:t>
+            </a:r>
+          </a:p>
+        </p:txBody>
+      </p:sp>
+      <p:sp>
+        <p:nvSpPr>
+          <p:cNvPr id="10" name="Content Placeholder 4">
             <a:extLst>
               <a:ext uri="{FF2B5EF4-FFF2-40B4-BE49-F238E27FC236}">
-                <a16:creationId xmlns:a16="http://schemas.microsoft.com/office/drawing/2014/main" id="{6A0F71C9-BAAA-739E-2790-C7E83A8C7578}"/>
+                <a16:creationId xmlns:a16="http://schemas.microsoft.com/office/drawing/2014/main" id="{ADD512BC-66F3-43B2-0D6C-D496D61848A3}"/>
               </a:ext>
             </a:extLst>
           </p:cNvPr>
-          <p:cNvSpPr/>
-          <p:nvPr userDrawn="1"/>
+          <p:cNvSpPr>
+            <a:spLocks noGrp="1"/>
+          </p:cNvSpPr>
+          <p:nvPr>
+            <p:ph sz="quarter" idx="13" hasCustomPrompt="1"/>
+          </p:nvPr>
         </p:nvSpPr>
         <p:spPr>
           <a:xfrm>
-            <a:off x="1016000" y="4953000"/>
-            <a:ext cx="10160000" cy="889000"/>
+            <a:off x="190500" y="1168400"/>
+            <a:ext cx="11811000" cy="5054600"/>
           </a:xfrm>
           <a:prstGeom prst="rect">
             <a:avLst/>
           </a:prstGeom>
-          <a:solidFill>
-            <a:srgbClr val="005EB8"/>
-          </a:solidFill>
-          <a:ln w="12700" cap="flat" cmpd="sng" algn="ctr">
-            <a:noFill/>
-            <a:prstDash val="solid"/>
-            <a:miter lim="800000"/>
-          </a:ln>
-          <a:effectLst/>
-          <a:extLst>
-            <a:ext uri="{91240B29-F687-4F45-9708-019B960494DF}">
-              <a14:hiddenLine xmlns:a14="http://schemas.microsoft.com/office/drawing/2010/main" w="12700" cap="flat" cmpd="sng" algn="ctr">
-                <a:solidFill>
-                  <a:srgbClr val="FFFFFF"/>
-                </a:solidFill>
-                <a:prstDash val="solid"/>
-                <a:miter lim="800000"/>
-              </a14:hiddenLine>
-            </a:ext>
-          </a:extLst>
         </p:spPr>
-        <p:style>
-          <a:lnRef idx="2">
-            <a:schemeClr val="accent1">
-              <a:shade val="15000"/>
-            </a:schemeClr>
-          </a:lnRef>
-          <a:fillRef idx="1">
-            <a:schemeClr val="accent1"/>
-          </a:fillRef>
-          <a:effectRef idx="0">
-            <a:schemeClr val="accent1"/>
-          </a:effectRef>
-          <a:fontRef idx="minor">
-            <a:schemeClr val="lt1"/>
-          </a:fontRef>
-        </p:style>
-        <p:txBody>
-          <a:bodyPr rtlCol="0" anchor="ctr"/>
-          <a:lstStyle/>
-          <a:p>
-            <a:pPr algn="ctr"/>
-            <a:endParaRPr kumimoji="1" lang="ja-JP" altLang="en-US">
-              <a:latin typeface="Segoe UI" panose="020B0502040204020203" pitchFamily="34" charset="0"/>
-              <a:ea typeface="BIZ UDPゴシック" panose="020B0400000000000000" pitchFamily="50" charset="-128"/>
-              <a:cs typeface="Segoe UI" panose="020B0502040204020203" pitchFamily="34" charset="0"/>
-            </a:endParaRPr>
-          </a:p>
-        </p:txBody>
-      </p:sp>
-      <p:sp>
-        <p:nvSpPr>
-          <p:cNvPr id="11" name="EndingInfoPanelText">
-            <a:extLst>
-              <a:ext uri="{FF2B5EF4-FFF2-40B4-BE49-F238E27FC236}">
-                <a16:creationId xmlns:a16="http://schemas.microsoft.com/office/drawing/2014/main" id="{C49BED88-C981-0325-1F5F-B680C9EB73A7}"/>
-              </a:ext>
-            </a:extLst>
-          </p:cNvPr>
-          <p:cNvSpPr txBox="1"/>
-          <p:nvPr userDrawn="1"/>
-        </p:nvSpPr>
-        <p:spPr>
-          <a:xfrm>
-            <a:off x="1397000" y="5207000"/>
-            <a:ext cx="9398000" cy="276999"/>
-          </a:xfrm>
-          <a:prstGeom prst="rect">
-            <a:avLst/>
-          </a:prstGeom>
-          <a:noFill/>
-        </p:spPr>
-        <p:txBody>
-          <a:bodyPr vert="horz" lIns="0" tIns="0" rIns="0" bIns="0" rtlCol="0">
-            <a:spAutoFit/>
-          </a:bodyPr>
-          <a:lstStyle/>
-          <a:p>
-            <a:pPr algn="l"/>
-            <a:r>
-              <a:rPr kumimoji="1" lang="en-US" altLang="ja-JP" sz="1800" b="1">
-                <a:solidFill>
-                  <a:srgbClr val="FFFFFF"/>
+        <p:txBody>
+          <a:bodyPr lIns="0" tIns="0" rIns="0" bIns="0"/>
+          <a:lstStyle>
+            <a:lvl1pPr algn="l">
+              <a:defRPr sz="1800" b="0">
+                <a:solidFill>
+                  <a:srgbClr val="333333"/>
                 </a:solidFill>
                 <a:latin typeface="Segoe UI" panose="020B0502040204020203" pitchFamily="34" charset="0"/>
                 <a:ea typeface="BIZ UDPゴシック" panose="020B0400000000000000" pitchFamily="50" charset="-128"/>
                 <a:cs typeface="Segoe UI" panose="020B0502040204020203" pitchFamily="34" charset="0"/>
-              </a:rPr>
-              <a:t>{{KEY MESSAGE}}</a:t>
-            </a:r>
-            <a:endParaRPr kumimoji="1" lang="ja-JP" altLang="en-US" sz="1800" b="1">
-              <a:solidFill>
-                <a:srgbClr val="FFFFFF"/>
-              </a:solidFill>
-              <a:latin typeface="Segoe UI" panose="020B0502040204020203" pitchFamily="34" charset="0"/>
-              <a:ea typeface="BIZ UDPゴシック" panose="020B0400000000000000" pitchFamily="50" charset="-128"/>
-              <a:cs typeface="Segoe UI" panose="020B0502040204020203" pitchFamily="34" charset="0"/>
-            </a:endParaRPr>
+              </a:defRPr>
+            </a:lvl1pPr>
+          </a:lstStyle>
+          <a:p>
+            <a:pPr lvl="0"/>
+            <a:r>
+              <a:rPr kumimoji="1" lang="ja-JP" altLang="en-US"/>
+              <a:t>対象 </a:t>
+            </a:r>
+            <a:r>
+              <a:rPr kumimoji="1" lang="en-US" altLang="ja-JP"/>
+              <a:t>: </a:t>
+            </a:r>
+            <a:endParaRPr kumimoji="1" lang="ja-JP" altLang="en-US"/>
           </a:p>
         </p:txBody>
       </p:sp>
     </p:spTree>
     <p:extLst>
       <p:ext uri="{BB962C8B-B14F-4D97-AF65-F5344CB8AC3E}">
-        <p14:creationId xmlns:p14="http://schemas.microsoft.com/office/powerpoint/2010/main" val="697451680"/>
+        <p14:creationId xmlns:p14="http://schemas.microsoft.com/office/powerpoint/2010/main" val="430014301"/>
       </p:ext>
     </p:extLst>
   </p:cSld>
@@ -7705,9 +6427,9 @@
 </p:sldLayout>
 </file>
 
-<file path=ppt/slideLayouts/slideLayout6.xml><?xml version="1.0" encoding="utf-8"?>
-<p:sldLayout xmlns:a="http://schemas.openxmlformats.org/drawingml/2006/main" xmlns:r="http://schemas.openxmlformats.org/officeDocument/2006/relationships" xmlns:p="http://schemas.openxmlformats.org/presentationml/2006/main" preserve="1" userDrawn="1">
-  <p:cSld name="Azure Update Body">
+<file path=ppt/slideLayouts/slideLayout8.xml><?xml version="1.0" encoding="utf-8"?>
+<p:sldLayout xmlns:a="http://schemas.openxmlformats.org/drawingml/2006/main" xmlns:r="http://schemas.openxmlformats.org/officeDocument/2006/relationships" xmlns:p="http://schemas.openxmlformats.org/presentationml/2006/main" type="obj" preserve="1">
+  <p:cSld name="Azure Update Ending - Indigo Amber">
     <p:spTree>
       <p:nvGrpSpPr>
         <p:cNvPr id="1" name=""/>
@@ -7724,69 +6446,43 @@
       </p:grpSpPr>
       <p:sp>
         <p:nvSpPr>
-          <p:cNvPr id="3" name="スライド番号プレースホルダー 2"/>
-          <p:cNvSpPr>
-            <a:spLocks noGrp="1"/>
-          </p:cNvSpPr>
-          <p:nvPr>
-            <p:ph type="sldNum" sz="quarter" idx="10"/>
-          </p:nvPr>
-        </p:nvSpPr>
-        <p:spPr/>
-        <p:txBody>
-          <a:bodyPr/>
-          <a:lstStyle>
-            <a:lvl1pPr>
-              <a:defRPr>
-                <a:latin typeface="Segoe UI" panose="020B0502040204020203" pitchFamily="34" charset="0"/>
-                <a:ea typeface="BIZ UDPゴシック" panose="020B0400000000000000" pitchFamily="50" charset="-128"/>
-                <a:cs typeface="Segoe UI" panose="020B0502040204020203" pitchFamily="34" charset="0"/>
-              </a:defRPr>
-            </a:lvl1pPr>
-          </a:lstStyle>
-          <a:p>
-            <a:pPr>
-              <a:defRPr/>
-            </a:pPr>
-            <a:fld id="{057595E4-A9A2-4DBB-9DF9-29E61EE6FF4B}" type="slidenum">
-              <a:rPr kumimoji="0" lang="en-US" smtClean="0">
-                <a:solidFill>
-                  <a:prstClr val="black">
-                    <a:tint val="75000"/>
-                  </a:prstClr>
-                </a:solidFill>
-              </a:rPr>
-              <a:pPr>
-                <a:defRPr/>
-              </a:pPr>
-              <a:t>‹#›</a:t>
-            </a:fld>
-            <a:endParaRPr kumimoji="0" lang="en-US">
-              <a:solidFill>
-                <a:prstClr val="black">
-                  <a:tint val="75000"/>
-                </a:prstClr>
-              </a:solidFill>
-            </a:endParaRPr>
-          </a:p>
-        </p:txBody>
-      </p:sp>
-      <p:sp>
-        <p:nvSpPr>
-          <p:cNvPr id="6" name="BodyAccentBar">
-            <a:extLst>
-              <a:ext uri="{FF2B5EF4-FFF2-40B4-BE49-F238E27FC236}">
-                <a16:creationId xmlns:a16="http://schemas.microsoft.com/office/drawing/2014/main" id="{2D58BF5E-FB48-944D-D326-D8C8A023026E}"/>
-              </a:ext>
-            </a:extLst>
-          </p:cNvPr>
+          <p:cNvPr id="2" name="EndingBase"/>
           <p:cNvSpPr/>
           <p:nvPr userDrawn="1"/>
         </p:nvSpPr>
         <p:spPr>
           <a:xfrm>
             <a:off x="0" y="0"/>
-            <a:ext cx="127000" cy="6858000"/>
+            <a:ext cx="12192000" cy="6858000"/>
+          </a:xfrm>
+          <a:prstGeom prst="rect">
+            <a:avLst/>
+          </a:prstGeom>
+          <a:solidFill>
+            <a:srgbClr val="FFFFFF"/>
+          </a:solidFill>
+          <a:ln>
+            <a:noFill/>
+          </a:ln>
+        </p:spPr>
+        <p:txBody>
+          <a:bodyPr/>
+          <a:lstStyle/>
+          <a:p>
+            <a:endParaRPr lang="ja-JP"/>
+          </a:p>
+        </p:txBody>
+      </p:sp>
+      <p:sp>
+        <p:nvSpPr>
+          <p:cNvPr id="3" name="EndingHeader"/>
+          <p:cNvSpPr/>
+          <p:nvPr userDrawn="1"/>
+        </p:nvSpPr>
+        <p:spPr>
+          <a:xfrm>
+            <a:off x="0" y="0"/>
+            <a:ext cx="12192000" cy="1200000"/>
           </a:xfrm>
           <a:prstGeom prst="rect">
             <a:avLst/>
@@ -7794,236 +6490,245 @@
           <a:solidFill>
             <a:srgbClr val="2E3C72"/>
           </a:solidFill>
-          <a:ln w="12700" cap="flat" cmpd="sng" algn="ctr">
+          <a:ln>
             <a:noFill/>
-            <a:prstDash val="solid"/>
-            <a:miter lim="800000"/>
           </a:ln>
-          <a:effectLst/>
-          <a:extLst>
-            <a:ext uri="{91240B29-F687-4F45-9708-019B960494DF}">
-              <a14:hiddenLine xmlns:a14="http://schemas.microsoft.com/office/drawing/2010/main" w="12700" cap="flat" cmpd="sng" algn="ctr">
+        </p:spPr>
+        <p:txBody>
+          <a:bodyPr wrap="square" lIns="0" tIns="0" rIns="0" bIns="0" anchor="ctr"/>
+          <a:lstStyle/>
+          <a:p>
+            <a:pPr algn="l">
+              <a:defRPr/>
+            </a:pPr>
+            <a:r>
+              <a:rPr lang="en-US" sz="2000" b="1" kern="1200">
                 <a:solidFill>
                   <a:srgbClr val="FFFFFF"/>
                 </a:solidFill>
-                <a:prstDash val="solid"/>
-                <a:miter lim="800000"/>
-              </a14:hiddenLine>
-            </a:ext>
-          </a:extLst>
-        </p:spPr>
-        <p:style>
-          <a:lnRef idx="2">
-            <a:schemeClr val="accent1">
-              <a:shade val="15000"/>
-            </a:schemeClr>
-          </a:lnRef>
-          <a:fillRef idx="1">
-            <a:schemeClr val="accent1"/>
-          </a:fillRef>
-          <a:effectRef idx="0">
-            <a:schemeClr val="accent1"/>
-          </a:effectRef>
-          <a:fontRef idx="minor">
-            <a:schemeClr val="lt1"/>
-          </a:fontRef>
-        </p:style>
-        <p:txBody>
-          <a:bodyPr rtlCol="0" anchor="ctr"/>
-          <a:lstStyle/>
-          <a:p>
-            <a:pPr algn="ctr"/>
-            <a:endParaRPr kumimoji="1" lang="ja-JP" altLang="en-US">
-              <a:latin typeface="Segoe UI" panose="020B0502040204020203" pitchFamily="34" charset="0"/>
-              <a:ea typeface="BIZ UDPゴシック" panose="020B0400000000000000" pitchFamily="50" charset="-128"/>
-              <a:cs typeface="Segoe UI" panose="020B0502040204020203" pitchFamily="34" charset="0"/>
-            </a:endParaRPr>
-          </a:p>
-        </p:txBody>
-      </p:sp>
-      <p:sp>
-        <p:nvSpPr>
-          <p:cNvPr id="7" name="BodyTitleRule">
-            <a:extLst>
-              <a:ext uri="{FF2B5EF4-FFF2-40B4-BE49-F238E27FC236}">
-                <a16:creationId xmlns:a16="http://schemas.microsoft.com/office/drawing/2014/main" id="{382B1EB5-A7CA-88D7-20DD-9007228F87FC}"/>
-              </a:ext>
-            </a:extLst>
-          </p:cNvPr>
+                <a:latin typeface="Segoe UI Semibold"/>
+                <a:ea typeface="BIZ UDPゴシック"/>
+                <a:cs typeface="Segoe UI Semibold"/>
+              </a:rPr>
+              <a:t>    Microsoft Azure</a:t>
+            </a:r>
+            <a:endParaRPr lang="ja-JP" sz="2000"/>
+          </a:p>
+        </p:txBody>
+      </p:sp>
+      <p:sp>
+        <p:nvSpPr>
+          <p:cNvPr id="4" name="EndingAccentBand"/>
           <p:cNvSpPr/>
           <p:nvPr userDrawn="1"/>
         </p:nvSpPr>
         <p:spPr>
           <a:xfrm>
-            <a:off x="190500" y="1066800"/>
-            <a:ext cx="11811000" cy="25400"/>
+            <a:off x="0" y="1200000"/>
+            <a:ext cx="12192000" cy="90000"/>
           </a:xfrm>
           <a:prstGeom prst="rect">
             <a:avLst/>
           </a:prstGeom>
           <a:solidFill>
-            <a:srgbClr val="F5A623"/>
+            <a:srgbClr val="3B4C8A"/>
           </a:solidFill>
-          <a:ln w="12700" cap="flat" cmpd="sng" algn="ctr">
+          <a:ln>
             <a:noFill/>
-            <a:prstDash val="solid"/>
-            <a:miter lim="800000"/>
           </a:ln>
-          <a:effectLst/>
-          <a:extLst>
-            <a:ext uri="{91240B29-F687-4F45-9708-019B960494DF}">
-              <a14:hiddenLine xmlns:a14="http://schemas.microsoft.com/office/drawing/2010/main" w="12700" cap="flat" cmpd="sng" algn="ctr">
-                <a:solidFill>
-                  <a:srgbClr val="FFFFFF"/>
-                </a:solidFill>
-                <a:prstDash val="solid"/>
-                <a:miter lim="800000"/>
-              </a14:hiddenLine>
-            </a:ext>
-          </a:extLst>
         </p:spPr>
-        <p:style>
-          <a:lnRef idx="2">
-            <a:schemeClr val="accent1">
-              <a:shade val="15000"/>
-            </a:schemeClr>
-          </a:lnRef>
-          <a:fillRef idx="1">
-            <a:schemeClr val="accent1"/>
-          </a:fillRef>
-          <a:effectRef idx="0">
-            <a:schemeClr val="accent1"/>
-          </a:effectRef>
-          <a:fontRef idx="minor">
-            <a:schemeClr val="lt1"/>
-          </a:fontRef>
-        </p:style>
-        <p:txBody>
-          <a:bodyPr rtlCol="0" anchor="ctr"/>
+        <p:txBody>
+          <a:bodyPr/>
           <a:lstStyle/>
           <a:p>
+            <a:endParaRPr lang="ja-JP"/>
+          </a:p>
+        </p:txBody>
+      </p:sp>
+      <p:sp>
+        <p:nvSpPr>
+          <p:cNvPr id="5" name="EndingClosingHeadline"/>
+          <p:cNvSpPr txBox="1"/>
+          <p:nvPr userDrawn="1"/>
+        </p:nvSpPr>
+        <p:spPr>
+          <a:xfrm>
+            <a:off x="0" y="2200000"/>
+            <a:ext cx="12192000" cy="1400000"/>
+          </a:xfrm>
+          <a:prstGeom prst="rect">
+            <a:avLst/>
+          </a:prstGeom>
+          <a:noFill/>
+          <a:ln>
+            <a:noFill/>
+          </a:ln>
+        </p:spPr>
+        <p:txBody>
+          <a:bodyPr wrap="square" lIns="0" tIns="0" rIns="0" bIns="0" anchor="ctr" anchorCtr="0"/>
+          <a:lstStyle/>
+          <a:p>
             <a:pPr algn="ctr"/>
-            <a:endParaRPr kumimoji="1" lang="ja-JP" altLang="en-US">
-              <a:latin typeface="Segoe UI" panose="020B0502040204020203" pitchFamily="34" charset="0"/>
-              <a:ea typeface="BIZ UDPゴシック" panose="020B0400000000000000" pitchFamily="50" charset="-128"/>
-              <a:cs typeface="Segoe UI" panose="020B0502040204020203" pitchFamily="34" charset="0"/>
-            </a:endParaRPr>
-          </a:p>
-        </p:txBody>
-      </p:sp>
-      <p:sp>
-        <p:nvSpPr>
-          <p:cNvPr id="9" name="Title 1">
-            <a:extLst>
-              <a:ext uri="{FF2B5EF4-FFF2-40B4-BE49-F238E27FC236}">
-                <a16:creationId xmlns:a16="http://schemas.microsoft.com/office/drawing/2014/main" id="{060B65E1-AA93-08AE-6A63-E61A1D417A82}"/>
-              </a:ext>
-            </a:extLst>
-          </p:cNvPr>
+            <a:r>
+              <a:rPr lang="en-US" sz="5400" b="1" kern="1200" spc="200">
+                <a:solidFill>
+                  <a:srgbClr val="2E3C72"/>
+                </a:solidFill>
+                <a:latin typeface="Segoe UI Semibold"/>
+                <a:ea typeface="BIZ UDPゴシック"/>
+                <a:cs typeface="Segoe UI Semibold"/>
+              </a:rPr>
+              <a:t>AZURE UPDATE </a:t>
+            </a:r>
+            <a:r>
+              <a:rPr lang="ja-JP" altLang="en-US" sz="5400" b="1" kern="1200" spc="200">
+                <a:solidFill>
+                  <a:srgbClr val="2E3C72"/>
+                </a:solidFill>
+                <a:latin typeface="Segoe UI Semibold"/>
+                <a:ea typeface="BIZ UDPゴシック"/>
+                <a:cs typeface="Segoe UI Semibold"/>
+              </a:rPr>
+              <a:t>情報 </a:t>
+            </a:r>
+            <a:r>
+              <a:rPr lang="en-US" sz="5400" b="1" kern="1200" spc="200">
+                <a:solidFill>
+                  <a:srgbClr val="3B4C8A"/>
+                </a:solidFill>
+                <a:latin typeface="Segoe UI Semibold"/>
+                <a:ea typeface="BIZ UDPゴシック"/>
+                <a:cs typeface="Segoe UI Semibold"/>
+              </a:rPr>
+              <a:t>END</a:t>
+            </a:r>
+            <a:endParaRPr lang="ja-JP" sz="5400" b="1"/>
+          </a:p>
+        </p:txBody>
+      </p:sp>
+      <p:sp>
+        <p:nvSpPr>
+          <p:cNvPr id="6" name="EndingInfoPanel"/>
+          <p:cNvSpPr/>
+          <p:nvPr userDrawn="1"/>
+        </p:nvSpPr>
+        <p:spPr>
+          <a:xfrm>
+            <a:off x="900000" y="4800000"/>
+            <a:ext cx="10392000" cy="900000"/>
+          </a:xfrm>
+          <a:prstGeom prst="rect">
+            <a:avLst/>
+          </a:prstGeom>
+          <a:solidFill>
+            <a:srgbClr val="3B4C8A"/>
+          </a:solidFill>
+          <a:ln>
+            <a:noFill/>
+          </a:ln>
+        </p:spPr>
+        <p:txBody>
+          <a:bodyPr/>
+          <a:lstStyle/>
+          <a:p>
+            <a:endParaRPr lang="ja-JP"/>
+          </a:p>
+        </p:txBody>
+      </p:sp>
+      <p:sp>
+        <p:nvSpPr>
+          <p:cNvPr id="7" name="EndingKeyMessagePlaceholder"/>
           <p:cNvSpPr>
             <a:spLocks noGrp="1"/>
           </p:cNvSpPr>
           <p:nvPr>
-            <p:ph type="title" idx="12"/>
+            <p:ph type="body" sz="quarter" idx="10"/>
           </p:nvPr>
         </p:nvSpPr>
         <p:spPr>
           <a:xfrm>
-            <a:off x="190500" y="152400"/>
-            <a:ext cx="10541000" cy="952500"/>
-          </a:xfrm>
-        </p:spPr>
-        <p:txBody>
-          <a:bodyPr lIns="0" tIns="0" rIns="0" bIns="0"/>
-          <a:lstStyle>
-            <a:lvl1pPr algn="l">
-              <a:defRPr sz="2400" b="1">
-                <a:solidFill>
-                  <a:srgbClr val="2F2F2F"/>
-                </a:solidFill>
-                <a:latin typeface="Segoe UI" panose="020B0502040204020203" pitchFamily="34" charset="0"/>
-                <a:ea typeface="BIZ UDPゴシック" panose="020B0400000000000000" pitchFamily="50" charset="-128"/>
-                <a:cs typeface="Segoe UI" panose="020B0502040204020203" pitchFamily="34" charset="0"/>
-              </a:defRPr>
-            </a:lvl1pPr>
-          </a:lstStyle>
-          <a:p>
-            <a:r>
-              <a:rPr kumimoji="1" lang="ja-JP" altLang="en-US"/>
-              <a:t>マスター タイトルの書式設定</a:t>
-            </a:r>
-          </a:p>
-        </p:txBody>
-      </p:sp>
-      <p:sp>
-        <p:nvSpPr>
-          <p:cNvPr id="10" name="Content Placeholder 4">
-            <a:extLst>
-              <a:ext uri="{FF2B5EF4-FFF2-40B4-BE49-F238E27FC236}">
-                <a16:creationId xmlns:a16="http://schemas.microsoft.com/office/drawing/2014/main" id="{ADD512BC-66F3-43B2-0D6C-D496D61848A3}"/>
-              </a:ext>
-            </a:extLst>
-          </p:cNvPr>
-          <p:cNvSpPr>
-            <a:spLocks noGrp="1"/>
-          </p:cNvSpPr>
-          <p:nvPr>
-            <p:ph sz="quarter" idx="13" hasCustomPrompt="1"/>
-          </p:nvPr>
-        </p:nvSpPr>
-        <p:spPr>
-          <a:xfrm>
-            <a:off x="190500" y="1168400"/>
-            <a:ext cx="11811000" cy="5054600"/>
+            <a:off x="1080000" y="4800000"/>
+            <a:ext cx="10032000" cy="900000"/>
           </a:xfrm>
           <a:prstGeom prst="rect">
             <a:avLst/>
           </a:prstGeom>
         </p:spPr>
         <p:txBody>
-          <a:bodyPr lIns="0" tIns="0" rIns="0" bIns="0"/>
+          <a:bodyPr wrap="square" lIns="180000" tIns="90000" rIns="180000" bIns="90000" anchor="ctr" anchorCtr="0"/>
           <a:lstStyle>
-            <a:lvl1pPr algn="l">
-              <a:defRPr sz="1800" b="0">
-                <a:solidFill>
-                  <a:srgbClr val="333333"/>
-                </a:solidFill>
-                <a:latin typeface="Segoe UI" panose="020B0502040204020203" pitchFamily="34" charset="0"/>
-                <a:ea typeface="BIZ UDPゴシック" panose="020B0400000000000000" pitchFamily="50" charset="-128"/>
-                <a:cs typeface="Segoe UI" panose="020B0502040204020203" pitchFamily="34" charset="0"/>
+            <a:lvl1pPr marL="0" indent="0">
+              <a:buNone/>
+              <a:defRPr sz="2000" b="1">
+                <a:solidFill>
+                  <a:srgbClr val="FFFFFF"/>
+                </a:solidFill>
+                <a:latin typeface="Segoe UI Semibold"/>
+                <a:ea typeface="BIZ UDPゴシック"/>
               </a:defRPr>
             </a:lvl1pPr>
           </a:lstStyle>
           <a:p>
-            <a:pPr lvl="0"/>
-            <a:r>
-              <a:rPr kumimoji="1" lang="ja-JP" altLang="en-US"/>
-              <a:t>対象 </a:t>
-            </a:r>
-            <a:r>
-              <a:rPr kumimoji="1" lang="en-US" altLang="ja-JP"/>
-              <a:t>: </a:t>
-            </a:r>
-            <a:endParaRPr kumimoji="1" lang="ja-JP" altLang="en-US"/>
+            <a:pPr marL="0" indent="0" algn="l">
+              <a:buNone/>
+            </a:pPr>
+            <a:endParaRPr lang="ja-JP"/>
+          </a:p>
+        </p:txBody>
+      </p:sp>
+      <p:sp>
+        <p:nvSpPr>
+          <p:cNvPr id="8" name="EndingReferencePlaceholder"/>
+          <p:cNvSpPr>
+            <a:spLocks noGrp="1"/>
+          </p:cNvSpPr>
+          <p:nvPr>
+            <p:ph type="body" sz="quarter" idx="11"/>
+          </p:nvPr>
+        </p:nvSpPr>
+        <p:spPr>
+          <a:xfrm>
+            <a:off x="900000" y="3800000"/>
+            <a:ext cx="10392000" cy="900000"/>
+          </a:xfrm>
+          <a:prstGeom prst="rect">
+            <a:avLst/>
+          </a:prstGeom>
+        </p:spPr>
+        <p:txBody>
+          <a:bodyPr wrap="square" anchor="ctr" anchorCtr="0"/>
+          <a:lstStyle>
+            <a:lvl1pPr marL="0" indent="0">
+              <a:buNone/>
+              <a:defRPr sz="1400">
+                <a:solidFill>
+                  <a:srgbClr val="6E6E6E"/>
+                </a:solidFill>
+                <a:latin typeface="Segoe UI"/>
+                <a:ea typeface="BIZ UDPゴシック"/>
+              </a:defRPr>
+            </a:lvl1pPr>
+          </a:lstStyle>
+          <a:p>
+            <a:pPr marL="0" indent="0" algn="ctr">
+              <a:buNone/>
+            </a:pPr>
+            <a:endParaRPr lang="ja-JP"/>
           </a:p>
         </p:txBody>
       </p:sp>
     </p:spTree>
-    <p:extLst>
-      <p:ext uri="{BB962C8B-B14F-4D97-AF65-F5344CB8AC3E}">
-        <p14:creationId xmlns:p14="http://schemas.microsoft.com/office/powerpoint/2010/main" val="430014301"/>
-      </p:ext>
-    </p:extLst>
   </p:cSld>
   <p:clrMapOvr>
     <a:masterClrMapping/>
   </p:clrMapOvr>
+  <p:hf sldNum="0" hdr="0" ftr="0" dt="0"/>
 </p:sldLayout>
 </file>
 
-<file path=ppt/slideLayouts/slideLayout7.xml><?xml version="1.0" encoding="utf-8"?>
-<p:sldLayout xmlns:a="http://schemas.openxmlformats.org/drawingml/2006/main" xmlns:r="http://schemas.openxmlformats.org/officeDocument/2006/relationships" xmlns:p="http://schemas.openxmlformats.org/presentationml/2006/main" type="titleOnly">
-  <p:cSld name="Azure Update Ending - Next Steps">
+<file path=ppt/slideLayouts/slideLayout9.xml><?xml version="1.0" encoding="utf-8"?>
+<p:sldLayout xmlns:a="http://schemas.openxmlformats.org/drawingml/2006/main" xmlns:r="http://schemas.openxmlformats.org/officeDocument/2006/relationships" xmlns:p="http://schemas.openxmlformats.org/presentationml/2006/main" type="obj" preserve="1">
+  <p:cSld name="Azure Update Ending - Teal Fresh">
     <p:spTree>
       <p:nvGrpSpPr>
         <p:cNvPr id="1" name=""/>
@@ -8040,49 +6745,7 @@
       </p:grpSpPr>
       <p:sp>
         <p:nvSpPr>
-          <p:cNvPr id="2" name="タイトル 1">
-            <a:extLst>
-              <a:ext uri="{FF2B5EF4-FFF2-40B4-BE49-F238E27FC236}">
-                <a16:creationId xmlns:a16="http://schemas.microsoft.com/office/drawing/2014/main" id="{A157C537-AA65-EC49-ED59-29F3B647BD2A}"/>
-              </a:ext>
-            </a:extLst>
-          </p:cNvPr>
-          <p:cNvSpPr>
-            <a:spLocks noGrp="1"/>
-          </p:cNvSpPr>
-          <p:nvPr>
-            <p:ph type="title"/>
-          </p:nvPr>
-        </p:nvSpPr>
-        <p:spPr/>
-        <p:txBody>
-          <a:bodyPr/>
-          <a:lstStyle>
-            <a:lvl1pPr>
-              <a:defRPr>
-                <a:latin typeface="Segoe UI" panose="020B0502040204020203" pitchFamily="34" charset="0"/>
-                <a:ea typeface="BIZ UDPゴシック" panose="020B0400000000000000" pitchFamily="50" charset="-128"/>
-                <a:cs typeface="Segoe UI" panose="020B0502040204020203" pitchFamily="34" charset="0"/>
-              </a:defRPr>
-            </a:lvl1pPr>
-          </a:lstStyle>
-          <a:p>
-            <a:r>
-              <a:rPr kumimoji="1" lang="ja-JP" altLang="en-US"/>
-              <a:t>マスター タイトルの書式設定</a:t>
-            </a:r>
-          </a:p>
-        </p:txBody>
-      </p:sp>
-      <p:sp>
-        <p:nvSpPr>
-          <p:cNvPr id="4" name="EndingBase">
-            <a:extLst>
-              <a:ext uri="{FF2B5EF4-FFF2-40B4-BE49-F238E27FC236}">
-                <a16:creationId xmlns:a16="http://schemas.microsoft.com/office/drawing/2014/main" id="{7D2DF01A-EB27-B115-18B1-6990F4592E2B}"/>
-              </a:ext>
-            </a:extLst>
-          </p:cNvPr>
+          <p:cNvPr id="2" name="EndingBase"/>
           <p:cNvSpPr/>
           <p:nvPr userDrawn="1"/>
         </p:nvSpPr>
@@ -8097,828 +6760,268 @@
           <a:solidFill>
             <a:srgbClr val="FFFFFF"/>
           </a:solidFill>
-          <a:ln w="12700" cap="flat" cmpd="sng" algn="ctr">
+          <a:ln>
             <a:noFill/>
-            <a:prstDash val="solid"/>
-            <a:miter lim="800000"/>
           </a:ln>
-          <a:effectLst/>
-          <a:extLst>
-            <a:ext uri="{91240B29-F687-4F45-9708-019B960494DF}">
-              <a14:hiddenLine xmlns:a14="http://schemas.microsoft.com/office/drawing/2010/main" w="12700" cap="flat" cmpd="sng" algn="ctr">
-                <a:solidFill>
-                  <a:srgbClr val="FFFFFF"/>
-                </a:solidFill>
-                <a:prstDash val="solid"/>
-                <a:miter lim="800000"/>
-              </a14:hiddenLine>
-            </a:ext>
-          </a:extLst>
         </p:spPr>
-        <p:style>
-          <a:lnRef idx="2">
-            <a:schemeClr val="accent1">
-              <a:shade val="15000"/>
-            </a:schemeClr>
-          </a:lnRef>
-          <a:fillRef idx="1">
-            <a:schemeClr val="accent1"/>
-          </a:fillRef>
-          <a:effectRef idx="0">
-            <a:schemeClr val="accent1"/>
-          </a:effectRef>
-          <a:fontRef idx="minor">
-            <a:schemeClr val="lt1"/>
-          </a:fontRef>
-        </p:style>
-        <p:txBody>
-          <a:bodyPr rtlCol="0" anchor="ctr"/>
+        <p:txBody>
+          <a:bodyPr/>
           <a:lstStyle/>
           <a:p>
-            <a:pPr algn="ctr"/>
-            <a:endParaRPr kumimoji="1" lang="ja-JP" altLang="en-US">
-              <a:latin typeface="Segoe UI" panose="020B0502040204020203" pitchFamily="34" charset="0"/>
-              <a:ea typeface="BIZ UDPゴシック" panose="020B0400000000000000" pitchFamily="50" charset="-128"/>
-              <a:cs typeface="Segoe UI" panose="020B0502040204020203" pitchFamily="34" charset="0"/>
-            </a:endParaRPr>
-          </a:p>
-        </p:txBody>
-      </p:sp>
-      <p:sp>
-        <p:nvSpPr>
-          <p:cNvPr id="5" name="EndingHeader">
-            <a:extLst>
-              <a:ext uri="{FF2B5EF4-FFF2-40B4-BE49-F238E27FC236}">
-                <a16:creationId xmlns:a16="http://schemas.microsoft.com/office/drawing/2014/main" id="{C4E9B504-DA34-9DB4-F15D-EDEE1FE9B88D}"/>
-              </a:ext>
-            </a:extLst>
-          </p:cNvPr>
+            <a:endParaRPr lang="ja-JP"/>
+          </a:p>
+        </p:txBody>
+      </p:sp>
+      <p:sp>
+        <p:nvSpPr>
+          <p:cNvPr id="3" name="EndingHeader"/>
           <p:cNvSpPr/>
           <p:nvPr userDrawn="1"/>
         </p:nvSpPr>
         <p:spPr>
           <a:xfrm>
             <a:off x="0" y="0"/>
-            <a:ext cx="12192000" cy="1524000"/>
+            <a:ext cx="12192000" cy="1200000"/>
           </a:xfrm>
           <a:prstGeom prst="rect">
             <a:avLst/>
           </a:prstGeom>
           <a:solidFill>
-            <a:srgbClr val="2E3C72"/>
+            <a:srgbClr val="008C7F"/>
           </a:solidFill>
-          <a:ln w="12700" cap="flat" cmpd="sng" algn="ctr">
+          <a:ln>
             <a:noFill/>
-            <a:prstDash val="solid"/>
-            <a:miter lim="800000"/>
           </a:ln>
-          <a:effectLst/>
-          <a:extLst>
-            <a:ext uri="{91240B29-F687-4F45-9708-019B960494DF}">
-              <a14:hiddenLine xmlns:a14="http://schemas.microsoft.com/office/drawing/2010/main" w="12700" cap="flat" cmpd="sng" algn="ctr">
+        </p:spPr>
+        <p:txBody>
+          <a:bodyPr wrap="square" lIns="0" tIns="0" rIns="0" bIns="0" anchor="ctr"/>
+          <a:lstStyle/>
+          <a:p>
+            <a:pPr algn="l">
+              <a:defRPr/>
+            </a:pPr>
+            <a:r>
+              <a:rPr lang="en-US" sz="2000" b="1" kern="1200">
                 <a:solidFill>
                   <a:srgbClr val="FFFFFF"/>
                 </a:solidFill>
-                <a:prstDash val="solid"/>
-                <a:miter lim="800000"/>
-              </a14:hiddenLine>
-            </a:ext>
-          </a:extLst>
-        </p:spPr>
-        <p:style>
-          <a:lnRef idx="2">
-            <a:schemeClr val="accent1">
-              <a:shade val="15000"/>
-            </a:schemeClr>
-          </a:lnRef>
-          <a:fillRef idx="1">
-            <a:schemeClr val="accent1"/>
-          </a:fillRef>
-          <a:effectRef idx="0">
-            <a:schemeClr val="accent1"/>
-          </a:effectRef>
-          <a:fontRef idx="minor">
-            <a:schemeClr val="lt1"/>
-          </a:fontRef>
-        </p:style>
-        <p:txBody>
-          <a:bodyPr rtlCol="0" anchor="ctr"/>
-          <a:lstStyle/>
-          <a:p>
-            <a:pPr algn="ctr"/>
-            <a:endParaRPr kumimoji="1" lang="ja-JP" altLang="en-US">
-              <a:latin typeface="Segoe UI" panose="020B0502040204020203" pitchFamily="34" charset="0"/>
-              <a:ea typeface="BIZ UDPゴシック" panose="020B0400000000000000" pitchFamily="50" charset="-128"/>
-              <a:cs typeface="Segoe UI" panose="020B0502040204020203" pitchFamily="34" charset="0"/>
-            </a:endParaRPr>
-          </a:p>
-        </p:txBody>
-      </p:sp>
-      <p:sp>
-        <p:nvSpPr>
-          <p:cNvPr id="6" name="EndingAccent">
-            <a:extLst>
-              <a:ext uri="{FF2B5EF4-FFF2-40B4-BE49-F238E27FC236}">
-                <a16:creationId xmlns:a16="http://schemas.microsoft.com/office/drawing/2014/main" id="{F1D17F6F-6916-D9D6-6E3D-24B329DBAA73}"/>
-              </a:ext>
-            </a:extLst>
-          </p:cNvPr>
+                <a:latin typeface="Segoe UI Semibold"/>
+                <a:ea typeface="BIZ UDPゴシック"/>
+                <a:cs typeface="Segoe UI Semibold"/>
+              </a:rPr>
+              <a:t>    Microsoft Azure</a:t>
+            </a:r>
+            <a:endParaRPr lang="ja-JP" sz="2000"/>
+          </a:p>
+        </p:txBody>
+      </p:sp>
+      <p:sp>
+        <p:nvSpPr>
+          <p:cNvPr id="4" name="EndingAccentBand"/>
           <p:cNvSpPr/>
           <p:nvPr userDrawn="1"/>
         </p:nvSpPr>
         <p:spPr>
           <a:xfrm>
-            <a:off x="0" y="1524000"/>
-            <a:ext cx="12192000" cy="101600"/>
+            <a:off x="0" y="1200000"/>
+            <a:ext cx="12192000" cy="90000"/>
           </a:xfrm>
           <a:prstGeom prst="rect">
             <a:avLst/>
           </a:prstGeom>
           <a:solidFill>
-            <a:srgbClr val="F5A623"/>
+            <a:srgbClr val="00B050"/>
           </a:solidFill>
-          <a:ln w="12700" cap="flat" cmpd="sng" algn="ctr">
+          <a:ln>
             <a:noFill/>
-            <a:prstDash val="solid"/>
-            <a:miter lim="800000"/>
           </a:ln>
-          <a:effectLst/>
-          <a:extLst>
-            <a:ext uri="{91240B29-F687-4F45-9708-019B960494DF}">
-              <a14:hiddenLine xmlns:a14="http://schemas.microsoft.com/office/drawing/2010/main" w="12700" cap="flat" cmpd="sng" algn="ctr">
-                <a:solidFill>
-                  <a:srgbClr val="FFFFFF"/>
-                </a:solidFill>
-                <a:prstDash val="solid"/>
-                <a:miter lim="800000"/>
-              </a14:hiddenLine>
-            </a:ext>
-          </a:extLst>
         </p:spPr>
-        <p:style>
-          <a:lnRef idx="2">
-            <a:schemeClr val="accent1">
-              <a:shade val="15000"/>
-            </a:schemeClr>
-          </a:lnRef>
-          <a:fillRef idx="1">
-            <a:schemeClr val="accent1"/>
-          </a:fillRef>
-          <a:effectRef idx="0">
-            <a:schemeClr val="accent1"/>
-          </a:effectRef>
-          <a:fontRef idx="minor">
-            <a:schemeClr val="lt1"/>
-          </a:fontRef>
-        </p:style>
-        <p:txBody>
-          <a:bodyPr rtlCol="0" anchor="ctr"/>
+        <p:txBody>
+          <a:bodyPr/>
           <a:lstStyle/>
           <a:p>
-            <a:pPr algn="ctr"/>
-            <a:endParaRPr kumimoji="1" lang="ja-JP" altLang="en-US">
-              <a:latin typeface="Segoe UI" panose="020B0502040204020203" pitchFamily="34" charset="0"/>
-              <a:ea typeface="BIZ UDPゴシック" panose="020B0400000000000000" pitchFamily="50" charset="-128"/>
-              <a:cs typeface="Segoe UI" panose="020B0502040204020203" pitchFamily="34" charset="0"/>
-            </a:endParaRPr>
-          </a:p>
-        </p:txBody>
-      </p:sp>
-      <p:sp>
-        <p:nvSpPr>
-          <p:cNvPr id="7" name="EndingAzureLabel">
-            <a:extLst>
-              <a:ext uri="{FF2B5EF4-FFF2-40B4-BE49-F238E27FC236}">
-                <a16:creationId xmlns:a16="http://schemas.microsoft.com/office/drawing/2014/main" id="{8E27C80E-DE69-9398-2AC5-0E23DCDF3B30}"/>
-              </a:ext>
-            </a:extLst>
-          </p:cNvPr>
+            <a:endParaRPr lang="ja-JP"/>
+          </a:p>
+        </p:txBody>
+      </p:sp>
+      <p:sp>
+        <p:nvSpPr>
+          <p:cNvPr id="5" name="EndingClosingHeadline"/>
           <p:cNvSpPr txBox="1"/>
           <p:nvPr userDrawn="1"/>
         </p:nvSpPr>
         <p:spPr>
           <a:xfrm>
-            <a:off x="1371600" y="609600"/>
-            <a:ext cx="3048000" cy="261610"/>
+            <a:off x="0" y="2200000"/>
+            <a:ext cx="12192000" cy="1400000"/>
           </a:xfrm>
           <a:prstGeom prst="rect">
             <a:avLst/>
           </a:prstGeom>
           <a:noFill/>
+          <a:ln>
+            <a:noFill/>
+          </a:ln>
         </p:spPr>
         <p:txBody>
-          <a:bodyPr vert="horz" lIns="0" tIns="0" rIns="0" bIns="0" rtlCol="0">
-            <a:spAutoFit/>
-          </a:bodyPr>
+          <a:bodyPr wrap="square" lIns="0" tIns="0" rIns="0" bIns="0" anchor="ctr" anchorCtr="0"/>
           <a:lstStyle/>
           <a:p>
-            <a:pPr algn="l"/>
-            <a:r>
-              <a:rPr kumimoji="1" lang="en-US" altLang="ja-JP" sz="1700" b="0">
-                <a:solidFill>
-                  <a:srgbClr val="FFFFFF"/>
-                </a:solidFill>
-                <a:latin typeface="Segoe UI" panose="020B0502040204020203" pitchFamily="34" charset="0"/>
-                <a:ea typeface="BIZ UDPゴシック" panose="020B0400000000000000" pitchFamily="50" charset="-128"/>
-                <a:cs typeface="Segoe UI" panose="020B0502040204020203" pitchFamily="34" charset="0"/>
-              </a:rPr>
-              <a:t>Microsoft Azure</a:t>
-            </a:r>
-            <a:endParaRPr kumimoji="1" lang="ja-JP" altLang="en-US" sz="1700" b="0">
-              <a:solidFill>
-                <a:srgbClr val="FFFFFF"/>
-              </a:solidFill>
-              <a:latin typeface="Segoe UI" panose="020B0502040204020203" pitchFamily="34" charset="0"/>
-              <a:ea typeface="BIZ UDPゴシック" panose="020B0400000000000000" pitchFamily="50" charset="-128"/>
-              <a:cs typeface="Segoe UI" panose="020B0502040204020203" pitchFamily="34" charset="0"/>
-            </a:endParaRPr>
-          </a:p>
-        </p:txBody>
-      </p:sp>
-      <p:sp>
-        <p:nvSpPr>
-          <p:cNvPr id="8" name="EndingTitlePlaceholder">
-            <a:extLst>
-              <a:ext uri="{FF2B5EF4-FFF2-40B4-BE49-F238E27FC236}">
-                <a16:creationId xmlns:a16="http://schemas.microsoft.com/office/drawing/2014/main" id="{1D5A89B0-EFE2-E7DB-9585-A74EE84515C0}"/>
-              </a:ext>
-            </a:extLst>
-          </p:cNvPr>
-          <p:cNvSpPr txBox="1"/>
+            <a:pPr algn="ctr"/>
+            <a:r>
+              <a:rPr lang="en-US" sz="5400" b="1" kern="1200" spc="200">
+                <a:solidFill>
+                  <a:srgbClr val="008C7F"/>
+                </a:solidFill>
+                <a:latin typeface="Segoe UI Semibold"/>
+                <a:ea typeface="BIZ UDPゴシック"/>
+                <a:cs typeface="Segoe UI Semibold"/>
+              </a:rPr>
+              <a:t>AZURE UPDATE </a:t>
+            </a:r>
+            <a:r>
+              <a:rPr lang="ja-JP" altLang="en-US" sz="5400" b="1" kern="1200" spc="200">
+                <a:solidFill>
+                  <a:srgbClr val="008C7F"/>
+                </a:solidFill>
+                <a:latin typeface="Segoe UI Semibold"/>
+                <a:ea typeface="BIZ UDPゴシック"/>
+                <a:cs typeface="Segoe UI Semibold"/>
+              </a:rPr>
+              <a:t>情報 </a:t>
+            </a:r>
+            <a:r>
+              <a:rPr lang="en-US" sz="5400" b="1" kern="1200" spc="200">
+                <a:solidFill>
+                  <a:srgbClr val="00B050"/>
+                </a:solidFill>
+                <a:latin typeface="Segoe UI Semibold"/>
+                <a:ea typeface="BIZ UDPゴシック"/>
+                <a:cs typeface="Segoe UI Semibold"/>
+              </a:rPr>
+              <a:t>END</a:t>
+            </a:r>
+            <a:endParaRPr lang="ja-JP" sz="5400" b="1"/>
+          </a:p>
+        </p:txBody>
+      </p:sp>
+      <p:sp>
+        <p:nvSpPr>
+          <p:cNvPr id="6" name="EndingInfoPanel"/>
+          <p:cNvSpPr/>
           <p:nvPr userDrawn="1"/>
         </p:nvSpPr>
         <p:spPr>
           <a:xfrm>
-            <a:off x="1016000" y="2349500"/>
-            <a:ext cx="5334000" cy="523220"/>
+            <a:off x="900000" y="4800000"/>
+            <a:ext cx="10392000" cy="900000"/>
           </a:xfrm>
           <a:prstGeom prst="rect">
             <a:avLst/>
           </a:prstGeom>
-          <a:noFill/>
+          <a:solidFill>
+            <a:srgbClr val="287A4F"/>
+          </a:solidFill>
+          <a:ln>
+            <a:noFill/>
+          </a:ln>
         </p:spPr>
         <p:txBody>
-          <a:bodyPr vert="horz" lIns="0" tIns="0" rIns="0" bIns="0" rtlCol="0">
-            <a:spAutoFit/>
-          </a:bodyPr>
+          <a:bodyPr/>
           <a:lstStyle/>
           <a:p>
-            <a:pPr algn="l"/>
-            <a:r>
-              <a:rPr kumimoji="1" lang="en-US" altLang="ja-JP" sz="3400" b="0">
-                <a:solidFill>
-                  <a:srgbClr val="2F2F2F"/>
-                </a:solidFill>
-                <a:latin typeface="Segoe UI" panose="020B0502040204020203" pitchFamily="34" charset="0"/>
-                <a:ea typeface="BIZ UDPゴシック" panose="020B0400000000000000" pitchFamily="50" charset="-128"/>
-                <a:cs typeface="Segoe UI" panose="020B0502040204020203" pitchFamily="34" charset="0"/>
-              </a:rPr>
-              <a:t>Next steps</a:t>
-            </a:r>
-            <a:endParaRPr kumimoji="1" lang="ja-JP" altLang="en-US" sz="3400" b="0">
-              <a:solidFill>
-                <a:srgbClr val="2F2F2F"/>
-              </a:solidFill>
-              <a:latin typeface="Segoe UI" panose="020B0502040204020203" pitchFamily="34" charset="0"/>
-              <a:ea typeface="BIZ UDPゴシック" panose="020B0400000000000000" pitchFamily="50" charset="-128"/>
-              <a:cs typeface="Segoe UI" panose="020B0502040204020203" pitchFamily="34" charset="0"/>
-            </a:endParaRPr>
-          </a:p>
-        </p:txBody>
-      </p:sp>
-      <p:sp>
-        <p:nvSpPr>
-          <p:cNvPr id="9" name="EndingSubtitlePlaceholder">
-            <a:extLst>
-              <a:ext uri="{FF2B5EF4-FFF2-40B4-BE49-F238E27FC236}">
-                <a16:creationId xmlns:a16="http://schemas.microsoft.com/office/drawing/2014/main" id="{20AB9571-AB41-A121-7226-8E05C7D66C5D}"/>
-              </a:ext>
-            </a:extLst>
-          </p:cNvPr>
+            <a:endParaRPr lang="ja-JP"/>
+          </a:p>
+        </p:txBody>
+      </p:sp>
+      <p:sp>
+        <p:nvSpPr>
+          <p:cNvPr id="7" name="EndingKeyMessagePlaceholder"/>
           <p:cNvSpPr>
             <a:spLocks noGrp="1"/>
           </p:cNvSpPr>
           <p:nvPr>
-            <p:ph type="body" sz="quarter" idx="11" hasCustomPrompt="1"/>
+            <p:ph type="body" sz="quarter" idx="10"/>
           </p:nvPr>
         </p:nvSpPr>
         <p:spPr>
           <a:xfrm>
-            <a:off x="1016000" y="3276600"/>
-            <a:ext cx="5334000" cy="609600"/>
+            <a:off x="1080000" y="4800000"/>
+            <a:ext cx="10032000" cy="900000"/>
           </a:xfrm>
           <a:prstGeom prst="rect">
             <a:avLst/>
           </a:prstGeom>
         </p:spPr>
         <p:txBody>
-          <a:bodyPr lIns="0" tIns="0" rIns="0" bIns="0"/>
+          <a:bodyPr wrap="square" lIns="180000" tIns="90000" rIns="180000" bIns="90000" anchor="ctr" anchorCtr="0"/>
           <a:lstStyle>
-            <a:lvl1pPr algn="l">
-              <a:defRPr sz="1800" b="0">
-                <a:solidFill>
-                  <a:srgbClr val="666666"/>
-                </a:solidFill>
-                <a:latin typeface="Segoe UI" panose="020B0502040204020203" pitchFamily="34" charset="0"/>
-                <a:ea typeface="BIZ UDPゴシック" panose="020B0400000000000000" pitchFamily="50" charset="-128"/>
-                <a:cs typeface="Segoe UI" panose="020B0502040204020203" pitchFamily="34" charset="0"/>
+            <a:lvl1pPr marL="0" indent="0">
+              <a:buNone/>
+              <a:defRPr sz="2000" b="1">
+                <a:solidFill>
+                  <a:srgbClr val="FFFFFF"/>
+                </a:solidFill>
+                <a:latin typeface="Segoe UI Semibold"/>
+                <a:ea typeface="BIZ UDPゴシック"/>
               </a:defRPr>
             </a:lvl1pPr>
           </a:lstStyle>
           <a:p>
-            <a:pPr lvl="0"/>
-            <a:r>
-              <a:rPr kumimoji="1" lang="en-US" altLang="ja-JP"/>
-              <a:t>{{CONTACT / NEXT STEP}}</a:t>
-            </a:r>
-            <a:endParaRPr kumimoji="1" lang="ja-JP" altLang="en-US"/>
-          </a:p>
-        </p:txBody>
-      </p:sp>
-      <p:sp>
-        <p:nvSpPr>
-          <p:cNvPr id="10" name="EndingStep1">
-            <a:extLst>
-              <a:ext uri="{FF2B5EF4-FFF2-40B4-BE49-F238E27FC236}">
-                <a16:creationId xmlns:a16="http://schemas.microsoft.com/office/drawing/2014/main" id="{3938F0CE-FBE7-DCB5-4B56-4ED0769268D8}"/>
-              </a:ext>
-            </a:extLst>
-          </p:cNvPr>
-          <p:cNvSpPr/>
-          <p:nvPr userDrawn="1"/>
-        </p:nvSpPr>
-        <p:spPr>
-          <a:xfrm>
-            <a:off x="7239000" y="2095500"/>
-            <a:ext cx="533400" cy="533400"/>
-          </a:xfrm>
-          <a:prstGeom prst="ellipse">
-            <a:avLst/>
-          </a:prstGeom>
-          <a:solidFill>
-            <a:srgbClr val="F5A623"/>
-          </a:solidFill>
-          <a:ln>
-            <a:solidFill>
-              <a:srgbClr val="FFFFFF"/>
-            </a:solidFill>
-          </a:ln>
-        </p:spPr>
-        <p:style>
-          <a:lnRef idx="2">
-            <a:schemeClr val="accent1">
-              <a:shade val="15000"/>
-            </a:schemeClr>
-          </a:lnRef>
-          <a:fillRef idx="1">
-            <a:schemeClr val="accent1"/>
-          </a:fillRef>
-          <a:effectRef idx="0">
-            <a:schemeClr val="accent1"/>
-          </a:effectRef>
-          <a:fontRef idx="minor">
-            <a:schemeClr val="lt1"/>
-          </a:fontRef>
-        </p:style>
-        <p:txBody>
-          <a:bodyPr rtlCol="0" anchor="ctr"/>
-          <a:lstStyle/>
-          <a:p>
-            <a:pPr algn="ctr"/>
-            <a:endParaRPr kumimoji="1" lang="ja-JP" altLang="en-US">
-              <a:latin typeface="Segoe UI" panose="020B0502040204020203" pitchFamily="34" charset="0"/>
-              <a:ea typeface="BIZ UDPゴシック" panose="020B0400000000000000" pitchFamily="50" charset="-128"/>
-              <a:cs typeface="Segoe UI" panose="020B0502040204020203" pitchFamily="34" charset="0"/>
-            </a:endParaRPr>
-          </a:p>
-        </p:txBody>
-      </p:sp>
-      <p:sp>
-        <p:nvSpPr>
-          <p:cNvPr id="11" name="EndingStepText1">
-            <a:extLst>
-              <a:ext uri="{FF2B5EF4-FFF2-40B4-BE49-F238E27FC236}">
-                <a16:creationId xmlns:a16="http://schemas.microsoft.com/office/drawing/2014/main" id="{C8EFB395-0058-E149-A502-7AA457278613}"/>
-              </a:ext>
-            </a:extLst>
-          </p:cNvPr>
-          <p:cNvSpPr txBox="1"/>
-          <p:nvPr userDrawn="1"/>
-        </p:nvSpPr>
-        <p:spPr>
-          <a:xfrm>
-            <a:off x="7391400" y="2197100"/>
-            <a:ext cx="254000" cy="276999"/>
-          </a:xfrm>
-          <a:prstGeom prst="rect">
-            <a:avLst/>
-          </a:prstGeom>
-          <a:noFill/>
-        </p:spPr>
-        <p:txBody>
-          <a:bodyPr vert="horz" lIns="0" tIns="0" rIns="0" bIns="0" rtlCol="0">
-            <a:spAutoFit/>
-          </a:bodyPr>
-          <a:lstStyle/>
-          <a:p>
-            <a:pPr algn="ctr"/>
-            <a:r>
-              <a:rPr kumimoji="1" lang="en-US" altLang="ja-JP" sz="1800" b="1">
-                <a:solidFill>
-                  <a:srgbClr val="FFFFFF"/>
-                </a:solidFill>
-                <a:latin typeface="Segoe UI" panose="020B0502040204020203" pitchFamily="34" charset="0"/>
-                <a:ea typeface="BIZ UDPゴシック" panose="020B0400000000000000" pitchFamily="50" charset="-128"/>
-                <a:cs typeface="Segoe UI" panose="020B0502040204020203" pitchFamily="34" charset="0"/>
-              </a:rPr>
-              <a:t>1</a:t>
-            </a:r>
-            <a:endParaRPr kumimoji="1" lang="ja-JP" altLang="en-US" sz="1800" b="1">
-              <a:solidFill>
-                <a:srgbClr val="FFFFFF"/>
-              </a:solidFill>
-              <a:latin typeface="Segoe UI" panose="020B0502040204020203" pitchFamily="34" charset="0"/>
-              <a:ea typeface="BIZ UDPゴシック" panose="020B0400000000000000" pitchFamily="50" charset="-128"/>
-              <a:cs typeface="Segoe UI" panose="020B0502040204020203" pitchFamily="34" charset="0"/>
-            </a:endParaRPr>
-          </a:p>
-        </p:txBody>
-      </p:sp>
-      <p:sp>
-        <p:nvSpPr>
-          <p:cNvPr id="12" name="EndingStepLabel1">
-            <a:extLst>
-              <a:ext uri="{FF2B5EF4-FFF2-40B4-BE49-F238E27FC236}">
-                <a16:creationId xmlns:a16="http://schemas.microsoft.com/office/drawing/2014/main" id="{317ABF93-D783-7107-519B-7ED6EE04BF35}"/>
-              </a:ext>
-            </a:extLst>
-          </p:cNvPr>
+            <a:pPr marL="0" indent="0" algn="l">
+              <a:buNone/>
+            </a:pPr>
+            <a:endParaRPr lang="ja-JP"/>
+          </a:p>
+        </p:txBody>
+      </p:sp>
+      <p:sp>
+        <p:nvSpPr>
+          <p:cNvPr id="8" name="EndingReferencePlaceholder"/>
           <p:cNvSpPr>
             <a:spLocks noGrp="1"/>
           </p:cNvSpPr>
           <p:nvPr>
-            <p:ph type="body" sz="quarter" idx="12" hasCustomPrompt="1"/>
+            <p:ph type="body" sz="quarter" idx="11"/>
           </p:nvPr>
         </p:nvSpPr>
         <p:spPr>
           <a:xfrm>
-            <a:off x="7975600" y="2146300"/>
-            <a:ext cx="3302000" cy="508000"/>
+            <a:off x="900000" y="3800000"/>
+            <a:ext cx="10392000" cy="900000"/>
           </a:xfrm>
           <a:prstGeom prst="rect">
             <a:avLst/>
           </a:prstGeom>
         </p:spPr>
         <p:txBody>
-          <a:bodyPr lIns="0" tIns="0" rIns="0" bIns="0"/>
+          <a:bodyPr wrap="square" anchor="ctr" anchorCtr="0"/>
           <a:lstStyle>
-            <a:lvl1pPr algn="l">
-              <a:defRPr sz="1600" b="0">
-                <a:solidFill>
-                  <a:srgbClr val="333333"/>
-                </a:solidFill>
-                <a:latin typeface="Segoe UI" panose="020B0502040204020203" pitchFamily="34" charset="0"/>
-                <a:ea typeface="BIZ UDPゴシック" panose="020B0400000000000000" pitchFamily="50" charset="-128"/>
-                <a:cs typeface="Segoe UI" panose="020B0502040204020203" pitchFamily="34" charset="0"/>
+            <a:lvl1pPr marL="0" indent="0">
+              <a:buNone/>
+              <a:defRPr sz="1400">
+                <a:solidFill>
+                  <a:srgbClr val="6E6E6E"/>
+                </a:solidFill>
+                <a:latin typeface="Segoe UI"/>
+                <a:ea typeface="BIZ UDPゴシック"/>
               </a:defRPr>
             </a:lvl1pPr>
           </a:lstStyle>
           <a:p>
-            <a:pPr lvl="0"/>
-            <a:r>
-              <a:rPr kumimoji="1" lang="en-US" altLang="ja-JP"/>
-              <a:t>{{STEP 1}}</a:t>
-            </a:r>
-            <a:endParaRPr kumimoji="1" lang="ja-JP" altLang="en-US"/>
-          </a:p>
-        </p:txBody>
-      </p:sp>
-      <p:sp>
-        <p:nvSpPr>
-          <p:cNvPr id="13" name="EndingStep2">
-            <a:extLst>
-              <a:ext uri="{FF2B5EF4-FFF2-40B4-BE49-F238E27FC236}">
-                <a16:creationId xmlns:a16="http://schemas.microsoft.com/office/drawing/2014/main" id="{4A57AEC8-7251-BDB2-2F8B-5FA5BDC2BB29}"/>
-              </a:ext>
-            </a:extLst>
-          </p:cNvPr>
-          <p:cNvSpPr/>
-          <p:nvPr userDrawn="1"/>
-        </p:nvSpPr>
-        <p:spPr>
-          <a:xfrm>
-            <a:off x="7239000" y="3136900"/>
-            <a:ext cx="533400" cy="533400"/>
-          </a:xfrm>
-          <a:prstGeom prst="ellipse">
-            <a:avLst/>
-          </a:prstGeom>
-          <a:solidFill>
-            <a:srgbClr val="F5A623"/>
-          </a:solidFill>
-          <a:ln>
-            <a:solidFill>
-              <a:srgbClr val="FFFFFF"/>
-            </a:solidFill>
-          </a:ln>
-        </p:spPr>
-        <p:style>
-          <a:lnRef idx="2">
-            <a:schemeClr val="accent1">
-              <a:shade val="15000"/>
-            </a:schemeClr>
-          </a:lnRef>
-          <a:fillRef idx="1">
-            <a:schemeClr val="accent1"/>
-          </a:fillRef>
-          <a:effectRef idx="0">
-            <a:schemeClr val="accent1"/>
-          </a:effectRef>
-          <a:fontRef idx="minor">
-            <a:schemeClr val="lt1"/>
-          </a:fontRef>
-        </p:style>
-        <p:txBody>
-          <a:bodyPr rtlCol="0" anchor="ctr"/>
-          <a:lstStyle/>
-          <a:p>
-            <a:pPr algn="ctr"/>
-            <a:endParaRPr kumimoji="1" lang="ja-JP" altLang="en-US">
-              <a:latin typeface="Segoe UI" panose="020B0502040204020203" pitchFamily="34" charset="0"/>
-              <a:ea typeface="BIZ UDPゴシック" panose="020B0400000000000000" pitchFamily="50" charset="-128"/>
-              <a:cs typeface="Segoe UI" panose="020B0502040204020203" pitchFamily="34" charset="0"/>
-            </a:endParaRPr>
-          </a:p>
-        </p:txBody>
-      </p:sp>
-      <p:sp>
-        <p:nvSpPr>
-          <p:cNvPr id="14" name="EndingStepText2">
-            <a:extLst>
-              <a:ext uri="{FF2B5EF4-FFF2-40B4-BE49-F238E27FC236}">
-                <a16:creationId xmlns:a16="http://schemas.microsoft.com/office/drawing/2014/main" id="{4B698B36-3D72-FE5F-ADC3-163D62BF55B6}"/>
-              </a:ext>
-            </a:extLst>
-          </p:cNvPr>
-          <p:cNvSpPr txBox="1"/>
-          <p:nvPr userDrawn="1"/>
-        </p:nvSpPr>
-        <p:spPr>
-          <a:xfrm>
-            <a:off x="7391400" y="3238500"/>
-            <a:ext cx="254000" cy="276999"/>
-          </a:xfrm>
-          <a:prstGeom prst="rect">
-            <a:avLst/>
-          </a:prstGeom>
-          <a:noFill/>
-        </p:spPr>
-        <p:txBody>
-          <a:bodyPr vert="horz" lIns="0" tIns="0" rIns="0" bIns="0" rtlCol="0">
-            <a:spAutoFit/>
-          </a:bodyPr>
-          <a:lstStyle/>
-          <a:p>
-            <a:pPr algn="ctr"/>
-            <a:r>
-              <a:rPr kumimoji="1" lang="en-US" altLang="ja-JP" sz="1800" b="1">
-                <a:solidFill>
-                  <a:srgbClr val="FFFFFF"/>
-                </a:solidFill>
-                <a:latin typeface="Segoe UI" panose="020B0502040204020203" pitchFamily="34" charset="0"/>
-                <a:ea typeface="BIZ UDPゴシック" panose="020B0400000000000000" pitchFamily="50" charset="-128"/>
-                <a:cs typeface="Segoe UI" panose="020B0502040204020203" pitchFamily="34" charset="0"/>
-              </a:rPr>
-              <a:t>2</a:t>
-            </a:r>
-            <a:endParaRPr kumimoji="1" lang="ja-JP" altLang="en-US" sz="1800" b="1">
-              <a:solidFill>
-                <a:srgbClr val="FFFFFF"/>
-              </a:solidFill>
-              <a:latin typeface="Segoe UI" panose="020B0502040204020203" pitchFamily="34" charset="0"/>
-              <a:ea typeface="BIZ UDPゴシック" panose="020B0400000000000000" pitchFamily="50" charset="-128"/>
-              <a:cs typeface="Segoe UI" panose="020B0502040204020203" pitchFamily="34" charset="0"/>
-            </a:endParaRPr>
-          </a:p>
-        </p:txBody>
-      </p:sp>
-      <p:sp>
-        <p:nvSpPr>
-          <p:cNvPr id="15" name="EndingStepLabel2">
-            <a:extLst>
-              <a:ext uri="{FF2B5EF4-FFF2-40B4-BE49-F238E27FC236}">
-                <a16:creationId xmlns:a16="http://schemas.microsoft.com/office/drawing/2014/main" id="{680C8AC0-5767-B26A-0BD5-09CE5C501C52}"/>
-              </a:ext>
-            </a:extLst>
-          </p:cNvPr>
-          <p:cNvSpPr>
-            <a:spLocks noGrp="1"/>
-          </p:cNvSpPr>
-          <p:nvPr>
-            <p:ph type="body" sz="quarter" idx="13" hasCustomPrompt="1"/>
-          </p:nvPr>
-        </p:nvSpPr>
-        <p:spPr>
-          <a:xfrm>
-            <a:off x="7975600" y="3187700"/>
-            <a:ext cx="3302000" cy="508000"/>
-          </a:xfrm>
-          <a:prstGeom prst="rect">
-            <a:avLst/>
-          </a:prstGeom>
-        </p:spPr>
-        <p:txBody>
-          <a:bodyPr lIns="0" tIns="0" rIns="0" bIns="0"/>
-          <a:lstStyle>
-            <a:lvl1pPr algn="l">
-              <a:defRPr sz="1600" b="0">
-                <a:solidFill>
-                  <a:srgbClr val="333333"/>
-                </a:solidFill>
-                <a:latin typeface="Segoe UI" panose="020B0502040204020203" pitchFamily="34" charset="0"/>
-                <a:ea typeface="BIZ UDPゴシック" panose="020B0400000000000000" pitchFamily="50" charset="-128"/>
-                <a:cs typeface="Segoe UI" panose="020B0502040204020203" pitchFamily="34" charset="0"/>
-              </a:defRPr>
-            </a:lvl1pPr>
-          </a:lstStyle>
-          <a:p>
-            <a:pPr lvl="0"/>
-            <a:r>
-              <a:rPr kumimoji="1" lang="en-US" altLang="ja-JP"/>
-              <a:t>{{STEP 2}}</a:t>
-            </a:r>
-            <a:endParaRPr kumimoji="1" lang="ja-JP" altLang="en-US"/>
-          </a:p>
-        </p:txBody>
-      </p:sp>
-      <p:sp>
-        <p:nvSpPr>
-          <p:cNvPr id="16" name="EndingStep3">
-            <a:extLst>
-              <a:ext uri="{FF2B5EF4-FFF2-40B4-BE49-F238E27FC236}">
-                <a16:creationId xmlns:a16="http://schemas.microsoft.com/office/drawing/2014/main" id="{AD54B102-BFCB-82DA-CEED-FBDE01973945}"/>
-              </a:ext>
-            </a:extLst>
-          </p:cNvPr>
-          <p:cNvSpPr/>
-          <p:nvPr userDrawn="1"/>
-        </p:nvSpPr>
-        <p:spPr>
-          <a:xfrm>
-            <a:off x="7239000" y="4178300"/>
-            <a:ext cx="533400" cy="533400"/>
-          </a:xfrm>
-          <a:prstGeom prst="ellipse">
-            <a:avLst/>
-          </a:prstGeom>
-          <a:solidFill>
-            <a:srgbClr val="F5A623"/>
-          </a:solidFill>
-          <a:ln>
-            <a:solidFill>
-              <a:srgbClr val="FFFFFF"/>
-            </a:solidFill>
-          </a:ln>
-        </p:spPr>
-        <p:style>
-          <a:lnRef idx="2">
-            <a:schemeClr val="accent1">
-              <a:shade val="15000"/>
-            </a:schemeClr>
-          </a:lnRef>
-          <a:fillRef idx="1">
-            <a:schemeClr val="accent1"/>
-          </a:fillRef>
-          <a:effectRef idx="0">
-            <a:schemeClr val="accent1"/>
-          </a:effectRef>
-          <a:fontRef idx="minor">
-            <a:schemeClr val="lt1"/>
-          </a:fontRef>
-        </p:style>
-        <p:txBody>
-          <a:bodyPr rtlCol="0" anchor="ctr"/>
-          <a:lstStyle/>
-          <a:p>
-            <a:pPr algn="ctr"/>
-            <a:endParaRPr kumimoji="1" lang="ja-JP" altLang="en-US">
-              <a:latin typeface="Segoe UI" panose="020B0502040204020203" pitchFamily="34" charset="0"/>
-              <a:ea typeface="BIZ UDPゴシック" panose="020B0400000000000000" pitchFamily="50" charset="-128"/>
-              <a:cs typeface="Segoe UI" panose="020B0502040204020203" pitchFamily="34" charset="0"/>
-            </a:endParaRPr>
-          </a:p>
-        </p:txBody>
-      </p:sp>
-      <p:sp>
-        <p:nvSpPr>
-          <p:cNvPr id="17" name="EndingStepText3">
-            <a:extLst>
-              <a:ext uri="{FF2B5EF4-FFF2-40B4-BE49-F238E27FC236}">
-                <a16:creationId xmlns:a16="http://schemas.microsoft.com/office/drawing/2014/main" id="{1D5C899C-6FD0-CE1F-79F8-7E8745939D31}"/>
-              </a:ext>
-            </a:extLst>
-          </p:cNvPr>
-          <p:cNvSpPr txBox="1"/>
-          <p:nvPr userDrawn="1"/>
-        </p:nvSpPr>
-        <p:spPr>
-          <a:xfrm>
-            <a:off x="7391400" y="4279900"/>
-            <a:ext cx="254000" cy="276999"/>
-          </a:xfrm>
-          <a:prstGeom prst="rect">
-            <a:avLst/>
-          </a:prstGeom>
-          <a:noFill/>
-        </p:spPr>
-        <p:txBody>
-          <a:bodyPr vert="horz" lIns="0" tIns="0" rIns="0" bIns="0" rtlCol="0">
-            <a:spAutoFit/>
-          </a:bodyPr>
-          <a:lstStyle/>
-          <a:p>
-            <a:pPr algn="ctr"/>
-            <a:r>
-              <a:rPr kumimoji="1" lang="en-US" altLang="ja-JP" sz="1800" b="1">
-                <a:solidFill>
-                  <a:srgbClr val="FFFFFF"/>
-                </a:solidFill>
-                <a:latin typeface="Segoe UI" panose="020B0502040204020203" pitchFamily="34" charset="0"/>
-                <a:ea typeface="BIZ UDPゴシック" panose="020B0400000000000000" pitchFamily="50" charset="-128"/>
-                <a:cs typeface="Segoe UI" panose="020B0502040204020203" pitchFamily="34" charset="0"/>
-              </a:rPr>
-              <a:t>3</a:t>
-            </a:r>
-            <a:endParaRPr kumimoji="1" lang="ja-JP" altLang="en-US" sz="1800" b="1">
-              <a:solidFill>
-                <a:srgbClr val="FFFFFF"/>
-              </a:solidFill>
-              <a:latin typeface="Segoe UI" panose="020B0502040204020203" pitchFamily="34" charset="0"/>
-              <a:ea typeface="BIZ UDPゴシック" panose="020B0400000000000000" pitchFamily="50" charset="-128"/>
-              <a:cs typeface="Segoe UI" panose="020B0502040204020203" pitchFamily="34" charset="0"/>
-            </a:endParaRPr>
-          </a:p>
-        </p:txBody>
-      </p:sp>
-      <p:sp>
-        <p:nvSpPr>
-          <p:cNvPr id="18" name="EndingStepLabel3">
-            <a:extLst>
-              <a:ext uri="{FF2B5EF4-FFF2-40B4-BE49-F238E27FC236}">
-                <a16:creationId xmlns:a16="http://schemas.microsoft.com/office/drawing/2014/main" id="{977460B9-E2ED-99B7-3929-379E248D84DD}"/>
-              </a:ext>
-            </a:extLst>
-          </p:cNvPr>
-          <p:cNvSpPr>
-            <a:spLocks noGrp="1"/>
-          </p:cNvSpPr>
-          <p:nvPr>
-            <p:ph type="body" sz="quarter" idx="14" hasCustomPrompt="1"/>
-          </p:nvPr>
-        </p:nvSpPr>
-        <p:spPr>
-          <a:xfrm>
-            <a:off x="7975600" y="4229100"/>
-            <a:ext cx="3302000" cy="508000"/>
-          </a:xfrm>
-          <a:prstGeom prst="rect">
-            <a:avLst/>
-          </a:prstGeom>
-        </p:spPr>
-        <p:txBody>
-          <a:bodyPr lIns="0" tIns="0" rIns="0" bIns="0"/>
-          <a:lstStyle>
-            <a:lvl1pPr algn="l">
-              <a:defRPr sz="1600" b="0">
-                <a:solidFill>
-                  <a:srgbClr val="333333"/>
-                </a:solidFill>
-                <a:latin typeface="Segoe UI" panose="020B0502040204020203" pitchFamily="34" charset="0"/>
-                <a:ea typeface="BIZ UDPゴシック" panose="020B0400000000000000" pitchFamily="50" charset="-128"/>
-                <a:cs typeface="Segoe UI" panose="020B0502040204020203" pitchFamily="34" charset="0"/>
-              </a:defRPr>
-            </a:lvl1pPr>
-          </a:lstStyle>
-          <a:p>
-            <a:pPr lvl="0"/>
-            <a:r>
-              <a:rPr kumimoji="1" lang="en-US" altLang="ja-JP"/>
-              <a:t>{{STEP 3}}</a:t>
-            </a:r>
-            <a:endParaRPr kumimoji="1" lang="ja-JP" altLang="en-US"/>
+            <a:pPr marL="0" indent="0" algn="ctr">
+              <a:buNone/>
+            </a:pPr>
+            <a:endParaRPr lang="ja-JP"/>
           </a:p>
         </p:txBody>
       </p:sp>
     </p:spTree>
-    <p:extLst>
-      <p:ext uri="{BB962C8B-B14F-4D97-AF65-F5344CB8AC3E}">
-        <p14:creationId xmlns:p14="http://schemas.microsoft.com/office/powerpoint/2010/main" val="4283499241"/>
-      </p:ext>
-    </p:extLst>
   </p:cSld>
   <p:clrMapOvr>
     <a:masterClrMapping/>
   </p:clrMapOvr>
+  <p:hf sldNum="0" hdr="0" ftr="0" dt="0"/>
 </p:sldLayout>
 </file>
 
@@ -9048,8 +7151,12 @@
     <p:sldLayoutId id="2147483718" r:id="rId3"/>
     <p:sldLayoutId id="2147483717" r:id="rId4"/>
     <p:sldLayoutId id="2147483710" r:id="rId5"/>
-    <p:sldLayoutId id="2147483719" r:id="rId6"/>
-    <p:sldLayoutId id="2147483713" r:id="rId7"/>
+    <p:sldLayoutId id="2147483722" r:id="rId6"/>
+    <p:sldLayoutId id="2147483719" r:id="rId7"/>
+    <p:sldLayoutId id="2147483720" r:id="rId8"/>
+    <p:sldLayoutId id="2147483721" r:id="rId9"/>
+    <p:sldLayoutId id="2147483723" r:id="rId10"/>
+    <p:sldLayoutId id="2147483724" r:id="rId11"/>
   </p:sldLayoutIdLst>
   <p:hf sldNum="0" hdr="0" ftr="0" dt="0"/>
   <p:txStyles>
@@ -11291,7 +9398,7 @@
 
 <file path=ppt/slides/slide7.xml><?xml version="1.0" encoding="utf-8"?>
 <p:sld xmlns:a="http://schemas.openxmlformats.org/drawingml/2006/main" xmlns:r="http://schemas.openxmlformats.org/officeDocument/2006/relationships" xmlns:p="http://schemas.openxmlformats.org/presentationml/2006/main">
-  <p:cSld>
+  <p:cSld name="Ending - Indigo Amber">
     <p:spTree>
       <p:nvGrpSpPr>
         <p:cNvPr id="1" name=""/>
@@ -11308,10 +9415,10 @@
       </p:grpSpPr>
       <p:sp>
         <p:nvSpPr>
-          <p:cNvPr id="2" name="タイトル 1">
+          <p:cNvPr id="2" name="テキスト プレースホルダー 1">
             <a:extLst>
               <a:ext uri="{FF2B5EF4-FFF2-40B4-BE49-F238E27FC236}">
-                <a16:creationId xmlns:a16="http://schemas.microsoft.com/office/drawing/2014/main" id="{4502ABF1-58DC-6336-E5D0-94F72FD37FA4}"/>
+                <a16:creationId xmlns:a16="http://schemas.microsoft.com/office/drawing/2014/main" id="{B1F865C1-44D2-3F8A-A656-90ADCC7BE1D7}"/>
               </a:ext>
             </a:extLst>
           </p:cNvPr>
@@ -11319,7 +9426,7 @@
             <a:spLocks noGrp="1"/>
           </p:cNvSpPr>
           <p:nvPr>
-            <p:ph type="title"/>
+            <p:ph type="body" sz="quarter" idx="10"/>
           </p:nvPr>
         </p:nvSpPr>
         <p:spPr/>
@@ -11336,7 +9443,7 @@
           <p:cNvPr id="3" name="テキスト プレースホルダー 2">
             <a:extLst>
               <a:ext uri="{FF2B5EF4-FFF2-40B4-BE49-F238E27FC236}">
-                <a16:creationId xmlns:a16="http://schemas.microsoft.com/office/drawing/2014/main" id="{7E4174DB-6566-C376-09A4-8B5D83A8A6C4}"/>
+                <a16:creationId xmlns:a16="http://schemas.microsoft.com/office/drawing/2014/main" id="{1CB1CE41-BCB7-AF4A-9406-ABA2B525D32B}"/>
               </a:ext>
             </a:extLst>
           </p:cNvPr>
@@ -11356,12 +9463,42 @@
           </a:p>
         </p:txBody>
       </p:sp>
-      <p:sp>
-        <p:nvSpPr>
-          <p:cNvPr id="9" name="テキスト プレースホルダー 8">
+    </p:spTree>
+    <p:extLst>
+      <p:ext uri="{BB962C8B-B14F-4D97-AF65-F5344CB8AC3E}">
+        <p14:creationId xmlns:p14="http://schemas.microsoft.com/office/powerpoint/2010/main" val="390027605"/>
+      </p:ext>
+    </p:extLst>
+  </p:cSld>
+  <p:clrMapOvr>
+    <a:masterClrMapping/>
+  </p:clrMapOvr>
+</p:sld>
+</file>
+
+<file path=ppt/slides/slide8.xml><?xml version="1.0" encoding="utf-8"?>
+<p:sld xmlns:a="http://schemas.openxmlformats.org/drawingml/2006/main" xmlns:r="http://schemas.openxmlformats.org/officeDocument/2006/relationships" xmlns:p="http://schemas.openxmlformats.org/presentationml/2006/main" show="0">
+  <p:cSld name="Ending - Azure Blue">
+    <p:spTree>
+      <p:nvGrpSpPr>
+        <p:cNvPr id="1" name=""/>
+        <p:cNvGrpSpPr/>
+        <p:nvPr/>
+      </p:nvGrpSpPr>
+      <p:grpSpPr>
+        <a:xfrm>
+          <a:off x="0" y="0"/>
+          <a:ext cx="0" cy="0"/>
+          <a:chOff x="0" y="0"/>
+          <a:chExt cx="0" cy="0"/>
+        </a:xfrm>
+      </p:grpSpPr>
+      <p:sp>
+        <p:nvSpPr>
+          <p:cNvPr id="2" name="テキスト プレースホルダー 1">
             <a:extLst>
               <a:ext uri="{FF2B5EF4-FFF2-40B4-BE49-F238E27FC236}">
-                <a16:creationId xmlns:a16="http://schemas.microsoft.com/office/drawing/2014/main" id="{BE5BEA4E-97EB-DC0D-EE0F-6B290EDA686F}"/>
+                <a16:creationId xmlns:a16="http://schemas.microsoft.com/office/drawing/2014/main" id="{AFB7B9E2-1B0D-AC31-445D-D178E404A173}"/>
               </a:ext>
             </a:extLst>
           </p:cNvPr>
@@ -11369,7 +9506,7 @@
             <a:spLocks noGrp="1"/>
           </p:cNvSpPr>
           <p:nvPr>
-            <p:ph type="body" sz="quarter" idx="12"/>
+            <p:ph type="body" sz="quarter" idx="10"/>
           </p:nvPr>
         </p:nvSpPr>
         <p:spPr/>
@@ -11383,10 +9520,10 @@
       </p:sp>
       <p:sp>
         <p:nvSpPr>
-          <p:cNvPr id="10" name="テキスト プレースホルダー 9">
+          <p:cNvPr id="3" name="テキスト プレースホルダー 2">
             <a:extLst>
               <a:ext uri="{FF2B5EF4-FFF2-40B4-BE49-F238E27FC236}">
-                <a16:creationId xmlns:a16="http://schemas.microsoft.com/office/drawing/2014/main" id="{0522416F-1BD4-10D9-E95D-2969D495DDED}"/>
+                <a16:creationId xmlns:a16="http://schemas.microsoft.com/office/drawing/2014/main" id="{2E9256F4-85DC-9DA4-25F8-366826F96AF8}"/>
               </a:ext>
             </a:extLst>
           </p:cNvPr>
@@ -11394,7 +9531,7 @@
             <a:spLocks noGrp="1"/>
           </p:cNvSpPr>
           <p:nvPr>
-            <p:ph type="body" sz="quarter" idx="13"/>
+            <p:ph type="body" sz="quarter" idx="11"/>
           </p:nvPr>
         </p:nvSpPr>
         <p:spPr/>
@@ -11406,12 +9543,42 @@
           </a:p>
         </p:txBody>
       </p:sp>
-      <p:sp>
-        <p:nvSpPr>
-          <p:cNvPr id="11" name="テキスト プレースホルダー 10">
+    </p:spTree>
+    <p:extLst>
+      <p:ext uri="{BB962C8B-B14F-4D97-AF65-F5344CB8AC3E}">
+        <p14:creationId xmlns:p14="http://schemas.microsoft.com/office/powerpoint/2010/main" val="1034600959"/>
+      </p:ext>
+    </p:extLst>
+  </p:cSld>
+  <p:clrMapOvr>
+    <a:masterClrMapping/>
+  </p:clrMapOvr>
+</p:sld>
+</file>
+
+<file path=ppt/slides/slide9.xml><?xml version="1.0" encoding="utf-8"?>
+<p:sld xmlns:a="http://schemas.openxmlformats.org/drawingml/2006/main" xmlns:r="http://schemas.openxmlformats.org/officeDocument/2006/relationships" xmlns:p="http://schemas.openxmlformats.org/presentationml/2006/main" show="0">
+  <p:cSld name="Ending - Teal Fresh">
+    <p:spTree>
+      <p:nvGrpSpPr>
+        <p:cNvPr id="1" name=""/>
+        <p:cNvGrpSpPr/>
+        <p:nvPr/>
+      </p:nvGrpSpPr>
+      <p:grpSpPr>
+        <a:xfrm>
+          <a:off x="0" y="0"/>
+          <a:ext cx="0" cy="0"/>
+          <a:chOff x="0" y="0"/>
+          <a:chExt cx="0" cy="0"/>
+        </a:xfrm>
+      </p:grpSpPr>
+      <p:sp>
+        <p:nvSpPr>
+          <p:cNvPr id="2" name="テキスト プレースホルダー 1">
             <a:extLst>
               <a:ext uri="{FF2B5EF4-FFF2-40B4-BE49-F238E27FC236}">
-                <a16:creationId xmlns:a16="http://schemas.microsoft.com/office/drawing/2014/main" id="{37FBAFA2-03F7-238F-F2B3-CE6135C2332F}"/>
+                <a16:creationId xmlns:a16="http://schemas.microsoft.com/office/drawing/2014/main" id="{AF484054-C03B-A000-0748-81E3E6E5A5AC}"/>
               </a:ext>
             </a:extLst>
           </p:cNvPr>
@@ -11419,7 +9586,32 @@
             <a:spLocks noGrp="1"/>
           </p:cNvSpPr>
           <p:nvPr>
-            <p:ph type="body" sz="quarter" idx="14"/>
+            <p:ph type="body" sz="quarter" idx="10"/>
+          </p:nvPr>
+        </p:nvSpPr>
+        <p:spPr/>
+        <p:txBody>
+          <a:bodyPr/>
+          <a:lstStyle/>
+          <a:p>
+            <a:endParaRPr kumimoji="1" lang="ja-JP" altLang="en-US"/>
+          </a:p>
+        </p:txBody>
+      </p:sp>
+      <p:sp>
+        <p:nvSpPr>
+          <p:cNvPr id="3" name="テキスト プレースホルダー 2">
+            <a:extLst>
+              <a:ext uri="{FF2B5EF4-FFF2-40B4-BE49-F238E27FC236}">
+                <a16:creationId xmlns:a16="http://schemas.microsoft.com/office/drawing/2014/main" id="{07D720EB-6B74-4F40-CF17-B3430051845C}"/>
+              </a:ext>
+            </a:extLst>
+          </p:cNvPr>
+          <p:cNvSpPr>
+            <a:spLocks noGrp="1"/>
+          </p:cNvSpPr>
+          <p:nvPr>
+            <p:ph type="body" sz="quarter" idx="11"/>
           </p:nvPr>
         </p:nvSpPr>
         <p:spPr/>
@@ -11434,7 +9626,7 @@
     </p:spTree>
     <p:extLst>
       <p:ext uri="{BB962C8B-B14F-4D97-AF65-F5344CB8AC3E}">
-        <p14:creationId xmlns:p14="http://schemas.microsoft.com/office/powerpoint/2010/main" val="2622561655"/>
+        <p14:creationId xmlns:p14="http://schemas.microsoft.com/office/powerpoint/2010/main" val="486706361"/>
       </p:ext>
     </p:extLst>
   </p:cSld>

--- a/azure-update-customer-pptx/assets/template/azure-update-template.pptx
+++ b/azure-update-customer-pptx/assets/template/azure-update-template.pptx
@@ -7614,7 +7614,9 @@
           <a:bodyPr/>
           <a:lstStyle/>
           <a:p>
-            <a:endParaRPr kumimoji="1" lang="ja-JP" altLang="en-US"/>
+            <a:r>
+              <a:t>{{PUBLICATION_PERIOD}}</a:t>
+            </a:r>
           </a:p>
         </p:txBody>
       </p:sp>
@@ -7803,7 +7805,9 @@
           <a:bodyPr/>
           <a:lstStyle/>
           <a:p>
-            <a:endParaRPr kumimoji="1" lang="ja-JP" altLang="en-US"/>
+            <a:r>
+              <a:t>{{PUBLICATION_PERIOD}}</a:t>
+            </a:r>
           </a:p>
         </p:txBody>
       </p:sp>
@@ -7992,7 +7996,9 @@
           <a:bodyPr/>
           <a:lstStyle/>
           <a:p>
-            <a:endParaRPr kumimoji="1" lang="ja-JP" altLang="en-US"/>
+            <a:r>
+              <a:t>{{PUBLICATION_PERIOD}}</a:t>
+            </a:r>
           </a:p>
         </p:txBody>
       </p:sp>
